--- a/dapr3_lectures/block2_fa/img_sandbox/efa_output.pptx
+++ b/dapr3_lectures/block2_fa/img_sandbox/efa_output.pptx
@@ -6,19 +6,24 @@
   </p:sldMasterIdLst>
   <p:sldIdLst>
     <p:sldId id="261" r:id="rId2"/>
-    <p:sldId id="270" r:id="rId3"/>
-    <p:sldId id="262" r:id="rId4"/>
-    <p:sldId id="267" r:id="rId5"/>
-    <p:sldId id="268" r:id="rId6"/>
-    <p:sldId id="260" r:id="rId7"/>
-    <p:sldId id="263" r:id="rId8"/>
-    <p:sldId id="264" r:id="rId9"/>
-    <p:sldId id="266" r:id="rId10"/>
-    <p:sldId id="269" r:id="rId11"/>
-    <p:sldId id="271" r:id="rId12"/>
-    <p:sldId id="273" r:id="rId13"/>
-    <p:sldId id="274" r:id="rId14"/>
-    <p:sldId id="275" r:id="rId15"/>
+    <p:sldId id="278" r:id="rId3"/>
+    <p:sldId id="281" r:id="rId4"/>
+    <p:sldId id="279" r:id="rId5"/>
+    <p:sldId id="280" r:id="rId6"/>
+    <p:sldId id="282" r:id="rId7"/>
+    <p:sldId id="270" r:id="rId8"/>
+    <p:sldId id="262" r:id="rId9"/>
+    <p:sldId id="267" r:id="rId10"/>
+    <p:sldId id="268" r:id="rId11"/>
+    <p:sldId id="260" r:id="rId12"/>
+    <p:sldId id="263" r:id="rId13"/>
+    <p:sldId id="264" r:id="rId14"/>
+    <p:sldId id="266" r:id="rId15"/>
+    <p:sldId id="269" r:id="rId16"/>
+    <p:sldId id="271" r:id="rId17"/>
+    <p:sldId id="273" r:id="rId18"/>
+    <p:sldId id="274" r:id="rId19"/>
+    <p:sldId id="275" r:id="rId20"/>
   </p:sldIdLst>
   <p:sldSz cx="12192000" cy="6858000"/>
   <p:notesSz cx="6858000" cy="9144000"/>
@@ -274,7 +279,7 @@
           <a:p>
             <a:fld id="{2E7CC89D-3142-46AB-8DEE-A39EF376CEDE}" type="datetimeFigureOut">
               <a:rPr lang="en-GB" smtClean="0"/>
-              <a:t>08/09/2025</a:t>
+              <a:t>15/04/2026</a:t>
             </a:fld>
             <a:endParaRPr lang="en-GB"/>
           </a:p>
@@ -474,7 +479,7 @@
           <a:p>
             <a:fld id="{2E7CC89D-3142-46AB-8DEE-A39EF376CEDE}" type="datetimeFigureOut">
               <a:rPr lang="en-GB" smtClean="0"/>
-              <a:t>08/09/2025</a:t>
+              <a:t>15/04/2026</a:t>
             </a:fld>
             <a:endParaRPr lang="en-GB"/>
           </a:p>
@@ -684,7 +689,7 @@
           <a:p>
             <a:fld id="{2E7CC89D-3142-46AB-8DEE-A39EF376CEDE}" type="datetimeFigureOut">
               <a:rPr lang="en-GB" smtClean="0"/>
-              <a:t>08/09/2025</a:t>
+              <a:t>15/04/2026</a:t>
             </a:fld>
             <a:endParaRPr lang="en-GB"/>
           </a:p>
@@ -884,7 +889,7 @@
           <a:p>
             <a:fld id="{2E7CC89D-3142-46AB-8DEE-A39EF376CEDE}" type="datetimeFigureOut">
               <a:rPr lang="en-GB" smtClean="0"/>
-              <a:t>08/09/2025</a:t>
+              <a:t>15/04/2026</a:t>
             </a:fld>
             <a:endParaRPr lang="en-GB"/>
           </a:p>
@@ -1160,7 +1165,7 @@
           <a:p>
             <a:fld id="{2E7CC89D-3142-46AB-8DEE-A39EF376CEDE}" type="datetimeFigureOut">
               <a:rPr lang="en-GB" smtClean="0"/>
-              <a:t>08/09/2025</a:t>
+              <a:t>15/04/2026</a:t>
             </a:fld>
             <a:endParaRPr lang="en-GB"/>
           </a:p>
@@ -1428,7 +1433,7 @@
           <a:p>
             <a:fld id="{2E7CC89D-3142-46AB-8DEE-A39EF376CEDE}" type="datetimeFigureOut">
               <a:rPr lang="en-GB" smtClean="0"/>
-              <a:t>08/09/2025</a:t>
+              <a:t>15/04/2026</a:t>
             </a:fld>
             <a:endParaRPr lang="en-GB"/>
           </a:p>
@@ -1843,7 +1848,7 @@
           <a:p>
             <a:fld id="{2E7CC89D-3142-46AB-8DEE-A39EF376CEDE}" type="datetimeFigureOut">
               <a:rPr lang="en-GB" smtClean="0"/>
-              <a:t>08/09/2025</a:t>
+              <a:t>15/04/2026</a:t>
             </a:fld>
             <a:endParaRPr lang="en-GB"/>
           </a:p>
@@ -1985,7 +1990,7 @@
           <a:p>
             <a:fld id="{2E7CC89D-3142-46AB-8DEE-A39EF376CEDE}" type="datetimeFigureOut">
               <a:rPr lang="en-GB" smtClean="0"/>
-              <a:t>08/09/2025</a:t>
+              <a:t>15/04/2026</a:t>
             </a:fld>
             <a:endParaRPr lang="en-GB"/>
           </a:p>
@@ -2098,7 +2103,7 @@
           <a:p>
             <a:fld id="{2E7CC89D-3142-46AB-8DEE-A39EF376CEDE}" type="datetimeFigureOut">
               <a:rPr lang="en-GB" smtClean="0"/>
-              <a:t>08/09/2025</a:t>
+              <a:t>15/04/2026</a:t>
             </a:fld>
             <a:endParaRPr lang="en-GB"/>
           </a:p>
@@ -2411,7 +2416,7 @@
           <a:p>
             <a:fld id="{2E7CC89D-3142-46AB-8DEE-A39EF376CEDE}" type="datetimeFigureOut">
               <a:rPr lang="en-GB" smtClean="0"/>
-              <a:t>08/09/2025</a:t>
+              <a:t>15/04/2026</a:t>
             </a:fld>
             <a:endParaRPr lang="en-GB"/>
           </a:p>
@@ -2700,7 +2705,7 @@
           <a:p>
             <a:fld id="{2E7CC89D-3142-46AB-8DEE-A39EF376CEDE}" type="datetimeFigureOut">
               <a:rPr lang="en-GB" smtClean="0"/>
-              <a:t>08/09/2025</a:t>
+              <a:t>15/04/2026</a:t>
             </a:fld>
             <a:endParaRPr lang="en-GB"/>
           </a:p>
@@ -2943,7 +2948,7 @@
           <a:p>
             <a:fld id="{2E7CC89D-3142-46AB-8DEE-A39EF376CEDE}" type="datetimeFigureOut">
               <a:rPr lang="en-GB" smtClean="0"/>
-              <a:t>08/09/2025</a:t>
+              <a:t>15/04/2026</a:t>
             </a:fld>
             <a:endParaRPr lang="en-GB"/>
           </a:p>
@@ -3362,10 +3367,10 @@
       </p:grpSpPr>
       <p:pic>
         <p:nvPicPr>
-          <p:cNvPr id="8" name="Picture 7">
-            <a:extLst>
-              <a:ext uri="{FF2B5EF4-FFF2-40B4-BE49-F238E27FC236}">
-                <a16:creationId xmlns:a16="http://schemas.microsoft.com/office/drawing/2014/main" id="{5E4EA6D4-3C76-45AA-B620-4AAD603B20CC}"/>
+          <p:cNvPr id="5" name="Picture 4">
+            <a:extLst>
+              <a:ext uri="{FF2B5EF4-FFF2-40B4-BE49-F238E27FC236}">
+                <a16:creationId xmlns:a16="http://schemas.microsoft.com/office/drawing/2014/main" id="{F2961E81-2A8B-4E2D-93EF-5F7823990386}"/>
               </a:ext>
             </a:extLst>
           </p:cNvPr>
@@ -3382,8 +3387,8 @@
         </p:blipFill>
         <p:spPr>
           <a:xfrm>
-            <a:off x="2906200" y="412481"/>
-            <a:ext cx="8021169" cy="5982535"/>
+            <a:off x="3331443" y="621446"/>
+            <a:ext cx="8945223" cy="4887007"/>
           </a:xfrm>
           <a:prstGeom prst="rect">
             <a:avLst/>
@@ -3542,8 +3547,8 @@
         </p:nvSpPr>
         <p:spPr>
           <a:xfrm>
-            <a:off x="2712185" y="1559270"/>
-            <a:ext cx="177081" cy="2009430"/>
+            <a:off x="2929467" y="1607762"/>
+            <a:ext cx="401976" cy="2126038"/>
           </a:xfrm>
           <a:prstGeom prst="leftBrace">
             <a:avLst/>
@@ -3591,8 +3596,8 @@
         </p:nvSpPr>
         <p:spPr>
           <a:xfrm>
-            <a:off x="3692743" y="1536701"/>
-            <a:ext cx="1377514" cy="2108200"/>
+            <a:off x="3742267" y="1536701"/>
+            <a:ext cx="1327990" cy="2264420"/>
           </a:xfrm>
           <a:prstGeom prst="rect">
             <a:avLst/>
@@ -3703,7 +3708,7 @@
           <p:cNvPr id="9" name="Picture 8">
             <a:extLst>
               <a:ext uri="{FF2B5EF4-FFF2-40B4-BE49-F238E27FC236}">
-                <a16:creationId xmlns:a16="http://schemas.microsoft.com/office/drawing/2014/main" id="{1DECC0FC-7029-4470-8738-E28D26276DE4}"/>
+                <a16:creationId xmlns:a16="http://schemas.microsoft.com/office/drawing/2014/main" id="{148C49B8-33C3-4F52-BF2E-4C511E028175}"/>
               </a:ext>
             </a:extLst>
           </p:cNvPr>
@@ -3730,10 +3735,10 @@
       </p:pic>
       <p:sp>
         <p:nvSpPr>
-          <p:cNvPr id="13" name="TextBox 12">
-            <a:extLst>
-              <a:ext uri="{FF2B5EF4-FFF2-40B4-BE49-F238E27FC236}">
-                <a16:creationId xmlns:a16="http://schemas.microsoft.com/office/drawing/2014/main" id="{03CBD6FB-C8E6-421C-B8D7-63487AB7B81B}"/>
+          <p:cNvPr id="11" name="TextBox 10">
+            <a:extLst>
+              <a:ext uri="{FF2B5EF4-FFF2-40B4-BE49-F238E27FC236}">
+                <a16:creationId xmlns:a16="http://schemas.microsoft.com/office/drawing/2014/main" id="{493E50EB-A39A-4313-86FF-0F97860C9441}"/>
               </a:ext>
             </a:extLst>
           </p:cNvPr>
@@ -3742,8 +3747,8 @@
         </p:nvSpPr>
         <p:spPr>
           <a:xfrm>
-            <a:off x="6946900" y="5318099"/>
-            <a:ext cx="4279900" cy="1477328"/>
+            <a:off x="7338602" y="1409822"/>
+            <a:ext cx="4281898" cy="1754326"/>
           </a:xfrm>
           <a:prstGeom prst="rect">
             <a:avLst/>
@@ -3762,17 +3767,32 @@
                   <a:srgbClr val="A41AE4"/>
                 </a:solidFill>
               </a:rPr>
-              <a:t>Correlation matrix for the factors. This will depend on whether or not a correlation is estimated (i.e. whether an oblique rotation is used). Shows how related the factors are to one another. </a:t>
-            </a:r>
-          </a:p>
-        </p:txBody>
-      </p:sp>
-      <p:sp>
-        <p:nvSpPr>
-          <p:cNvPr id="3" name="Rectangle 2">
-            <a:extLst>
-              <a:ext uri="{FF2B5EF4-FFF2-40B4-BE49-F238E27FC236}">
-                <a16:creationId xmlns:a16="http://schemas.microsoft.com/office/drawing/2014/main" id="{5C0699FC-5F6A-463E-8040-0B41C1910E71}"/>
+              <a:t>The extent to which a given item loads on to a single factor vs onto multiple factors is termed ‘complexity’. </a:t>
+            </a:r>
+          </a:p>
+          <a:p>
+            <a:r>
+              <a:rPr lang="en-GB" dirty="0">
+                <a:solidFill>
+                  <a:srgbClr val="A41AE4"/>
+                </a:solidFill>
+              </a:rPr>
+              <a:t>It equals 1 if an item loads only on one factor, 2 if it loads evenly on 2 factors, and so on. </a:t>
+            </a:r>
+            <a:endParaRPr lang="en-GB" sz="1400" dirty="0">
+              <a:solidFill>
+                <a:srgbClr val="A41AE4"/>
+              </a:solidFill>
+            </a:endParaRPr>
+          </a:p>
+        </p:txBody>
+      </p:sp>
+      <p:sp>
+        <p:nvSpPr>
+          <p:cNvPr id="5" name="Rectangle 4">
+            <a:extLst>
+              <a:ext uri="{FF2B5EF4-FFF2-40B4-BE49-F238E27FC236}">
+                <a16:creationId xmlns:a16="http://schemas.microsoft.com/office/drawing/2014/main" id="{B1057B80-52F8-4291-8FFC-AF3B21F9FA65}"/>
               </a:ext>
             </a:extLst>
           </p:cNvPr>
@@ -3780,9 +3800,9 @@
           <p:nvPr/>
         </p:nvSpPr>
         <p:spPr>
-          <a:xfrm flipV="1">
-            <a:off x="3352799" y="5880100"/>
-            <a:ext cx="1112287" cy="480095"/>
+          <a:xfrm>
+            <a:off x="6197600" y="1536701"/>
+            <a:ext cx="546100" cy="2108200"/>
           </a:xfrm>
           <a:prstGeom prst="rect">
             <a:avLst/>
@@ -3824,7 +3844,7 @@
           <p:cNvPr id="6" name="Picture 5">
             <a:extLst>
               <a:ext uri="{FF2B5EF4-FFF2-40B4-BE49-F238E27FC236}">
-                <a16:creationId xmlns:a16="http://schemas.microsoft.com/office/drawing/2014/main" id="{CED2D91F-214D-4B81-AA7E-850016888388}"/>
+                <a16:creationId xmlns:a16="http://schemas.microsoft.com/office/drawing/2014/main" id="{A675734B-43B5-4209-A920-CFC726D6529F}"/>
               </a:ext>
             </a:extLst>
           </p:cNvPr>
@@ -3851,10 +3871,10 @@
       </p:pic>
       <p:sp>
         <p:nvSpPr>
-          <p:cNvPr id="7" name="TextBox 6">
-            <a:extLst>
-              <a:ext uri="{FF2B5EF4-FFF2-40B4-BE49-F238E27FC236}">
-                <a16:creationId xmlns:a16="http://schemas.microsoft.com/office/drawing/2014/main" id="{C57D9072-7134-4AC0-902E-236F2B6DC83B}"/>
+          <p:cNvPr id="8" name="TextBox 7">
+            <a:extLst>
+              <a:ext uri="{FF2B5EF4-FFF2-40B4-BE49-F238E27FC236}">
+                <a16:creationId xmlns:a16="http://schemas.microsoft.com/office/drawing/2014/main" id="{F1F1BB60-76C3-42C7-886D-6F0159D8DADD}"/>
               </a:ext>
             </a:extLst>
           </p:cNvPr>
@@ -3883,7 +3903,7 @@
                   <a:srgbClr val="A41AE4"/>
                 </a:solidFill>
               </a:rPr>
-              <a:t>FACTOR CORRELATIONS</a:t>
+              <a:t>COMPLEXITY</a:t>
             </a:r>
           </a:p>
         </p:txBody>
@@ -3891,7 +3911,7 @@
     </p:spTree>
     <p:extLst>
       <p:ext uri="{BB962C8B-B14F-4D97-AF65-F5344CB8AC3E}">
-        <p14:creationId xmlns:p14="http://schemas.microsoft.com/office/powerpoint/2010/main" val="4177924006"/>
+        <p14:creationId xmlns:p14="http://schemas.microsoft.com/office/powerpoint/2010/main" val="2075510392"/>
       </p:ext>
     </p:extLst>
   </p:cSld>
@@ -3920,6 +3940,1276 @@
       </p:grpSpPr>
       <p:pic>
         <p:nvPicPr>
+          <p:cNvPr id="11" name="Picture 10">
+            <a:extLst>
+              <a:ext uri="{FF2B5EF4-FFF2-40B4-BE49-F238E27FC236}">
+                <a16:creationId xmlns:a16="http://schemas.microsoft.com/office/drawing/2014/main" id="{A71ABA2F-69E9-4566-B57A-9652F0B275D8}"/>
+              </a:ext>
+            </a:extLst>
+          </p:cNvPr>
+          <p:cNvPicPr>
+            <a:picLocks noChangeAspect="1"/>
+          </p:cNvPicPr>
+          <p:nvPr/>
+        </p:nvPicPr>
+        <p:blipFill>
+          <a:blip r:embed="rId2"/>
+          <a:stretch>
+            <a:fillRect/>
+          </a:stretch>
+        </p:blipFill>
+        <p:spPr>
+          <a:xfrm>
+            <a:off x="2906200" y="412481"/>
+            <a:ext cx="8021169" cy="5982535"/>
+          </a:xfrm>
+          <a:prstGeom prst="rect">
+            <a:avLst/>
+          </a:prstGeom>
+        </p:spPr>
+      </p:pic>
+      <p:sp>
+        <p:nvSpPr>
+          <p:cNvPr id="10" name="TextBox 9">
+            <a:extLst>
+              <a:ext uri="{FF2B5EF4-FFF2-40B4-BE49-F238E27FC236}">
+                <a16:creationId xmlns:a16="http://schemas.microsoft.com/office/drawing/2014/main" id="{8A3C40CD-B6C6-4273-BE13-3DB5447020D2}"/>
+              </a:ext>
+            </a:extLst>
+          </p:cNvPr>
+          <p:cNvSpPr txBox="1"/>
+          <p:nvPr/>
+        </p:nvSpPr>
+        <p:spPr>
+          <a:xfrm>
+            <a:off x="7405958" y="3009482"/>
+            <a:ext cx="4659042" cy="2031325"/>
+          </a:xfrm>
+          <a:prstGeom prst="rect">
+            <a:avLst/>
+          </a:prstGeom>
+          <a:noFill/>
+        </p:spPr>
+        <p:txBody>
+          <a:bodyPr wrap="square" rtlCol="0">
+            <a:spAutoFit/>
+          </a:bodyPr>
+          <a:lstStyle/>
+          <a:p>
+            <a:r>
+              <a:rPr lang="en-GB" dirty="0">
+                <a:solidFill>
+                  <a:srgbClr val="A41AE4"/>
+                </a:solidFill>
+              </a:rPr>
+              <a:t>Square all the loadings for each factor and add them up. This gives you the “SS loadings”. </a:t>
+            </a:r>
+          </a:p>
+          <a:p>
+            <a:endParaRPr lang="en-GB" dirty="0">
+              <a:solidFill>
+                <a:srgbClr val="A41AE4"/>
+              </a:solidFill>
+            </a:endParaRPr>
+          </a:p>
+          <a:p>
+            <a:r>
+              <a:rPr lang="en-GB" dirty="0">
+                <a:solidFill>
+                  <a:srgbClr val="A41AE4"/>
+                </a:solidFill>
+              </a:rPr>
+              <a:t>These are the same as the eigenvalues unless an oblique rotation is used. As the variance in each item is scaled to be 1, the total variance in the data is equal to the number of items. </a:t>
+            </a:r>
+          </a:p>
+        </p:txBody>
+      </p:sp>
+      <p:sp>
+        <p:nvSpPr>
+          <p:cNvPr id="2" name="Rectangle 1">
+            <a:extLst>
+              <a:ext uri="{FF2B5EF4-FFF2-40B4-BE49-F238E27FC236}">
+                <a16:creationId xmlns:a16="http://schemas.microsoft.com/office/drawing/2014/main" id="{C2BCBBA2-6170-4304-B738-4C2A80CF295E}"/>
+              </a:ext>
+            </a:extLst>
+          </p:cNvPr>
+          <p:cNvSpPr/>
+          <p:nvPr/>
+        </p:nvSpPr>
+        <p:spPr>
+          <a:xfrm>
+            <a:off x="3733800" y="1524000"/>
+            <a:ext cx="660400" cy="2146300"/>
+          </a:xfrm>
+          <a:prstGeom prst="rect">
+            <a:avLst/>
+          </a:prstGeom>
+          <a:noFill/>
+          <a:ln>
+            <a:solidFill>
+              <a:srgbClr val="A41AE4"/>
+            </a:solidFill>
+          </a:ln>
+        </p:spPr>
+        <p:style>
+          <a:lnRef idx="2">
+            <a:schemeClr val="accent1">
+              <a:shade val="50000"/>
+            </a:schemeClr>
+          </a:lnRef>
+          <a:fillRef idx="1">
+            <a:schemeClr val="accent1"/>
+          </a:fillRef>
+          <a:effectRef idx="0">
+            <a:schemeClr val="accent1"/>
+          </a:effectRef>
+          <a:fontRef idx="minor">
+            <a:schemeClr val="lt1"/>
+          </a:fontRef>
+        </p:style>
+        <p:txBody>
+          <a:bodyPr rtlCol="0" anchor="ctr"/>
+          <a:lstStyle/>
+          <a:p>
+            <a:pPr algn="ctr"/>
+            <a:endParaRPr lang="en-GB"/>
+          </a:p>
+        </p:txBody>
+      </p:sp>
+      <p:sp>
+        <p:nvSpPr>
+          <p:cNvPr id="3" name="Rectangle 2">
+            <a:extLst>
+              <a:ext uri="{FF2B5EF4-FFF2-40B4-BE49-F238E27FC236}">
+                <a16:creationId xmlns:a16="http://schemas.microsoft.com/office/drawing/2014/main" id="{5C0699FC-5F6A-463E-8040-0B41C1910E71}"/>
+              </a:ext>
+            </a:extLst>
+          </p:cNvPr>
+          <p:cNvSpPr/>
+          <p:nvPr/>
+        </p:nvSpPr>
+        <p:spPr>
+          <a:xfrm>
+            <a:off x="5410200" y="4013200"/>
+            <a:ext cx="558800" cy="292100"/>
+          </a:xfrm>
+          <a:prstGeom prst="rect">
+            <a:avLst/>
+          </a:prstGeom>
+          <a:noFill/>
+          <a:ln>
+            <a:solidFill>
+              <a:srgbClr val="A41AE4"/>
+            </a:solidFill>
+          </a:ln>
+        </p:spPr>
+        <p:style>
+          <a:lnRef idx="2">
+            <a:schemeClr val="accent1">
+              <a:shade val="50000"/>
+            </a:schemeClr>
+          </a:lnRef>
+          <a:fillRef idx="1">
+            <a:schemeClr val="accent1"/>
+          </a:fillRef>
+          <a:effectRef idx="0">
+            <a:schemeClr val="accent1"/>
+          </a:effectRef>
+          <a:fontRef idx="minor">
+            <a:schemeClr val="lt1"/>
+          </a:fontRef>
+        </p:style>
+        <p:txBody>
+          <a:bodyPr rtlCol="0" anchor="ctr"/>
+          <a:lstStyle/>
+          <a:p>
+            <a:pPr algn="ctr"/>
+            <a:endParaRPr lang="en-GB"/>
+          </a:p>
+        </p:txBody>
+      </p:sp>
+      <p:cxnSp>
+        <p:nvCxnSpPr>
+          <p:cNvPr id="5" name="Straight Connector 4">
+            <a:extLst>
+              <a:ext uri="{FF2B5EF4-FFF2-40B4-BE49-F238E27FC236}">
+                <a16:creationId xmlns:a16="http://schemas.microsoft.com/office/drawing/2014/main" id="{E615AC58-D23A-4AEB-8717-002173D23750}"/>
+              </a:ext>
+            </a:extLst>
+          </p:cNvPr>
+          <p:cNvCxnSpPr>
+            <a:stCxn id="2" idx="2"/>
+            <a:endCxn id="3" idx="1"/>
+          </p:cNvCxnSpPr>
+          <p:nvPr/>
+        </p:nvCxnSpPr>
+        <p:spPr>
+          <a:xfrm>
+            <a:off x="4064000" y="3670300"/>
+            <a:ext cx="1346200" cy="488950"/>
+          </a:xfrm>
+          <a:prstGeom prst="line">
+            <a:avLst/>
+          </a:prstGeom>
+          <a:ln>
+            <a:solidFill>
+              <a:srgbClr val="A41AE4"/>
+            </a:solidFill>
+          </a:ln>
+        </p:spPr>
+        <p:style>
+          <a:lnRef idx="1">
+            <a:schemeClr val="accent1"/>
+          </a:lnRef>
+          <a:fillRef idx="0">
+            <a:schemeClr val="accent1"/>
+          </a:fillRef>
+          <a:effectRef idx="0">
+            <a:schemeClr val="accent1"/>
+          </a:effectRef>
+          <a:fontRef idx="minor">
+            <a:schemeClr val="tx1"/>
+          </a:fontRef>
+        </p:style>
+      </p:cxnSp>
+      <p:pic>
+        <p:nvPicPr>
+          <p:cNvPr id="7" name="Picture 6">
+            <a:extLst>
+              <a:ext uri="{FF2B5EF4-FFF2-40B4-BE49-F238E27FC236}">
+                <a16:creationId xmlns:a16="http://schemas.microsoft.com/office/drawing/2014/main" id="{ADB236A3-9512-4AB6-97C3-780881DE678C}"/>
+              </a:ext>
+            </a:extLst>
+          </p:cNvPr>
+          <p:cNvPicPr>
+            <a:picLocks noChangeAspect="1"/>
+          </p:cNvPicPr>
+          <p:nvPr/>
+        </p:nvPicPr>
+        <p:blipFill>
+          <a:blip r:embed="rId3"/>
+          <a:stretch>
+            <a:fillRect/>
+          </a:stretch>
+        </p:blipFill>
+        <p:spPr>
+          <a:xfrm>
+            <a:off x="2918865" y="6438549"/>
+            <a:ext cx="485843" cy="257211"/>
+          </a:xfrm>
+          <a:prstGeom prst="rect">
+            <a:avLst/>
+          </a:prstGeom>
+        </p:spPr>
+      </p:pic>
+      <p:sp>
+        <p:nvSpPr>
+          <p:cNvPr id="8" name="TextBox 7">
+            <a:extLst>
+              <a:ext uri="{FF2B5EF4-FFF2-40B4-BE49-F238E27FC236}">
+                <a16:creationId xmlns:a16="http://schemas.microsoft.com/office/drawing/2014/main" id="{9A5B0410-193E-4331-BCA5-805FE3C6F857}"/>
+              </a:ext>
+            </a:extLst>
+          </p:cNvPr>
+          <p:cNvSpPr txBox="1"/>
+          <p:nvPr/>
+        </p:nvSpPr>
+        <p:spPr>
+          <a:xfrm>
+            <a:off x="75499" y="-25167"/>
+            <a:ext cx="5893501" cy="461665"/>
+          </a:xfrm>
+          <a:prstGeom prst="rect">
+            <a:avLst/>
+          </a:prstGeom>
+          <a:noFill/>
+        </p:spPr>
+        <p:txBody>
+          <a:bodyPr wrap="square" rtlCol="0">
+            <a:spAutoFit/>
+          </a:bodyPr>
+          <a:lstStyle/>
+          <a:p>
+            <a:r>
+              <a:rPr lang="en-GB" sz="2400" u="sng" dirty="0">
+                <a:solidFill>
+                  <a:srgbClr val="A41AE4"/>
+                </a:solidFill>
+              </a:rPr>
+              <a:t>SS Loadings &amp; “Variance Accounted For”</a:t>
+            </a:r>
+          </a:p>
+        </p:txBody>
+      </p:sp>
+    </p:spTree>
+    <p:extLst>
+      <p:ext uri="{BB962C8B-B14F-4D97-AF65-F5344CB8AC3E}">
+        <p14:creationId xmlns:p14="http://schemas.microsoft.com/office/powerpoint/2010/main" val="2648255724"/>
+      </p:ext>
+    </p:extLst>
+  </p:cSld>
+  <p:clrMapOvr>
+    <a:masterClrMapping/>
+  </p:clrMapOvr>
+</p:sld>
+</file>
+
+<file path=ppt/slides/slide12.xml><?xml version="1.0" encoding="utf-8"?>
+<p:sld xmlns:a="http://schemas.openxmlformats.org/drawingml/2006/main" xmlns:r="http://schemas.openxmlformats.org/officeDocument/2006/relationships" xmlns:p="http://schemas.openxmlformats.org/presentationml/2006/main">
+  <p:cSld>
+    <p:spTree>
+      <p:nvGrpSpPr>
+        <p:cNvPr id="1" name=""/>
+        <p:cNvGrpSpPr/>
+        <p:nvPr/>
+      </p:nvGrpSpPr>
+      <p:grpSpPr>
+        <a:xfrm>
+          <a:off x="0" y="0"/>
+          <a:ext cx="0" cy="0"/>
+          <a:chOff x="0" y="0"/>
+          <a:chExt cx="0" cy="0"/>
+        </a:xfrm>
+      </p:grpSpPr>
+      <p:pic>
+        <p:nvPicPr>
+          <p:cNvPr id="8" name="Picture 7">
+            <a:extLst>
+              <a:ext uri="{FF2B5EF4-FFF2-40B4-BE49-F238E27FC236}">
+                <a16:creationId xmlns:a16="http://schemas.microsoft.com/office/drawing/2014/main" id="{3770CDBE-8198-4526-B184-889BAED407B7}"/>
+              </a:ext>
+            </a:extLst>
+          </p:cNvPr>
+          <p:cNvPicPr>
+            <a:picLocks noChangeAspect="1"/>
+          </p:cNvPicPr>
+          <p:nvPr/>
+        </p:nvPicPr>
+        <p:blipFill>
+          <a:blip r:embed="rId2"/>
+          <a:stretch>
+            <a:fillRect/>
+          </a:stretch>
+        </p:blipFill>
+        <p:spPr>
+          <a:xfrm>
+            <a:off x="2906200" y="412481"/>
+            <a:ext cx="8021169" cy="5982535"/>
+          </a:xfrm>
+          <a:prstGeom prst="rect">
+            <a:avLst/>
+          </a:prstGeom>
+        </p:spPr>
+      </p:pic>
+      <p:sp>
+        <p:nvSpPr>
+          <p:cNvPr id="12" name="TextBox 11">
+            <a:extLst>
+              <a:ext uri="{FF2B5EF4-FFF2-40B4-BE49-F238E27FC236}">
+                <a16:creationId xmlns:a16="http://schemas.microsoft.com/office/drawing/2014/main" id="{E7768DC0-53D9-42C6-904C-602DA558CA6A}"/>
+              </a:ext>
+            </a:extLst>
+          </p:cNvPr>
+          <p:cNvSpPr txBox="1"/>
+          <p:nvPr/>
+        </p:nvSpPr>
+        <p:spPr>
+          <a:xfrm>
+            <a:off x="7329758" y="3818756"/>
+            <a:ext cx="4550916" cy="1354217"/>
+          </a:xfrm>
+          <a:prstGeom prst="rect">
+            <a:avLst/>
+          </a:prstGeom>
+          <a:noFill/>
+        </p:spPr>
+        <p:txBody>
+          <a:bodyPr wrap="square" rtlCol="0">
+            <a:spAutoFit/>
+          </a:bodyPr>
+          <a:lstStyle/>
+          <a:p>
+            <a:r>
+              <a:rPr lang="en-GB" dirty="0">
+                <a:solidFill>
+                  <a:srgbClr val="A41AE4"/>
+                </a:solidFill>
+              </a:rPr>
+              <a:t>SS loadings divided by number of items gives the proportion of variance in the data explained by each factor</a:t>
+            </a:r>
+          </a:p>
+          <a:p>
+            <a:r>
+              <a:rPr lang="en-GB" sz="1400" dirty="0">
+                <a:solidFill>
+                  <a:srgbClr val="A41AE4"/>
+                </a:solidFill>
+              </a:rPr>
+              <a:t>e.g., 1.73/9 = 0.19</a:t>
+            </a:r>
+          </a:p>
+          <a:p>
+            <a:r>
+              <a:rPr lang="en-GB" sz="1400" dirty="0">
+                <a:solidFill>
+                  <a:srgbClr val="A41AE4"/>
+                </a:solidFill>
+              </a:rPr>
+              <a:t>19% of the variance is explained by Factor 1</a:t>
+            </a:r>
+          </a:p>
+        </p:txBody>
+      </p:sp>
+      <p:sp>
+        <p:nvSpPr>
+          <p:cNvPr id="11" name="Rectangle 10">
+            <a:extLst>
+              <a:ext uri="{FF2B5EF4-FFF2-40B4-BE49-F238E27FC236}">
+                <a16:creationId xmlns:a16="http://schemas.microsoft.com/office/drawing/2014/main" id="{1C7B9257-FBDF-46EF-874C-7F3089725E1E}"/>
+              </a:ext>
+            </a:extLst>
+          </p:cNvPr>
+          <p:cNvSpPr/>
+          <p:nvPr/>
+        </p:nvSpPr>
+        <p:spPr>
+          <a:xfrm flipV="1">
+            <a:off x="5410199" y="4279899"/>
+            <a:ext cx="1112287" cy="238796"/>
+          </a:xfrm>
+          <a:prstGeom prst="rect">
+            <a:avLst/>
+          </a:prstGeom>
+          <a:noFill/>
+          <a:ln>
+            <a:solidFill>
+              <a:srgbClr val="A41AE4"/>
+            </a:solidFill>
+          </a:ln>
+        </p:spPr>
+        <p:style>
+          <a:lnRef idx="2">
+            <a:schemeClr val="accent1">
+              <a:shade val="50000"/>
+            </a:schemeClr>
+          </a:lnRef>
+          <a:fillRef idx="1">
+            <a:schemeClr val="accent1"/>
+          </a:fillRef>
+          <a:effectRef idx="0">
+            <a:schemeClr val="accent1"/>
+          </a:effectRef>
+          <a:fontRef idx="minor">
+            <a:schemeClr val="lt1"/>
+          </a:fontRef>
+        </p:style>
+        <p:txBody>
+          <a:bodyPr rtlCol="0" anchor="ctr"/>
+          <a:lstStyle/>
+          <a:p>
+            <a:pPr algn="ctr"/>
+            <a:endParaRPr lang="en-GB"/>
+          </a:p>
+        </p:txBody>
+      </p:sp>
+      <p:pic>
+        <p:nvPicPr>
+          <p:cNvPr id="5" name="Picture 4">
+            <a:extLst>
+              <a:ext uri="{FF2B5EF4-FFF2-40B4-BE49-F238E27FC236}">
+                <a16:creationId xmlns:a16="http://schemas.microsoft.com/office/drawing/2014/main" id="{02A20D3E-4952-4F53-8BBF-214842A48A50}"/>
+              </a:ext>
+            </a:extLst>
+          </p:cNvPr>
+          <p:cNvPicPr>
+            <a:picLocks noChangeAspect="1"/>
+          </p:cNvPicPr>
+          <p:nvPr/>
+        </p:nvPicPr>
+        <p:blipFill>
+          <a:blip r:embed="rId3"/>
+          <a:stretch>
+            <a:fillRect/>
+          </a:stretch>
+        </p:blipFill>
+        <p:spPr>
+          <a:xfrm>
+            <a:off x="2918865" y="6438549"/>
+            <a:ext cx="485843" cy="257211"/>
+          </a:xfrm>
+          <a:prstGeom prst="rect">
+            <a:avLst/>
+          </a:prstGeom>
+        </p:spPr>
+      </p:pic>
+      <p:sp>
+        <p:nvSpPr>
+          <p:cNvPr id="6" name="TextBox 5">
+            <a:extLst>
+              <a:ext uri="{FF2B5EF4-FFF2-40B4-BE49-F238E27FC236}">
+                <a16:creationId xmlns:a16="http://schemas.microsoft.com/office/drawing/2014/main" id="{45649766-D3FE-469C-A3EF-FC72C107E4C3}"/>
+              </a:ext>
+            </a:extLst>
+          </p:cNvPr>
+          <p:cNvSpPr txBox="1"/>
+          <p:nvPr/>
+        </p:nvSpPr>
+        <p:spPr>
+          <a:xfrm>
+            <a:off x="75499" y="-25167"/>
+            <a:ext cx="5893501" cy="461665"/>
+          </a:xfrm>
+          <a:prstGeom prst="rect">
+            <a:avLst/>
+          </a:prstGeom>
+          <a:noFill/>
+        </p:spPr>
+        <p:txBody>
+          <a:bodyPr wrap="square" rtlCol="0">
+            <a:spAutoFit/>
+          </a:bodyPr>
+          <a:lstStyle/>
+          <a:p>
+            <a:r>
+              <a:rPr lang="en-GB" sz="2400" u="sng" dirty="0">
+                <a:solidFill>
+                  <a:srgbClr val="A41AE4"/>
+                </a:solidFill>
+              </a:rPr>
+              <a:t>SS Loadings &amp; “Variance Accounted For”</a:t>
+            </a:r>
+          </a:p>
+        </p:txBody>
+      </p:sp>
+    </p:spTree>
+    <p:extLst>
+      <p:ext uri="{BB962C8B-B14F-4D97-AF65-F5344CB8AC3E}">
+        <p14:creationId xmlns:p14="http://schemas.microsoft.com/office/powerpoint/2010/main" val="2553950230"/>
+      </p:ext>
+    </p:extLst>
+  </p:cSld>
+  <p:clrMapOvr>
+    <a:masterClrMapping/>
+  </p:clrMapOvr>
+</p:sld>
+</file>
+
+<file path=ppt/slides/slide13.xml><?xml version="1.0" encoding="utf-8"?>
+<p:sld xmlns:a="http://schemas.openxmlformats.org/drawingml/2006/main" xmlns:r="http://schemas.openxmlformats.org/officeDocument/2006/relationships" xmlns:p="http://schemas.openxmlformats.org/presentationml/2006/main">
+  <p:cSld>
+    <p:spTree>
+      <p:nvGrpSpPr>
+        <p:cNvPr id="1" name=""/>
+        <p:cNvGrpSpPr/>
+        <p:nvPr/>
+      </p:nvGrpSpPr>
+      <p:grpSpPr>
+        <a:xfrm>
+          <a:off x="0" y="0"/>
+          <a:ext cx="0" cy="0"/>
+          <a:chOff x="0" y="0"/>
+          <a:chExt cx="0" cy="0"/>
+        </a:xfrm>
+      </p:grpSpPr>
+      <p:pic>
+        <p:nvPicPr>
+          <p:cNvPr id="8" name="Picture 7">
+            <a:extLst>
+              <a:ext uri="{FF2B5EF4-FFF2-40B4-BE49-F238E27FC236}">
+                <a16:creationId xmlns:a16="http://schemas.microsoft.com/office/drawing/2014/main" id="{4B7817CB-8BEB-497F-8C9F-3F28FA94A02E}"/>
+              </a:ext>
+            </a:extLst>
+          </p:cNvPr>
+          <p:cNvPicPr>
+            <a:picLocks noChangeAspect="1"/>
+          </p:cNvPicPr>
+          <p:nvPr/>
+        </p:nvPicPr>
+        <p:blipFill>
+          <a:blip r:embed="rId2"/>
+          <a:stretch>
+            <a:fillRect/>
+          </a:stretch>
+        </p:blipFill>
+        <p:spPr>
+          <a:xfrm>
+            <a:off x="2906200" y="412481"/>
+            <a:ext cx="8021169" cy="5982535"/>
+          </a:xfrm>
+          <a:prstGeom prst="rect">
+            <a:avLst/>
+          </a:prstGeom>
+        </p:spPr>
+      </p:pic>
+      <p:sp>
+        <p:nvSpPr>
+          <p:cNvPr id="13" name="TextBox 12">
+            <a:extLst>
+              <a:ext uri="{FF2B5EF4-FFF2-40B4-BE49-F238E27FC236}">
+                <a16:creationId xmlns:a16="http://schemas.microsoft.com/office/drawing/2014/main" id="{03CBD6FB-C8E6-421C-B8D7-63487AB7B81B}"/>
+              </a:ext>
+            </a:extLst>
+          </p:cNvPr>
+          <p:cNvSpPr txBox="1"/>
+          <p:nvPr/>
+        </p:nvSpPr>
+        <p:spPr>
+          <a:xfrm>
+            <a:off x="7329758" y="3895699"/>
+            <a:ext cx="3973242" cy="1138773"/>
+          </a:xfrm>
+          <a:prstGeom prst="rect">
+            <a:avLst/>
+          </a:prstGeom>
+          <a:noFill/>
+        </p:spPr>
+        <p:txBody>
+          <a:bodyPr wrap="square" rtlCol="0">
+            <a:spAutoFit/>
+          </a:bodyPr>
+          <a:lstStyle/>
+          <a:p>
+            <a:r>
+              <a:rPr lang="en-GB" dirty="0">
+                <a:solidFill>
+                  <a:srgbClr val="A41AE4"/>
+                </a:solidFill>
+              </a:rPr>
+              <a:t>Taking each factor sequentially, we can calculate the cumulative variance explained. </a:t>
+            </a:r>
+          </a:p>
+          <a:p>
+            <a:r>
+              <a:rPr lang="en-GB" sz="1400" dirty="0">
+                <a:solidFill>
+                  <a:srgbClr val="A41AE4"/>
+                </a:solidFill>
+              </a:rPr>
+              <a:t>e.g., 0.19+0.14 = 0.33</a:t>
+            </a:r>
+          </a:p>
+        </p:txBody>
+      </p:sp>
+      <p:sp>
+        <p:nvSpPr>
+          <p:cNvPr id="3" name="Rectangle 2">
+            <a:extLst>
+              <a:ext uri="{FF2B5EF4-FFF2-40B4-BE49-F238E27FC236}">
+                <a16:creationId xmlns:a16="http://schemas.microsoft.com/office/drawing/2014/main" id="{5C0699FC-5F6A-463E-8040-0B41C1910E71}"/>
+              </a:ext>
+            </a:extLst>
+          </p:cNvPr>
+          <p:cNvSpPr/>
+          <p:nvPr/>
+        </p:nvSpPr>
+        <p:spPr>
+          <a:xfrm flipV="1">
+            <a:off x="5410199" y="4508499"/>
+            <a:ext cx="1112287" cy="238796"/>
+          </a:xfrm>
+          <a:prstGeom prst="rect">
+            <a:avLst/>
+          </a:prstGeom>
+          <a:noFill/>
+          <a:ln>
+            <a:solidFill>
+              <a:srgbClr val="A41AE4"/>
+            </a:solidFill>
+          </a:ln>
+        </p:spPr>
+        <p:style>
+          <a:lnRef idx="2">
+            <a:schemeClr val="accent1">
+              <a:shade val="50000"/>
+            </a:schemeClr>
+          </a:lnRef>
+          <a:fillRef idx="1">
+            <a:schemeClr val="accent1"/>
+          </a:fillRef>
+          <a:effectRef idx="0">
+            <a:schemeClr val="accent1"/>
+          </a:effectRef>
+          <a:fontRef idx="minor">
+            <a:schemeClr val="lt1"/>
+          </a:fontRef>
+        </p:style>
+        <p:txBody>
+          <a:bodyPr rtlCol="0" anchor="ctr"/>
+          <a:lstStyle/>
+          <a:p>
+            <a:pPr algn="ctr"/>
+            <a:endParaRPr lang="en-GB"/>
+          </a:p>
+        </p:txBody>
+      </p:sp>
+      <p:pic>
+        <p:nvPicPr>
+          <p:cNvPr id="5" name="Picture 4">
+            <a:extLst>
+              <a:ext uri="{FF2B5EF4-FFF2-40B4-BE49-F238E27FC236}">
+                <a16:creationId xmlns:a16="http://schemas.microsoft.com/office/drawing/2014/main" id="{43A28AA3-C0E9-4930-B515-641C28016221}"/>
+              </a:ext>
+            </a:extLst>
+          </p:cNvPr>
+          <p:cNvPicPr>
+            <a:picLocks noChangeAspect="1"/>
+          </p:cNvPicPr>
+          <p:nvPr/>
+        </p:nvPicPr>
+        <p:blipFill>
+          <a:blip r:embed="rId3"/>
+          <a:stretch>
+            <a:fillRect/>
+          </a:stretch>
+        </p:blipFill>
+        <p:spPr>
+          <a:xfrm>
+            <a:off x="2918865" y="6438549"/>
+            <a:ext cx="485843" cy="257211"/>
+          </a:xfrm>
+          <a:prstGeom prst="rect">
+            <a:avLst/>
+          </a:prstGeom>
+        </p:spPr>
+      </p:pic>
+      <p:sp>
+        <p:nvSpPr>
+          <p:cNvPr id="6" name="TextBox 5">
+            <a:extLst>
+              <a:ext uri="{FF2B5EF4-FFF2-40B4-BE49-F238E27FC236}">
+                <a16:creationId xmlns:a16="http://schemas.microsoft.com/office/drawing/2014/main" id="{89EA3848-CDA2-4120-9FB3-C7588774A641}"/>
+              </a:ext>
+            </a:extLst>
+          </p:cNvPr>
+          <p:cNvSpPr txBox="1"/>
+          <p:nvPr/>
+        </p:nvSpPr>
+        <p:spPr>
+          <a:xfrm>
+            <a:off x="75499" y="-25167"/>
+            <a:ext cx="5893501" cy="461665"/>
+          </a:xfrm>
+          <a:prstGeom prst="rect">
+            <a:avLst/>
+          </a:prstGeom>
+          <a:noFill/>
+        </p:spPr>
+        <p:txBody>
+          <a:bodyPr wrap="square" rtlCol="0">
+            <a:spAutoFit/>
+          </a:bodyPr>
+          <a:lstStyle/>
+          <a:p>
+            <a:r>
+              <a:rPr lang="en-GB" sz="2400" u="sng" dirty="0">
+                <a:solidFill>
+                  <a:srgbClr val="A41AE4"/>
+                </a:solidFill>
+              </a:rPr>
+              <a:t>SS Loadings &amp; “Variance Accounted For”</a:t>
+            </a:r>
+          </a:p>
+        </p:txBody>
+      </p:sp>
+    </p:spTree>
+    <p:extLst>
+      <p:ext uri="{BB962C8B-B14F-4D97-AF65-F5344CB8AC3E}">
+        <p14:creationId xmlns:p14="http://schemas.microsoft.com/office/powerpoint/2010/main" val="1147962777"/>
+      </p:ext>
+    </p:extLst>
+  </p:cSld>
+  <p:clrMapOvr>
+    <a:masterClrMapping/>
+  </p:clrMapOvr>
+</p:sld>
+</file>
+
+<file path=ppt/slides/slide14.xml><?xml version="1.0" encoding="utf-8"?>
+<p:sld xmlns:a="http://schemas.openxmlformats.org/drawingml/2006/main" xmlns:r="http://schemas.openxmlformats.org/officeDocument/2006/relationships" xmlns:p="http://schemas.openxmlformats.org/presentationml/2006/main">
+  <p:cSld>
+    <p:spTree>
+      <p:nvGrpSpPr>
+        <p:cNvPr id="1" name=""/>
+        <p:cNvGrpSpPr/>
+        <p:nvPr/>
+      </p:nvGrpSpPr>
+      <p:grpSpPr>
+        <a:xfrm>
+          <a:off x="0" y="0"/>
+          <a:ext cx="0" cy="0"/>
+          <a:chOff x="0" y="0"/>
+          <a:chExt cx="0" cy="0"/>
+        </a:xfrm>
+      </p:grpSpPr>
+      <p:pic>
+        <p:nvPicPr>
+          <p:cNvPr id="8" name="Picture 7">
+            <a:extLst>
+              <a:ext uri="{FF2B5EF4-FFF2-40B4-BE49-F238E27FC236}">
+                <a16:creationId xmlns:a16="http://schemas.microsoft.com/office/drawing/2014/main" id="{8F00BBA9-B735-4D99-AF46-7911E29D27D1}"/>
+              </a:ext>
+            </a:extLst>
+          </p:cNvPr>
+          <p:cNvPicPr>
+            <a:picLocks noChangeAspect="1"/>
+          </p:cNvPicPr>
+          <p:nvPr/>
+        </p:nvPicPr>
+        <p:blipFill>
+          <a:blip r:embed="rId2"/>
+          <a:stretch>
+            <a:fillRect/>
+          </a:stretch>
+        </p:blipFill>
+        <p:spPr>
+          <a:xfrm>
+            <a:off x="2906200" y="412481"/>
+            <a:ext cx="8021169" cy="5982535"/>
+          </a:xfrm>
+          <a:prstGeom prst="rect">
+            <a:avLst/>
+          </a:prstGeom>
+        </p:spPr>
+      </p:pic>
+      <p:sp>
+        <p:nvSpPr>
+          <p:cNvPr id="13" name="TextBox 12">
+            <a:extLst>
+              <a:ext uri="{FF2B5EF4-FFF2-40B4-BE49-F238E27FC236}">
+                <a16:creationId xmlns:a16="http://schemas.microsoft.com/office/drawing/2014/main" id="{03CBD6FB-C8E6-421C-B8D7-63487AB7B81B}"/>
+              </a:ext>
+            </a:extLst>
+          </p:cNvPr>
+          <p:cNvSpPr txBox="1"/>
+          <p:nvPr/>
+        </p:nvSpPr>
+        <p:spPr>
+          <a:xfrm>
+            <a:off x="7329758" y="3895699"/>
+            <a:ext cx="3973242" cy="1631216"/>
+          </a:xfrm>
+          <a:prstGeom prst="rect">
+            <a:avLst/>
+          </a:prstGeom>
+          <a:noFill/>
+        </p:spPr>
+        <p:txBody>
+          <a:bodyPr wrap="square" rtlCol="0">
+            <a:spAutoFit/>
+          </a:bodyPr>
+          <a:lstStyle/>
+          <a:p>
+            <a:r>
+              <a:rPr lang="en-GB" dirty="0">
+                <a:solidFill>
+                  <a:srgbClr val="A41AE4"/>
+                </a:solidFill>
+              </a:rPr>
+              <a:t>Out of the total variance explained by all factors, we can calculate the proportion of this that is explained by each factor. </a:t>
+            </a:r>
+          </a:p>
+          <a:p>
+            <a:r>
+              <a:rPr lang="en-GB" sz="1400" dirty="0">
+                <a:solidFill>
+                  <a:srgbClr val="A41AE4"/>
+                </a:solidFill>
+              </a:rPr>
+              <a:t>e.g., 0.19/0.33 = 0.57</a:t>
+            </a:r>
+          </a:p>
+          <a:p>
+            <a:endParaRPr lang="en-GB" sz="1400" dirty="0">
+              <a:solidFill>
+                <a:srgbClr val="A41AE4"/>
+              </a:solidFill>
+            </a:endParaRPr>
+          </a:p>
+          <a:p>
+            <a:r>
+              <a:rPr lang="en-GB" dirty="0">
+                <a:solidFill>
+                  <a:srgbClr val="A41AE4"/>
+                </a:solidFill>
+              </a:rPr>
+              <a:t>We can see this cumulatively too</a:t>
+            </a:r>
+          </a:p>
+        </p:txBody>
+      </p:sp>
+      <p:sp>
+        <p:nvSpPr>
+          <p:cNvPr id="3" name="Rectangle 2">
+            <a:extLst>
+              <a:ext uri="{FF2B5EF4-FFF2-40B4-BE49-F238E27FC236}">
+                <a16:creationId xmlns:a16="http://schemas.microsoft.com/office/drawing/2014/main" id="{5C0699FC-5F6A-463E-8040-0B41C1910E71}"/>
+              </a:ext>
+            </a:extLst>
+          </p:cNvPr>
+          <p:cNvSpPr/>
+          <p:nvPr/>
+        </p:nvSpPr>
+        <p:spPr>
+          <a:xfrm flipV="1">
+            <a:off x="5410199" y="4724400"/>
+            <a:ext cx="1112287" cy="480095"/>
+          </a:xfrm>
+          <a:prstGeom prst="rect">
+            <a:avLst/>
+          </a:prstGeom>
+          <a:noFill/>
+          <a:ln>
+            <a:solidFill>
+              <a:srgbClr val="A41AE4"/>
+            </a:solidFill>
+          </a:ln>
+        </p:spPr>
+        <p:style>
+          <a:lnRef idx="2">
+            <a:schemeClr val="accent1">
+              <a:shade val="50000"/>
+            </a:schemeClr>
+          </a:lnRef>
+          <a:fillRef idx="1">
+            <a:schemeClr val="accent1"/>
+          </a:fillRef>
+          <a:effectRef idx="0">
+            <a:schemeClr val="accent1"/>
+          </a:effectRef>
+          <a:fontRef idx="minor">
+            <a:schemeClr val="lt1"/>
+          </a:fontRef>
+        </p:style>
+        <p:txBody>
+          <a:bodyPr rtlCol="0" anchor="ctr"/>
+          <a:lstStyle/>
+          <a:p>
+            <a:pPr algn="ctr"/>
+            <a:endParaRPr lang="en-GB"/>
+          </a:p>
+        </p:txBody>
+      </p:sp>
+      <p:pic>
+        <p:nvPicPr>
+          <p:cNvPr id="5" name="Picture 4">
+            <a:extLst>
+              <a:ext uri="{FF2B5EF4-FFF2-40B4-BE49-F238E27FC236}">
+                <a16:creationId xmlns:a16="http://schemas.microsoft.com/office/drawing/2014/main" id="{1B864036-784F-4D0F-91CA-91DC2F7E024E}"/>
+              </a:ext>
+            </a:extLst>
+          </p:cNvPr>
+          <p:cNvPicPr>
+            <a:picLocks noChangeAspect="1"/>
+          </p:cNvPicPr>
+          <p:nvPr/>
+        </p:nvPicPr>
+        <p:blipFill>
+          <a:blip r:embed="rId3"/>
+          <a:stretch>
+            <a:fillRect/>
+          </a:stretch>
+        </p:blipFill>
+        <p:spPr>
+          <a:xfrm>
+            <a:off x="2918865" y="6438549"/>
+            <a:ext cx="485843" cy="257211"/>
+          </a:xfrm>
+          <a:prstGeom prst="rect">
+            <a:avLst/>
+          </a:prstGeom>
+        </p:spPr>
+      </p:pic>
+      <p:sp>
+        <p:nvSpPr>
+          <p:cNvPr id="6" name="TextBox 5">
+            <a:extLst>
+              <a:ext uri="{FF2B5EF4-FFF2-40B4-BE49-F238E27FC236}">
+                <a16:creationId xmlns:a16="http://schemas.microsoft.com/office/drawing/2014/main" id="{172AD8B4-F980-452B-8509-A29BA1A8D10A}"/>
+              </a:ext>
+            </a:extLst>
+          </p:cNvPr>
+          <p:cNvSpPr txBox="1"/>
+          <p:nvPr/>
+        </p:nvSpPr>
+        <p:spPr>
+          <a:xfrm>
+            <a:off x="75499" y="-25167"/>
+            <a:ext cx="5893501" cy="461665"/>
+          </a:xfrm>
+          <a:prstGeom prst="rect">
+            <a:avLst/>
+          </a:prstGeom>
+          <a:noFill/>
+        </p:spPr>
+        <p:txBody>
+          <a:bodyPr wrap="square" rtlCol="0">
+            <a:spAutoFit/>
+          </a:bodyPr>
+          <a:lstStyle/>
+          <a:p>
+            <a:r>
+              <a:rPr lang="en-GB" sz="2400" u="sng" dirty="0">
+                <a:solidFill>
+                  <a:srgbClr val="A41AE4"/>
+                </a:solidFill>
+              </a:rPr>
+              <a:t>SS Loadings &amp; “Variance Accounted For”</a:t>
+            </a:r>
+          </a:p>
+        </p:txBody>
+      </p:sp>
+    </p:spTree>
+    <p:extLst>
+      <p:ext uri="{BB962C8B-B14F-4D97-AF65-F5344CB8AC3E}">
+        <p14:creationId xmlns:p14="http://schemas.microsoft.com/office/powerpoint/2010/main" val="744628610"/>
+      </p:ext>
+    </p:extLst>
+  </p:cSld>
+  <p:clrMapOvr>
+    <a:masterClrMapping/>
+  </p:clrMapOvr>
+</p:sld>
+</file>
+
+<file path=ppt/slides/slide15.xml><?xml version="1.0" encoding="utf-8"?>
+<p:sld xmlns:a="http://schemas.openxmlformats.org/drawingml/2006/main" xmlns:r="http://schemas.openxmlformats.org/officeDocument/2006/relationships" xmlns:p="http://schemas.openxmlformats.org/presentationml/2006/main">
+  <p:cSld>
+    <p:spTree>
+      <p:nvGrpSpPr>
+        <p:cNvPr id="1" name=""/>
+        <p:cNvGrpSpPr/>
+        <p:nvPr/>
+      </p:nvGrpSpPr>
+      <p:grpSpPr>
+        <a:xfrm>
+          <a:off x="0" y="0"/>
+          <a:ext cx="0" cy="0"/>
+          <a:chOff x="0" y="0"/>
+          <a:chExt cx="0" cy="0"/>
+        </a:xfrm>
+      </p:grpSpPr>
+      <p:pic>
+        <p:nvPicPr>
+          <p:cNvPr id="9" name="Picture 8">
+            <a:extLst>
+              <a:ext uri="{FF2B5EF4-FFF2-40B4-BE49-F238E27FC236}">
+                <a16:creationId xmlns:a16="http://schemas.microsoft.com/office/drawing/2014/main" id="{1DECC0FC-7029-4470-8738-E28D26276DE4}"/>
+              </a:ext>
+            </a:extLst>
+          </p:cNvPr>
+          <p:cNvPicPr>
+            <a:picLocks noChangeAspect="1"/>
+          </p:cNvPicPr>
+          <p:nvPr/>
+        </p:nvPicPr>
+        <p:blipFill>
+          <a:blip r:embed="rId2"/>
+          <a:stretch>
+            <a:fillRect/>
+          </a:stretch>
+        </p:blipFill>
+        <p:spPr>
+          <a:xfrm>
+            <a:off x="2906200" y="412481"/>
+            <a:ext cx="8021169" cy="5982535"/>
+          </a:xfrm>
+          <a:prstGeom prst="rect">
+            <a:avLst/>
+          </a:prstGeom>
+        </p:spPr>
+      </p:pic>
+      <p:sp>
+        <p:nvSpPr>
+          <p:cNvPr id="13" name="TextBox 12">
+            <a:extLst>
+              <a:ext uri="{FF2B5EF4-FFF2-40B4-BE49-F238E27FC236}">
+                <a16:creationId xmlns:a16="http://schemas.microsoft.com/office/drawing/2014/main" id="{03CBD6FB-C8E6-421C-B8D7-63487AB7B81B}"/>
+              </a:ext>
+            </a:extLst>
+          </p:cNvPr>
+          <p:cNvSpPr txBox="1"/>
+          <p:nvPr/>
+        </p:nvSpPr>
+        <p:spPr>
+          <a:xfrm>
+            <a:off x="6946900" y="5318099"/>
+            <a:ext cx="4279900" cy="1477328"/>
+          </a:xfrm>
+          <a:prstGeom prst="rect">
+            <a:avLst/>
+          </a:prstGeom>
+          <a:noFill/>
+        </p:spPr>
+        <p:txBody>
+          <a:bodyPr wrap="square" rtlCol="0">
+            <a:spAutoFit/>
+          </a:bodyPr>
+          <a:lstStyle/>
+          <a:p>
+            <a:r>
+              <a:rPr lang="en-GB" dirty="0">
+                <a:solidFill>
+                  <a:srgbClr val="A41AE4"/>
+                </a:solidFill>
+              </a:rPr>
+              <a:t>Correlation matrix for the factors. This will depend on whether or not a correlation is estimated (i.e. whether an oblique rotation is used). Shows how related the factors are to one another. </a:t>
+            </a:r>
+          </a:p>
+        </p:txBody>
+      </p:sp>
+      <p:sp>
+        <p:nvSpPr>
+          <p:cNvPr id="3" name="Rectangle 2">
+            <a:extLst>
+              <a:ext uri="{FF2B5EF4-FFF2-40B4-BE49-F238E27FC236}">
+                <a16:creationId xmlns:a16="http://schemas.microsoft.com/office/drawing/2014/main" id="{5C0699FC-5F6A-463E-8040-0B41C1910E71}"/>
+              </a:ext>
+            </a:extLst>
+          </p:cNvPr>
+          <p:cNvSpPr/>
+          <p:nvPr/>
+        </p:nvSpPr>
+        <p:spPr>
+          <a:xfrm flipV="1">
+            <a:off x="3352799" y="5880100"/>
+            <a:ext cx="1112287" cy="480095"/>
+          </a:xfrm>
+          <a:prstGeom prst="rect">
+            <a:avLst/>
+          </a:prstGeom>
+          <a:noFill/>
+          <a:ln>
+            <a:solidFill>
+              <a:srgbClr val="A41AE4"/>
+            </a:solidFill>
+          </a:ln>
+        </p:spPr>
+        <p:style>
+          <a:lnRef idx="2">
+            <a:schemeClr val="accent1">
+              <a:shade val="50000"/>
+            </a:schemeClr>
+          </a:lnRef>
+          <a:fillRef idx="1">
+            <a:schemeClr val="accent1"/>
+          </a:fillRef>
+          <a:effectRef idx="0">
+            <a:schemeClr val="accent1"/>
+          </a:effectRef>
+          <a:fontRef idx="minor">
+            <a:schemeClr val="lt1"/>
+          </a:fontRef>
+        </p:style>
+        <p:txBody>
+          <a:bodyPr rtlCol="0" anchor="ctr"/>
+          <a:lstStyle/>
+          <a:p>
+            <a:pPr algn="ctr"/>
+            <a:endParaRPr lang="en-GB"/>
+          </a:p>
+        </p:txBody>
+      </p:sp>
+      <p:pic>
+        <p:nvPicPr>
+          <p:cNvPr id="6" name="Picture 5">
+            <a:extLst>
+              <a:ext uri="{FF2B5EF4-FFF2-40B4-BE49-F238E27FC236}">
+                <a16:creationId xmlns:a16="http://schemas.microsoft.com/office/drawing/2014/main" id="{CED2D91F-214D-4B81-AA7E-850016888388}"/>
+              </a:ext>
+            </a:extLst>
+          </p:cNvPr>
+          <p:cNvPicPr>
+            <a:picLocks noChangeAspect="1"/>
+          </p:cNvPicPr>
+          <p:nvPr/>
+        </p:nvPicPr>
+        <p:blipFill>
+          <a:blip r:embed="rId3"/>
+          <a:stretch>
+            <a:fillRect/>
+          </a:stretch>
+        </p:blipFill>
+        <p:spPr>
+          <a:xfrm>
+            <a:off x="2918865" y="6438549"/>
+            <a:ext cx="485843" cy="257211"/>
+          </a:xfrm>
+          <a:prstGeom prst="rect">
+            <a:avLst/>
+          </a:prstGeom>
+        </p:spPr>
+      </p:pic>
+      <p:sp>
+        <p:nvSpPr>
+          <p:cNvPr id="7" name="TextBox 6">
+            <a:extLst>
+              <a:ext uri="{FF2B5EF4-FFF2-40B4-BE49-F238E27FC236}">
+                <a16:creationId xmlns:a16="http://schemas.microsoft.com/office/drawing/2014/main" id="{C57D9072-7134-4AC0-902E-236F2B6DC83B}"/>
+              </a:ext>
+            </a:extLst>
+          </p:cNvPr>
+          <p:cNvSpPr txBox="1"/>
+          <p:nvPr/>
+        </p:nvSpPr>
+        <p:spPr>
+          <a:xfrm>
+            <a:off x="75499" y="-25167"/>
+            <a:ext cx="5893501" cy="461665"/>
+          </a:xfrm>
+          <a:prstGeom prst="rect">
+            <a:avLst/>
+          </a:prstGeom>
+          <a:noFill/>
+        </p:spPr>
+        <p:txBody>
+          <a:bodyPr wrap="square" rtlCol="0">
+            <a:spAutoFit/>
+          </a:bodyPr>
+          <a:lstStyle/>
+          <a:p>
+            <a:r>
+              <a:rPr lang="en-GB" sz="2400" u="sng" dirty="0">
+                <a:solidFill>
+                  <a:srgbClr val="A41AE4"/>
+                </a:solidFill>
+              </a:rPr>
+              <a:t>FACTOR CORRELATIONS</a:t>
+            </a:r>
+          </a:p>
+        </p:txBody>
+      </p:sp>
+    </p:spTree>
+    <p:extLst>
+      <p:ext uri="{BB962C8B-B14F-4D97-AF65-F5344CB8AC3E}">
+        <p14:creationId xmlns:p14="http://schemas.microsoft.com/office/powerpoint/2010/main" val="4177924006"/>
+      </p:ext>
+    </p:extLst>
+  </p:cSld>
+  <p:clrMapOvr>
+    <a:masterClrMapping/>
+  </p:clrMapOvr>
+</p:sld>
+</file>
+
+<file path=ppt/slides/slide16.xml><?xml version="1.0" encoding="utf-8"?>
+<p:sld xmlns:a="http://schemas.openxmlformats.org/drawingml/2006/main" xmlns:r="http://schemas.openxmlformats.org/officeDocument/2006/relationships" xmlns:p="http://schemas.openxmlformats.org/presentationml/2006/main">
+  <p:cSld>
+    <p:spTree>
+      <p:nvGrpSpPr>
+        <p:cNvPr id="1" name=""/>
+        <p:cNvGrpSpPr/>
+        <p:nvPr/>
+      </p:nvGrpSpPr>
+      <p:grpSpPr>
+        <a:xfrm>
+          <a:off x="0" y="0"/>
+          <a:ext cx="0" cy="0"/>
+          <a:chOff x="0" y="0"/>
+          <a:chExt cx="0" cy="0"/>
+        </a:xfrm>
+      </p:grpSpPr>
+      <p:pic>
+        <p:nvPicPr>
           <p:cNvPr id="7" name="Picture 6">
             <a:extLst>
               <a:ext uri="{FF2B5EF4-FFF2-40B4-BE49-F238E27FC236}">
@@ -5111,7 +6401,7 @@
 </p:sld>
 </file>
 
-<file path=ppt/slides/slide12.xml><?xml version="1.0" encoding="utf-8"?>
+<file path=ppt/slides/slide17.xml><?xml version="1.0" encoding="utf-8"?>
 <p:sld xmlns:a="http://schemas.openxmlformats.org/drawingml/2006/main" xmlns:r="http://schemas.openxmlformats.org/officeDocument/2006/relationships" xmlns:p="http://schemas.openxmlformats.org/presentationml/2006/main">
   <p:cSld>
     <p:spTree>
@@ -5777,7 +7067,7 @@
 </p:sld>
 </file>
 
-<file path=ppt/slides/slide13.xml><?xml version="1.0" encoding="utf-8"?>
+<file path=ppt/slides/slide18.xml><?xml version="1.0" encoding="utf-8"?>
 <p:sld xmlns:a="http://schemas.openxmlformats.org/drawingml/2006/main" xmlns:r="http://schemas.openxmlformats.org/officeDocument/2006/relationships" xmlns:p="http://schemas.openxmlformats.org/presentationml/2006/main">
   <p:cSld>
     <p:spTree>
@@ -6416,7 +7706,7 @@
 </p:sld>
 </file>
 
-<file path=ppt/slides/slide14.xml><?xml version="1.0" encoding="utf-8"?>
+<file path=ppt/slides/slide19.xml><?xml version="1.0" encoding="utf-8"?>
 <p:sld xmlns:a="http://schemas.openxmlformats.org/drawingml/2006/main" xmlns:r="http://schemas.openxmlformats.org/officeDocument/2006/relationships" xmlns:p="http://schemas.openxmlformats.org/presentationml/2006/main">
   <p:cSld>
     <p:spTree>
@@ -6892,10 +8182,10 @@
       </p:grpSpPr>
       <p:pic>
         <p:nvPicPr>
-          <p:cNvPr id="15" name="Picture 14">
-            <a:extLst>
-              <a:ext uri="{FF2B5EF4-FFF2-40B4-BE49-F238E27FC236}">
-                <a16:creationId xmlns:a16="http://schemas.microsoft.com/office/drawing/2014/main" id="{2E526E6A-7A23-4B28-A948-A05CF9D18E4D}"/>
+          <p:cNvPr id="5" name="Picture 4">
+            <a:extLst>
+              <a:ext uri="{FF2B5EF4-FFF2-40B4-BE49-F238E27FC236}">
+                <a16:creationId xmlns:a16="http://schemas.microsoft.com/office/drawing/2014/main" id="{F2961E81-2A8B-4E2D-93EF-5F7823990386}"/>
               </a:ext>
             </a:extLst>
           </p:cNvPr>
@@ -6912,8 +8202,8 @@
         </p:blipFill>
         <p:spPr>
           <a:xfrm>
-            <a:off x="2906200" y="412481"/>
-            <a:ext cx="8021169" cy="5982535"/>
+            <a:off x="3312393" y="621446"/>
+            <a:ext cx="8945223" cy="4887007"/>
           </a:xfrm>
           <a:prstGeom prst="rect">
             <a:avLst/>
@@ -6955,83 +8245,6 @@
                 </a:solidFill>
               </a:rPr>
               <a:t>Each row is an item (one of our variables)</a:t>
-            </a:r>
-          </a:p>
-        </p:txBody>
-      </p:sp>
-      <p:sp>
-        <p:nvSpPr>
-          <p:cNvPr id="7" name="TextBox 6">
-            <a:extLst>
-              <a:ext uri="{FF2B5EF4-FFF2-40B4-BE49-F238E27FC236}">
-                <a16:creationId xmlns:a16="http://schemas.microsoft.com/office/drawing/2014/main" id="{34939B2C-7D92-4974-87B9-9C5C9439F97F}"/>
-              </a:ext>
-            </a:extLst>
-          </p:cNvPr>
-          <p:cNvSpPr txBox="1"/>
-          <p:nvPr/>
-        </p:nvSpPr>
-        <p:spPr>
-          <a:xfrm>
-            <a:off x="7121745" y="4261898"/>
-            <a:ext cx="4796871" cy="1354217"/>
-          </a:xfrm>
-          <a:prstGeom prst="rect">
-            <a:avLst/>
-          </a:prstGeom>
-          <a:noFill/>
-        </p:spPr>
-        <p:txBody>
-          <a:bodyPr wrap="square" rtlCol="0">
-            <a:spAutoFit/>
-          </a:bodyPr>
-          <a:lstStyle/>
-          <a:p>
-            <a:r>
-              <a:rPr lang="en-GB" dirty="0">
-                <a:solidFill>
-                  <a:srgbClr val="A41AE4"/>
-                </a:solidFill>
-              </a:rPr>
-              <a:t>A squared loading reflects the proportion of variance in an item that is uniquely explained by a factor.  </a:t>
-            </a:r>
-          </a:p>
-          <a:p>
-            <a:r>
-              <a:rPr lang="en-GB" sz="1400" dirty="0">
-                <a:solidFill>
-                  <a:srgbClr val="A41AE4"/>
-                </a:solidFill>
-              </a:rPr>
-              <a:t>e.g., -0.60</a:t>
-            </a:r>
-            <a:r>
-              <a:rPr lang="en-GB" sz="1400" b="0" i="0" dirty="0">
-                <a:solidFill>
-                  <a:srgbClr val="A41AE4"/>
-                </a:solidFill>
-                <a:effectLst/>
-                <a:latin typeface="-apple-system"/>
-              </a:rPr>
-              <a:t>² </a:t>
-            </a:r>
-            <a:r>
-              <a:rPr lang="en-GB" sz="1400" dirty="0">
-                <a:solidFill>
-                  <a:srgbClr val="A41AE4"/>
-                </a:solidFill>
-              </a:rPr>
-              <a:t> = 0.36</a:t>
-            </a:r>
-          </a:p>
-          <a:p>
-            <a:r>
-              <a:rPr lang="en-GB" sz="1400" dirty="0">
-                <a:solidFill>
-                  <a:srgbClr val="A41AE4"/>
-                </a:solidFill>
-              </a:rPr>
-              <a:t>36% of the variance in item 1 is explained by Factor 1</a:t>
             </a:r>
           </a:p>
         </p:txBody>
@@ -7149,8 +8362,8 @@
         </p:nvSpPr>
         <p:spPr>
           <a:xfrm>
-            <a:off x="2712185" y="1559270"/>
-            <a:ext cx="177081" cy="2009430"/>
+            <a:off x="2929467" y="1607762"/>
+            <a:ext cx="401976" cy="2126038"/>
           </a:xfrm>
           <a:prstGeom prst="leftBrace">
             <a:avLst/>
@@ -7186,172 +8399,6 @@
       </p:sp>
       <p:sp>
         <p:nvSpPr>
-          <p:cNvPr id="20" name="TextBox 19">
-            <a:extLst>
-              <a:ext uri="{FF2B5EF4-FFF2-40B4-BE49-F238E27FC236}">
-                <a16:creationId xmlns:a16="http://schemas.microsoft.com/office/drawing/2014/main" id="{8A932784-3152-4FEC-A4BA-9D8ED5FC7B85}"/>
-              </a:ext>
-            </a:extLst>
-          </p:cNvPr>
-          <p:cNvSpPr txBox="1"/>
-          <p:nvPr/>
-        </p:nvSpPr>
-        <p:spPr>
-          <a:xfrm>
-            <a:off x="7121745" y="1691423"/>
-            <a:ext cx="4641184" cy="2267287"/>
-          </a:xfrm>
-          <a:prstGeom prst="rect">
-            <a:avLst/>
-          </a:prstGeom>
-          <a:noFill/>
-        </p:spPr>
-        <p:txBody>
-          <a:bodyPr wrap="square">
-            <a:spAutoFit/>
-          </a:bodyPr>
-          <a:lstStyle/>
-          <a:p>
-            <a:r>
-              <a:rPr lang="en-GB" dirty="0">
-                <a:solidFill>
-                  <a:srgbClr val="A41AE4"/>
-                </a:solidFill>
-              </a:rPr>
-              <a:t>Loadings show the association between each item and each factor. </a:t>
-            </a:r>
-          </a:p>
-          <a:p>
-            <a:br>
-              <a:rPr lang="en-GB" sz="1400" dirty="0">
-                <a:solidFill>
-                  <a:srgbClr val="A41AE4"/>
-                </a:solidFill>
-              </a:rPr>
-            </a:br>
-            <a:r>
-              <a:rPr lang="en-GB" sz="1400" dirty="0">
-                <a:solidFill>
-                  <a:srgbClr val="A41AE4"/>
-                </a:solidFill>
-              </a:rPr>
-              <a:t>With an oblique rotation, the pattern matrix shows standardised regression coefficients:</a:t>
-            </a:r>
-          </a:p>
-          <a:p>
-            <a:r>
-              <a:rPr lang="en-GB" sz="1200" dirty="0" err="1">
-                <a:solidFill>
-                  <a:srgbClr val="A41AE4"/>
-                </a:solidFill>
-              </a:rPr>
-              <a:t>item</a:t>
-            </a:r>
-            <a:r>
-              <a:rPr lang="en-GB" sz="1200" baseline="-25000" dirty="0" err="1">
-                <a:solidFill>
-                  <a:srgbClr val="A41AE4"/>
-                </a:solidFill>
-              </a:rPr>
-              <a:t>i</a:t>
-            </a:r>
-            <a:r>
-              <a:rPr lang="en-GB" sz="1200" dirty="0">
-                <a:solidFill>
-                  <a:srgbClr val="A41AE4"/>
-                </a:solidFill>
-                <a:latin typeface="Helvetica Neue"/>
-              </a:rPr>
-              <a:t> </a:t>
-            </a:r>
-            <a:r>
-              <a:rPr lang="en-GB" sz="1200" dirty="0">
-                <a:solidFill>
-                  <a:srgbClr val="A41AE4"/>
-                </a:solidFill>
-              </a:rPr>
-              <a:t>= loading</a:t>
-            </a:r>
-            <a:r>
-              <a:rPr lang="en-GB" sz="1200" baseline="-25000" dirty="0">
-                <a:solidFill>
-                  <a:srgbClr val="A41AE4"/>
-                </a:solidFill>
-              </a:rPr>
-              <a:t>F1,i</a:t>
-            </a:r>
-            <a:r>
-              <a:rPr lang="en-GB" sz="1200" dirty="0">
-                <a:solidFill>
-                  <a:srgbClr val="A41AE4"/>
-                </a:solidFill>
-              </a:rPr>
-              <a:t>*Factor1 + loading</a:t>
-            </a:r>
-            <a:r>
-              <a:rPr lang="en-GB" sz="1200" baseline="-25000" dirty="0">
-                <a:solidFill>
-                  <a:srgbClr val="A41AE4"/>
-                </a:solidFill>
-              </a:rPr>
-              <a:t>F2,i</a:t>
-            </a:r>
-            <a:r>
-              <a:rPr lang="en-GB" sz="1200" dirty="0">
-                <a:solidFill>
-                  <a:srgbClr val="A41AE4"/>
-                </a:solidFill>
-              </a:rPr>
-              <a:t>*Factor2 + … + </a:t>
-            </a:r>
-            <a:r>
-              <a:rPr lang="en-GB" sz="1200" dirty="0" err="1">
-                <a:solidFill>
-                  <a:srgbClr val="A41AE4"/>
-                </a:solidFill>
-              </a:rPr>
-              <a:t>uniqueness</a:t>
-            </a:r>
-            <a:r>
-              <a:rPr lang="en-GB" sz="1200" baseline="-25000" dirty="0" err="1">
-                <a:solidFill>
-                  <a:srgbClr val="A41AE4"/>
-                </a:solidFill>
-              </a:rPr>
-              <a:t>i</a:t>
-            </a:r>
-            <a:endParaRPr lang="en-GB" sz="1200" baseline="-25000" dirty="0">
-              <a:solidFill>
-                <a:srgbClr val="A41AE4"/>
-              </a:solidFill>
-            </a:endParaRPr>
-          </a:p>
-          <a:p>
-            <a:endParaRPr lang="en-GB" sz="1400" baseline="-25000" dirty="0">
-              <a:solidFill>
-                <a:srgbClr val="A41AE4"/>
-              </a:solidFill>
-            </a:endParaRPr>
-          </a:p>
-          <a:p>
-            <a:r>
-              <a:rPr lang="en-GB" sz="1400" dirty="0">
-                <a:solidFill>
-                  <a:srgbClr val="A41AE4"/>
-                </a:solidFill>
-              </a:rPr>
-              <a:t>With no rotation or an orthogonal rotation these are correlation coefficients, and the pattern matrix is identical to the structure matrix*</a:t>
-            </a:r>
-            <a:endParaRPr lang="en-GB" sz="1400" baseline="-25000" dirty="0">
-              <a:solidFill>
-                <a:srgbClr val="A41AE4"/>
-              </a:solidFill>
-            </a:endParaRPr>
-          </a:p>
-        </p:txBody>
-      </p:sp>
-      <p:sp>
-        <p:nvSpPr>
           <p:cNvPr id="24" name="Rectangle 23">
             <a:extLst>
               <a:ext uri="{FF2B5EF4-FFF2-40B4-BE49-F238E27FC236}">
@@ -7364,8 +8411,8 @@
         </p:nvSpPr>
         <p:spPr>
           <a:xfrm>
-            <a:off x="3692743" y="1536701"/>
-            <a:ext cx="1377514" cy="2108200"/>
+            <a:off x="3742267" y="1536701"/>
+            <a:ext cx="1327990" cy="2264420"/>
           </a:xfrm>
           <a:prstGeom prst="rect">
             <a:avLst/>
@@ -7404,10 +8451,10 @@
       </p:sp>
       <p:sp>
         <p:nvSpPr>
-          <p:cNvPr id="10" name="TextBox 9">
-            <a:extLst>
-              <a:ext uri="{FF2B5EF4-FFF2-40B4-BE49-F238E27FC236}">
-                <a16:creationId xmlns:a16="http://schemas.microsoft.com/office/drawing/2014/main" id="{8AF5C982-EADB-41EC-A56F-CA743F71CEDC}"/>
+          <p:cNvPr id="12" name="TextBox 11">
+            <a:extLst>
+              <a:ext uri="{FF2B5EF4-FFF2-40B4-BE49-F238E27FC236}">
+                <a16:creationId xmlns:a16="http://schemas.microsoft.com/office/drawing/2014/main" id="{02B9EF90-F348-4C67-8F54-FA122021CEA6}"/>
               </a:ext>
             </a:extLst>
           </p:cNvPr>
@@ -7416,8 +8463,8 @@
         </p:nvSpPr>
         <p:spPr>
           <a:xfrm>
-            <a:off x="6012111" y="5994143"/>
-            <a:ext cx="6179382" cy="861774"/>
+            <a:off x="75499" y="-25167"/>
+            <a:ext cx="5893501" cy="461665"/>
           </a:xfrm>
           <a:prstGeom prst="rect">
             <a:avLst/>
@@ -7431,168 +8478,22 @@
           <a:lstStyle/>
           <a:p>
             <a:r>
-              <a:rPr lang="en-GB" sz="1000" dirty="0">
-                <a:solidFill>
-                  <a:srgbClr val="A41AE4"/>
-                </a:solidFill>
-              </a:rPr>
-              <a:t>*When an oblique rotation is used, factors can be correlated. Therefore to get the </a:t>
-            </a:r>
-            <a:r>
-              <a:rPr lang="en-GB" sz="1000" i="1" dirty="0">
-                <a:solidFill>
-                  <a:srgbClr val="A41AE4"/>
-                </a:solidFill>
-              </a:rPr>
-              <a:t>unique </a:t>
-            </a:r>
-            <a:r>
-              <a:rPr lang="en-GB" sz="1000" dirty="0">
-                <a:solidFill>
-                  <a:srgbClr val="A41AE4"/>
-                </a:solidFill>
-              </a:rPr>
-              <a:t>association between item and factors, we need the regression weights from a model of </a:t>
-            </a:r>
-            <a:r>
-              <a:rPr lang="en-GB" sz="1000" dirty="0">
-                <a:solidFill>
-                  <a:srgbClr val="A41AE4"/>
-                </a:solidFill>
-                <a:latin typeface="Courier New" panose="02070309020205020404" pitchFamily="49" charset="0"/>
-                <a:cs typeface="Courier New" panose="02070309020205020404" pitchFamily="49" charset="0"/>
-              </a:rPr>
-              <a:t>item ~ factor1 + factor2</a:t>
-            </a:r>
-            <a:r>
-              <a:rPr lang="en-GB" sz="1000" dirty="0">
-                <a:solidFill>
-                  <a:srgbClr val="A41AE4"/>
-                </a:solidFill>
-              </a:rPr>
-              <a:t>. </a:t>
-            </a:r>
-          </a:p>
-          <a:p>
-            <a:r>
-              <a:rPr lang="en-GB" sz="1000" dirty="0">
-                <a:solidFill>
-                  <a:srgbClr val="A41AE4"/>
-                </a:solidFill>
-              </a:rPr>
-              <a:t>If the factors are </a:t>
-            </a:r>
-            <a:r>
-              <a:rPr lang="en-GB" sz="1000" b="1" dirty="0">
-                <a:solidFill>
-                  <a:srgbClr val="A41AE4"/>
-                </a:solidFill>
-              </a:rPr>
-              <a:t>not</a:t>
-            </a:r>
-            <a:r>
-              <a:rPr lang="en-GB" sz="1000" dirty="0">
-                <a:solidFill>
-                  <a:srgbClr val="A41AE4"/>
-                </a:solidFill>
-              </a:rPr>
-              <a:t> correlated (by definition they are uncorrelated when no rotation or an orthogonal rotation is used), then these regression weights are just the same as the correlations </a:t>
-            </a:r>
-            <a:r>
-              <a:rPr lang="en-GB" sz="1000" dirty="0" err="1">
-                <a:solidFill>
-                  <a:srgbClr val="A41AE4"/>
-                </a:solidFill>
-                <a:latin typeface="Courier New" panose="02070309020205020404" pitchFamily="49" charset="0"/>
-                <a:cs typeface="Courier New" panose="02070309020205020404" pitchFamily="49" charset="0"/>
-              </a:rPr>
-              <a:t>cor</a:t>
-            </a:r>
-            <a:r>
-              <a:rPr lang="en-GB" sz="1000" dirty="0">
-                <a:solidFill>
-                  <a:srgbClr val="A41AE4"/>
-                </a:solidFill>
-                <a:latin typeface="Courier New" panose="02070309020205020404" pitchFamily="49" charset="0"/>
-                <a:cs typeface="Courier New" panose="02070309020205020404" pitchFamily="49" charset="0"/>
-              </a:rPr>
-              <a:t>(item, factor1) </a:t>
-            </a:r>
-            <a:r>
-              <a:rPr lang="en-GB" sz="1000" dirty="0">
-                <a:solidFill>
-                  <a:srgbClr val="A41AE4"/>
-                </a:solidFill>
-              </a:rPr>
-              <a:t>and </a:t>
-            </a:r>
-            <a:r>
-              <a:rPr lang="en-GB" sz="1000" dirty="0" err="1">
-                <a:solidFill>
-                  <a:srgbClr val="A41AE4"/>
-                </a:solidFill>
-                <a:latin typeface="Courier New" panose="02070309020205020404" pitchFamily="49" charset="0"/>
-                <a:cs typeface="Courier New" panose="02070309020205020404" pitchFamily="49" charset="0"/>
-              </a:rPr>
-              <a:t>cor</a:t>
-            </a:r>
-            <a:r>
-              <a:rPr lang="en-GB" sz="1000" dirty="0">
-                <a:solidFill>
-                  <a:srgbClr val="A41AE4"/>
-                </a:solidFill>
-                <a:latin typeface="Courier New" panose="02070309020205020404" pitchFamily="49" charset="0"/>
-                <a:cs typeface="Courier New" panose="02070309020205020404" pitchFamily="49" charset="0"/>
-              </a:rPr>
-              <a:t>(item, factor2)</a:t>
-            </a:r>
-            <a:r>
-              <a:rPr lang="en-GB" sz="1000" dirty="0">
-                <a:solidFill>
-                  <a:srgbClr val="A41AE4"/>
-                </a:solidFill>
-              </a:rPr>
-              <a:t>. </a:t>
-            </a:r>
-          </a:p>
-        </p:txBody>
-      </p:sp>
-      <p:pic>
-        <p:nvPicPr>
-          <p:cNvPr id="11" name="Picture 10">
-            <a:extLst>
-              <a:ext uri="{FF2B5EF4-FFF2-40B4-BE49-F238E27FC236}">
-                <a16:creationId xmlns:a16="http://schemas.microsoft.com/office/drawing/2014/main" id="{71340B10-4821-45B4-AE0F-DE3DA76DE72D}"/>
-              </a:ext>
-            </a:extLst>
-          </p:cNvPr>
-          <p:cNvPicPr>
-            <a:picLocks noChangeAspect="1"/>
-          </p:cNvPicPr>
-          <p:nvPr/>
-        </p:nvPicPr>
-        <p:blipFill>
-          <a:blip r:embed="rId3"/>
-          <a:stretch>
-            <a:fillRect/>
-          </a:stretch>
-        </p:blipFill>
-        <p:spPr>
-          <a:xfrm>
-            <a:off x="2918865" y="6438549"/>
-            <a:ext cx="485843" cy="257211"/>
-          </a:xfrm>
-          <a:prstGeom prst="rect">
-            <a:avLst/>
-          </a:prstGeom>
-        </p:spPr>
-      </p:pic>
-      <p:sp>
-        <p:nvSpPr>
-          <p:cNvPr id="13" name="TextBox 12">
-            <a:extLst>
-              <a:ext uri="{FF2B5EF4-FFF2-40B4-BE49-F238E27FC236}">
-                <a16:creationId xmlns:a16="http://schemas.microsoft.com/office/drawing/2014/main" id="{C74BA475-9C1D-4AF9-8D37-798F78B516B0}"/>
+              <a:rPr lang="en-GB" sz="2400" u="sng" dirty="0">
+                <a:solidFill>
+                  <a:srgbClr val="A41AE4"/>
+                </a:solidFill>
+              </a:rPr>
+              <a:t>PATTERN MATRIX</a:t>
+            </a:r>
+          </a:p>
+        </p:txBody>
+      </p:sp>
+      <p:sp>
+        <p:nvSpPr>
+          <p:cNvPr id="9" name="TextBox 8">
+            <a:extLst>
+              <a:ext uri="{FF2B5EF4-FFF2-40B4-BE49-F238E27FC236}">
+                <a16:creationId xmlns:a16="http://schemas.microsoft.com/office/drawing/2014/main" id="{0EB27A0A-0A8E-47AD-B3A8-2C716FB8128A}"/>
               </a:ext>
             </a:extLst>
           </p:cNvPr>
@@ -7601,8 +8502,8 @@
         </p:nvSpPr>
         <p:spPr>
           <a:xfrm>
-            <a:off x="75499" y="-25167"/>
-            <a:ext cx="5893501" cy="461665"/>
+            <a:off x="7121745" y="2887150"/>
+            <a:ext cx="4796871" cy="646331"/>
           </a:xfrm>
           <a:prstGeom prst="rect">
             <a:avLst/>
@@ -7616,12 +8517,51 @@
           <a:lstStyle/>
           <a:p>
             <a:r>
-              <a:rPr lang="en-GB" sz="2400" u="sng" dirty="0">
-                <a:solidFill>
-                  <a:srgbClr val="A41AE4"/>
-                </a:solidFill>
-              </a:rPr>
-              <a:t>PATTERN MATRIX</a:t>
+              <a:rPr lang="en-GB" dirty="0">
+                <a:solidFill>
+                  <a:srgbClr val="A41AE4"/>
+                </a:solidFill>
+              </a:rPr>
+              <a:t>A squared loading reflects the proportion of variance in an item that is explained by a factor.  </a:t>
+            </a:r>
+          </a:p>
+        </p:txBody>
+      </p:sp>
+      <p:sp>
+        <p:nvSpPr>
+          <p:cNvPr id="10" name="TextBox 9">
+            <a:extLst>
+              <a:ext uri="{FF2B5EF4-FFF2-40B4-BE49-F238E27FC236}">
+                <a16:creationId xmlns:a16="http://schemas.microsoft.com/office/drawing/2014/main" id="{38A4E531-FCB1-4FD3-8F3A-4ECE09E4C498}"/>
+              </a:ext>
+            </a:extLst>
+          </p:cNvPr>
+          <p:cNvSpPr txBox="1"/>
+          <p:nvPr/>
+        </p:nvSpPr>
+        <p:spPr>
+          <a:xfrm>
+            <a:off x="7121745" y="1508921"/>
+            <a:ext cx="4641184" cy="646331"/>
+          </a:xfrm>
+          <a:prstGeom prst="rect">
+            <a:avLst/>
+          </a:prstGeom>
+          <a:noFill/>
+        </p:spPr>
+        <p:txBody>
+          <a:bodyPr wrap="square">
+            <a:spAutoFit/>
+          </a:bodyPr>
+          <a:lstStyle/>
+          <a:p>
+            <a:r>
+              <a:rPr lang="en-GB" dirty="0">
+                <a:solidFill>
+                  <a:srgbClr val="A41AE4"/>
+                </a:solidFill>
+              </a:rPr>
+              <a:t>Loadings show the association between each item and each factor. </a:t>
             </a:r>
           </a:p>
         </p:txBody>
@@ -7629,7 +8569,7 @@
     </p:spTree>
     <p:extLst>
       <p:ext uri="{BB962C8B-B14F-4D97-AF65-F5344CB8AC3E}">
-        <p14:creationId xmlns:p14="http://schemas.microsoft.com/office/powerpoint/2010/main" val="220084793"/>
+        <p14:creationId xmlns:p14="http://schemas.microsoft.com/office/powerpoint/2010/main" val="1211288178"/>
       </p:ext>
     </p:extLst>
   </p:cSld>
@@ -7658,10 +8598,10 @@
       </p:grpSpPr>
       <p:pic>
         <p:nvPicPr>
-          <p:cNvPr id="9" name="Picture 8">
-            <a:extLst>
-              <a:ext uri="{FF2B5EF4-FFF2-40B4-BE49-F238E27FC236}">
-                <a16:creationId xmlns:a16="http://schemas.microsoft.com/office/drawing/2014/main" id="{12E4B26C-220F-4ABD-A510-FB909461261E}"/>
+          <p:cNvPr id="5" name="Picture 4">
+            <a:extLst>
+              <a:ext uri="{FF2B5EF4-FFF2-40B4-BE49-F238E27FC236}">
+                <a16:creationId xmlns:a16="http://schemas.microsoft.com/office/drawing/2014/main" id="{F2961E81-2A8B-4E2D-93EF-5F7823990386}"/>
               </a:ext>
             </a:extLst>
           </p:cNvPr>
@@ -7678,8 +8618,8 @@
         </p:blipFill>
         <p:spPr>
           <a:xfrm>
-            <a:off x="2906200" y="412481"/>
-            <a:ext cx="8021169" cy="5982535"/>
+            <a:off x="3312393" y="621446"/>
+            <a:ext cx="8945223" cy="4887007"/>
           </a:xfrm>
           <a:prstGeom prst="rect">
             <a:avLst/>
@@ -7688,10 +8628,10 @@
       </p:pic>
       <p:sp>
         <p:nvSpPr>
-          <p:cNvPr id="11" name="TextBox 10">
-            <a:extLst>
-              <a:ext uri="{FF2B5EF4-FFF2-40B4-BE49-F238E27FC236}">
-                <a16:creationId xmlns:a16="http://schemas.microsoft.com/office/drawing/2014/main" id="{493E50EB-A39A-4313-86FF-0F97860C9441}"/>
+          <p:cNvPr id="6" name="TextBox 5">
+            <a:extLst>
+              <a:ext uri="{FF2B5EF4-FFF2-40B4-BE49-F238E27FC236}">
+                <a16:creationId xmlns:a16="http://schemas.microsoft.com/office/drawing/2014/main" id="{1519AEAF-4003-41C0-A386-9B9E629497B9}"/>
               </a:ext>
             </a:extLst>
           </p:cNvPr>
@@ -7700,8 +8640,8 @@
         </p:nvSpPr>
         <p:spPr>
           <a:xfrm>
-            <a:off x="7338602" y="1409822"/>
-            <a:ext cx="4281898" cy="3508653"/>
+            <a:off x="429071" y="2240819"/>
+            <a:ext cx="2283114" cy="646331"/>
           </a:xfrm>
           <a:prstGeom prst="rect">
             <a:avLst/>
@@ -7720,187 +8660,116 @@
                   <a:srgbClr val="A41AE4"/>
                 </a:solidFill>
               </a:rPr>
-              <a:t>Square the </a:t>
-            </a:r>
-            <a:r>
-              <a:rPr lang="en-GB" b="1" dirty="0">
-                <a:solidFill>
-                  <a:srgbClr val="A41AE4"/>
-                </a:solidFill>
-              </a:rPr>
-              <a:t>correlations </a:t>
-            </a:r>
+              <a:t>Each row is an item (one of our variables)</a:t>
+            </a:r>
+          </a:p>
+        </p:txBody>
+      </p:sp>
+      <p:sp>
+        <p:nvSpPr>
+          <p:cNvPr id="19" name="TextBox 18">
+            <a:extLst>
+              <a:ext uri="{FF2B5EF4-FFF2-40B4-BE49-F238E27FC236}">
+                <a16:creationId xmlns:a16="http://schemas.microsoft.com/office/drawing/2014/main" id="{3E957946-CE17-4628-B08D-798207573E9E}"/>
+              </a:ext>
+            </a:extLst>
+          </p:cNvPr>
+          <p:cNvSpPr txBox="1"/>
+          <p:nvPr/>
+        </p:nvSpPr>
+        <p:spPr>
+          <a:xfrm>
+            <a:off x="429071" y="822649"/>
+            <a:ext cx="1780729" cy="1200329"/>
+          </a:xfrm>
+          <a:prstGeom prst="rect">
+            <a:avLst/>
+          </a:prstGeom>
+          <a:noFill/>
+        </p:spPr>
+        <p:txBody>
+          <a:bodyPr wrap="square" rtlCol="0">
+            <a:spAutoFit/>
+          </a:bodyPr>
+          <a:lstStyle/>
+          <a:p>
             <a:r>
               <a:rPr lang="en-GB" dirty="0">
                 <a:solidFill>
                   <a:srgbClr val="A41AE4"/>
                 </a:solidFill>
               </a:rPr>
-              <a:t>each item and add them up, and you get the proportion of variance in an item that is explained by all the factors. This is the “communality”.  </a:t>
-            </a:r>
-          </a:p>
-          <a:p>
-            <a:endParaRPr lang="en-GB" dirty="0">
-              <a:solidFill>
-                <a:srgbClr val="A41AE4"/>
-              </a:solidFill>
-            </a:endParaRPr>
-          </a:p>
-          <a:p>
-            <a:endParaRPr lang="en-GB" dirty="0">
-              <a:solidFill>
-                <a:srgbClr val="A41AE4"/>
-              </a:solidFill>
-            </a:endParaRPr>
-          </a:p>
-          <a:p>
-            <a:r>
+              <a:t>Each column is a factor</a:t>
+            </a:r>
+            <a:br>
               <a:rPr lang="en-GB" dirty="0">
                 <a:solidFill>
                   <a:srgbClr val="A41AE4"/>
                 </a:solidFill>
               </a:rPr>
-              <a:t>The correlations are in the </a:t>
-            </a:r>
-            <a:r>
-              <a:rPr lang="en-GB" i="1" dirty="0">
-                <a:solidFill>
-                  <a:srgbClr val="A41AE4"/>
-                </a:solidFill>
-              </a:rPr>
-              <a:t>structure matrix</a:t>
-            </a:r>
-            <a:r>
-              <a:rPr lang="en-GB" dirty="0">
-                <a:solidFill>
-                  <a:srgbClr val="A41AE4"/>
-                </a:solidFill>
-              </a:rPr>
-              <a:t>, </a:t>
-            </a:r>
-          </a:p>
-          <a:p>
-            <a:r>
-              <a:rPr lang="en-GB" dirty="0">
-                <a:solidFill>
-                  <a:srgbClr val="A41AE4"/>
-                </a:solidFill>
-              </a:rPr>
-              <a:t>but this is the </a:t>
-            </a:r>
-            <a:r>
-              <a:rPr lang="en-GB" i="1" dirty="0">
-                <a:solidFill>
-                  <a:srgbClr val="A41AE4"/>
-                </a:solidFill>
-              </a:rPr>
-              <a:t>pattern</a:t>
-            </a:r>
-            <a:r>
-              <a:rPr lang="en-GB" dirty="0">
-                <a:solidFill>
-                  <a:srgbClr val="A41AE4"/>
-                </a:solidFill>
-              </a:rPr>
-              <a:t> </a:t>
-            </a:r>
-            <a:r>
-              <a:rPr lang="en-GB" i="1" dirty="0">
-                <a:solidFill>
-                  <a:srgbClr val="A41AE4"/>
-                </a:solidFill>
-              </a:rPr>
-              <a:t>matrix</a:t>
-            </a:r>
-            <a:r>
-              <a:rPr lang="en-GB" dirty="0">
-                <a:solidFill>
-                  <a:srgbClr val="A41AE4"/>
-                </a:solidFill>
-              </a:rPr>
-              <a:t>. Because the factor correlations here are low, we can just do this calculation on the loadings here</a:t>
-            </a:r>
-          </a:p>
-          <a:p>
-            <a:r>
-              <a:rPr lang="en-GB" sz="1400" dirty="0">
-                <a:solidFill>
-                  <a:srgbClr val="A41AE4"/>
-                </a:solidFill>
-              </a:rPr>
-              <a:t>e.g., -0.03</a:t>
-            </a:r>
-            <a:r>
-              <a:rPr lang="en-GB" sz="1400" b="0" i="0" dirty="0">
-                <a:solidFill>
-                  <a:srgbClr val="A41AE4"/>
-                </a:solidFill>
-                <a:effectLst/>
-                <a:latin typeface="-apple-system"/>
-              </a:rPr>
-              <a:t>² + -</a:t>
-            </a:r>
-            <a:r>
-              <a:rPr lang="en-GB" sz="1400" dirty="0">
-                <a:solidFill>
-                  <a:srgbClr val="A41AE4"/>
-                </a:solidFill>
-              </a:rPr>
-              <a:t>0.55</a:t>
-            </a:r>
-            <a:r>
-              <a:rPr lang="en-GB" sz="1400" b="0" i="0" dirty="0">
-                <a:solidFill>
-                  <a:srgbClr val="A41AE4"/>
-                </a:solidFill>
-                <a:effectLst/>
-                <a:latin typeface="-apple-system"/>
-              </a:rPr>
-              <a:t>²</a:t>
-            </a:r>
-            <a:r>
-              <a:rPr lang="en-GB" sz="1400" dirty="0">
-                <a:solidFill>
-                  <a:srgbClr val="A41AE4"/>
-                </a:solidFill>
-              </a:rPr>
-              <a:t> = </a:t>
-            </a:r>
-            <a:r>
-              <a:rPr lang="en-GB" sz="1400" dirty="0" err="1">
-                <a:solidFill>
-                  <a:srgbClr val="A41AE4"/>
-                </a:solidFill>
-              </a:rPr>
-              <a:t>approx</a:t>
-            </a:r>
-            <a:r>
-              <a:rPr lang="en-GB" sz="1400" dirty="0">
-                <a:solidFill>
-                  <a:srgbClr val="A41AE4"/>
-                </a:solidFill>
-              </a:rPr>
-              <a:t> 0.30</a:t>
-            </a:r>
-          </a:p>
-          <a:p>
-            <a:r>
-              <a:rPr lang="en-GB" sz="1400" dirty="0">
-                <a:solidFill>
-                  <a:srgbClr val="A41AE4"/>
-                </a:solidFill>
-              </a:rPr>
-              <a:t>30% of the variance in item 6 is explained by this 2 Factor solution</a:t>
-            </a:r>
-          </a:p>
-        </p:txBody>
-      </p:sp>
-      <p:sp>
-        <p:nvSpPr>
-          <p:cNvPr id="2" name="Rectangle 1">
-            <a:extLst>
-              <a:ext uri="{FF2B5EF4-FFF2-40B4-BE49-F238E27FC236}">
-                <a16:creationId xmlns:a16="http://schemas.microsoft.com/office/drawing/2014/main" id="{973AA02F-BB14-4BEB-A454-A7473E202E72}"/>
+            </a:br>
+            <a:r>
+              <a:rPr lang="en-GB" sz="1200" dirty="0">
+                <a:solidFill>
+                  <a:srgbClr val="A41AE4"/>
+                </a:solidFill>
+              </a:rPr>
+              <a:t>(these are named according to the extraction method)</a:t>
+            </a:r>
+          </a:p>
+        </p:txBody>
+      </p:sp>
+      <p:cxnSp>
+        <p:nvCxnSpPr>
+          <p:cNvPr id="21" name="Straight Arrow Connector 20">
+            <a:extLst>
+              <a:ext uri="{FF2B5EF4-FFF2-40B4-BE49-F238E27FC236}">
+                <a16:creationId xmlns:a16="http://schemas.microsoft.com/office/drawing/2014/main" id="{2BF88D99-D232-4D31-AC2B-AD263814ED77}"/>
+              </a:ext>
+            </a:extLst>
+          </p:cNvPr>
+          <p:cNvCxnSpPr>
+            <a:cxnSpLocks/>
+            <a:stCxn id="19" idx="3"/>
+          </p:cNvCxnSpPr>
+          <p:nvPr/>
+        </p:nvCxnSpPr>
+        <p:spPr>
+          <a:xfrm flipV="1">
+            <a:off x="2209800" y="1422402"/>
+            <a:ext cx="1651000" cy="412"/>
+          </a:xfrm>
+          <a:prstGeom prst="straightConnector1">
+            <a:avLst/>
+          </a:prstGeom>
+          <a:ln>
+            <a:solidFill>
+              <a:srgbClr val="A41AE4"/>
+            </a:solidFill>
+            <a:tailEnd type="triangle"/>
+          </a:ln>
+        </p:spPr>
+        <p:style>
+          <a:lnRef idx="1">
+            <a:schemeClr val="accent2"/>
+          </a:lnRef>
+          <a:fillRef idx="0">
+            <a:schemeClr val="accent2"/>
+          </a:fillRef>
+          <a:effectRef idx="0">
+            <a:schemeClr val="accent2"/>
+          </a:effectRef>
+          <a:fontRef idx="minor">
+            <a:schemeClr val="tx1"/>
+          </a:fontRef>
+        </p:style>
+      </p:cxnSp>
+      <p:sp>
+        <p:nvSpPr>
+          <p:cNvPr id="23" name="Left Brace 22">
+            <a:extLst>
+              <a:ext uri="{FF2B5EF4-FFF2-40B4-BE49-F238E27FC236}">
+                <a16:creationId xmlns:a16="http://schemas.microsoft.com/office/drawing/2014/main" id="{7A002C84-DBF4-4C1B-92E3-9515A372B2E8}"/>
               </a:ext>
             </a:extLst>
           </p:cNvPr>
@@ -7909,8 +8778,57 @@
         </p:nvSpPr>
         <p:spPr>
           <a:xfrm>
-            <a:off x="5067300" y="1536701"/>
-            <a:ext cx="584200" cy="2108200"/>
+            <a:off x="2929467" y="1607762"/>
+            <a:ext cx="401976" cy="2126038"/>
+          </a:xfrm>
+          <a:prstGeom prst="leftBrace">
+            <a:avLst/>
+          </a:prstGeom>
+          <a:ln w="12700">
+            <a:solidFill>
+              <a:srgbClr val="A41AE4"/>
+            </a:solidFill>
+          </a:ln>
+        </p:spPr>
+        <p:style>
+          <a:lnRef idx="1">
+            <a:schemeClr val="accent2"/>
+          </a:lnRef>
+          <a:fillRef idx="0">
+            <a:schemeClr val="accent2"/>
+          </a:fillRef>
+          <a:effectRef idx="0">
+            <a:schemeClr val="accent2"/>
+          </a:effectRef>
+          <a:fontRef idx="minor">
+            <a:schemeClr val="tx1"/>
+          </a:fontRef>
+        </p:style>
+        <p:txBody>
+          <a:bodyPr rtlCol="0" anchor="ctr"/>
+          <a:lstStyle/>
+          <a:p>
+            <a:pPr algn="ctr"/>
+            <a:endParaRPr lang="en-GB"/>
+          </a:p>
+        </p:txBody>
+      </p:sp>
+      <p:sp>
+        <p:nvSpPr>
+          <p:cNvPr id="24" name="Rectangle 23">
+            <a:extLst>
+              <a:ext uri="{FF2B5EF4-FFF2-40B4-BE49-F238E27FC236}">
+                <a16:creationId xmlns:a16="http://schemas.microsoft.com/office/drawing/2014/main" id="{9C66D4C5-D7CE-4979-8C83-BA3107A7840E}"/>
+              </a:ext>
+            </a:extLst>
+          </p:cNvPr>
+          <p:cNvSpPr/>
+          <p:nvPr/>
+        </p:nvSpPr>
+        <p:spPr>
+          <a:xfrm>
+            <a:off x="3742267" y="1536701"/>
+            <a:ext cx="1327990" cy="2264420"/>
           </a:xfrm>
           <a:prstGeom prst="rect">
             <a:avLst/>
@@ -7947,42 +8865,12 @@
           </a:p>
         </p:txBody>
       </p:sp>
-      <p:pic>
-        <p:nvPicPr>
-          <p:cNvPr id="5" name="Picture 4">
-            <a:extLst>
-              <a:ext uri="{FF2B5EF4-FFF2-40B4-BE49-F238E27FC236}">
-                <a16:creationId xmlns:a16="http://schemas.microsoft.com/office/drawing/2014/main" id="{55E84974-7B99-44B6-95DB-0AE9672C2C10}"/>
-              </a:ext>
-            </a:extLst>
-          </p:cNvPr>
-          <p:cNvPicPr>
-            <a:picLocks noChangeAspect="1"/>
-          </p:cNvPicPr>
-          <p:nvPr/>
-        </p:nvPicPr>
-        <p:blipFill>
-          <a:blip r:embed="rId3"/>
-          <a:stretch>
-            <a:fillRect/>
-          </a:stretch>
-        </p:blipFill>
-        <p:spPr>
-          <a:xfrm>
-            <a:off x="2918865" y="6438549"/>
-            <a:ext cx="485843" cy="257211"/>
-          </a:xfrm>
-          <a:prstGeom prst="rect">
-            <a:avLst/>
-          </a:prstGeom>
-        </p:spPr>
-      </p:pic>
-      <p:sp>
-        <p:nvSpPr>
-          <p:cNvPr id="7" name="TextBox 6">
-            <a:extLst>
-              <a:ext uri="{FF2B5EF4-FFF2-40B4-BE49-F238E27FC236}">
-                <a16:creationId xmlns:a16="http://schemas.microsoft.com/office/drawing/2014/main" id="{00BCC5D6-B545-47FA-A82A-A3583E5DFB59}"/>
+      <p:sp>
+        <p:nvSpPr>
+          <p:cNvPr id="12" name="TextBox 11">
+            <a:extLst>
+              <a:ext uri="{FF2B5EF4-FFF2-40B4-BE49-F238E27FC236}">
+                <a16:creationId xmlns:a16="http://schemas.microsoft.com/office/drawing/2014/main" id="{02B9EF90-F348-4C67-8F54-FA122021CEA6}"/>
               </a:ext>
             </a:extLst>
           </p:cNvPr>
@@ -8011,15 +8899,611 @@
                   <a:srgbClr val="A41AE4"/>
                 </a:solidFill>
               </a:rPr>
-              <a:t>COMMUNALITIES</a:t>
-            </a:r>
-          </a:p>
-        </p:txBody>
-      </p:sp>
+              <a:t>PATTERN MATRIX</a:t>
+            </a:r>
+          </a:p>
+        </p:txBody>
+      </p:sp>
+      <p:sp>
+        <p:nvSpPr>
+          <p:cNvPr id="9" name="TextBox 8">
+            <a:extLst>
+              <a:ext uri="{FF2B5EF4-FFF2-40B4-BE49-F238E27FC236}">
+                <a16:creationId xmlns:a16="http://schemas.microsoft.com/office/drawing/2014/main" id="{0EB27A0A-0A8E-47AD-B3A8-2C716FB8128A}"/>
+              </a:ext>
+            </a:extLst>
+          </p:cNvPr>
+          <p:cNvSpPr txBox="1"/>
+          <p:nvPr/>
+        </p:nvSpPr>
+        <p:spPr>
+          <a:xfrm>
+            <a:off x="7121745" y="2887150"/>
+            <a:ext cx="4796871" cy="1077218"/>
+          </a:xfrm>
+          <a:prstGeom prst="rect">
+            <a:avLst/>
+          </a:prstGeom>
+          <a:noFill/>
+        </p:spPr>
+        <p:txBody>
+          <a:bodyPr wrap="square" rtlCol="0">
+            <a:spAutoFit/>
+          </a:bodyPr>
+          <a:lstStyle/>
+          <a:p>
+            <a:r>
+              <a:rPr lang="en-GB" dirty="0">
+                <a:solidFill>
+                  <a:srgbClr val="A41AE4"/>
+                </a:solidFill>
+              </a:rPr>
+              <a:t>A squared loading reflects the proportion of variance in an item that is explained by a factor.  </a:t>
+            </a:r>
+          </a:p>
+          <a:p>
+            <a:r>
+              <a:rPr lang="en-GB" sz="1400" dirty="0">
+                <a:solidFill>
+                  <a:srgbClr val="A41AE4"/>
+                </a:solidFill>
+              </a:rPr>
+              <a:t>e.g., 0.48</a:t>
+            </a:r>
+            <a:r>
+              <a:rPr lang="en-GB" sz="1400" b="0" i="0" dirty="0">
+                <a:solidFill>
+                  <a:srgbClr val="A41AE4"/>
+                </a:solidFill>
+                <a:effectLst/>
+                <a:latin typeface="-apple-system"/>
+              </a:rPr>
+              <a:t>² </a:t>
+            </a:r>
+            <a:r>
+              <a:rPr lang="en-GB" sz="1400" dirty="0">
+                <a:solidFill>
+                  <a:srgbClr val="A41AE4"/>
+                </a:solidFill>
+              </a:rPr>
+              <a:t> = 0.23</a:t>
+            </a:r>
+          </a:p>
+          <a:p>
+            <a:r>
+              <a:rPr lang="en-GB" sz="1400" dirty="0">
+                <a:solidFill>
+                  <a:srgbClr val="A41AE4"/>
+                </a:solidFill>
+              </a:rPr>
+              <a:t>23% of the variance in Q10 is explained by Factor 2</a:t>
+            </a:r>
+          </a:p>
+        </p:txBody>
+      </p:sp>
+      <p:sp>
+        <p:nvSpPr>
+          <p:cNvPr id="10" name="TextBox 9">
+            <a:extLst>
+              <a:ext uri="{FF2B5EF4-FFF2-40B4-BE49-F238E27FC236}">
+                <a16:creationId xmlns:a16="http://schemas.microsoft.com/office/drawing/2014/main" id="{38A4E531-FCB1-4FD3-8F3A-4ECE09E4C498}"/>
+              </a:ext>
+            </a:extLst>
+          </p:cNvPr>
+          <p:cNvSpPr txBox="1"/>
+          <p:nvPr/>
+        </p:nvSpPr>
+        <p:spPr>
+          <a:xfrm>
+            <a:off x="7121745" y="1508921"/>
+            <a:ext cx="4641184" cy="1077218"/>
+          </a:xfrm>
+          <a:prstGeom prst="rect">
+            <a:avLst/>
+          </a:prstGeom>
+          <a:noFill/>
+        </p:spPr>
+        <p:txBody>
+          <a:bodyPr wrap="square">
+            <a:spAutoFit/>
+          </a:bodyPr>
+          <a:lstStyle/>
+          <a:p>
+            <a:r>
+              <a:rPr lang="en-GB" dirty="0">
+                <a:solidFill>
+                  <a:srgbClr val="A41AE4"/>
+                </a:solidFill>
+              </a:rPr>
+              <a:t>Loadings show the association between each item and each factor. </a:t>
+            </a:r>
+          </a:p>
+          <a:p>
+            <a:r>
+              <a:rPr lang="en-GB" sz="1400" dirty="0">
+                <a:solidFill>
+                  <a:srgbClr val="A41AE4"/>
+                </a:solidFill>
+              </a:rPr>
+              <a:t>With no rotation or an orthogonal rotation these are correlation coefficients. </a:t>
+            </a:r>
+            <a:endParaRPr lang="en-GB" sz="1400" baseline="-25000" dirty="0">
+              <a:solidFill>
+                <a:srgbClr val="A41AE4"/>
+              </a:solidFill>
+            </a:endParaRPr>
+          </a:p>
+        </p:txBody>
+      </p:sp>
+      <p:cxnSp>
+        <p:nvCxnSpPr>
+          <p:cNvPr id="4" name="Straight Connector 3">
+            <a:extLst>
+              <a:ext uri="{FF2B5EF4-FFF2-40B4-BE49-F238E27FC236}">
+                <a16:creationId xmlns:a16="http://schemas.microsoft.com/office/drawing/2014/main" id="{21B60257-75A3-4DEA-A2E1-D94F831BF493}"/>
+              </a:ext>
+            </a:extLst>
+          </p:cNvPr>
+          <p:cNvCxnSpPr/>
+          <p:nvPr/>
+        </p:nvCxnSpPr>
+        <p:spPr>
+          <a:xfrm>
+            <a:off x="8296275" y="1057275"/>
+            <a:ext cx="1619250" cy="0"/>
+          </a:xfrm>
+          <a:prstGeom prst="line">
+            <a:avLst/>
+          </a:prstGeom>
+          <a:ln w="38100">
+            <a:solidFill>
+              <a:srgbClr val="FF0000"/>
+            </a:solidFill>
+          </a:ln>
+        </p:spPr>
+        <p:style>
+          <a:lnRef idx="1">
+            <a:schemeClr val="accent2"/>
+          </a:lnRef>
+          <a:fillRef idx="0">
+            <a:schemeClr val="accent2"/>
+          </a:fillRef>
+          <a:effectRef idx="0">
+            <a:schemeClr val="accent2"/>
+          </a:effectRef>
+          <a:fontRef idx="minor">
+            <a:schemeClr val="tx1"/>
+          </a:fontRef>
+        </p:style>
+      </p:cxnSp>
+      <p:grpSp>
+        <p:nvGrpSpPr>
+          <p:cNvPr id="34" name="Group 33">
+            <a:extLst>
+              <a:ext uri="{FF2B5EF4-FFF2-40B4-BE49-F238E27FC236}">
+                <a16:creationId xmlns:a16="http://schemas.microsoft.com/office/drawing/2014/main" id="{3763495A-D04B-449B-9336-7F70E8C0089E}"/>
+              </a:ext>
+            </a:extLst>
+          </p:cNvPr>
+          <p:cNvGrpSpPr/>
+          <p:nvPr/>
+        </p:nvGrpSpPr>
+        <p:grpSpPr>
+          <a:xfrm>
+            <a:off x="7561200" y="4260140"/>
+            <a:ext cx="4197496" cy="2496626"/>
+            <a:chOff x="486440" y="312156"/>
+            <a:chExt cx="4197496" cy="2496626"/>
+          </a:xfrm>
+        </p:grpSpPr>
+        <p:sp>
+          <p:nvSpPr>
+            <p:cNvPr id="35" name="Oval 34">
+              <a:extLst>
+                <a:ext uri="{FF2B5EF4-FFF2-40B4-BE49-F238E27FC236}">
+                  <a16:creationId xmlns:a16="http://schemas.microsoft.com/office/drawing/2014/main" id="{120AFB90-041A-41E2-8021-FE753C030D81}"/>
+                </a:ext>
+              </a:extLst>
+            </p:cNvPr>
+            <p:cNvSpPr/>
+            <p:nvPr/>
+          </p:nvSpPr>
+          <p:spPr>
+            <a:xfrm>
+              <a:off x="2024323" y="672742"/>
+              <a:ext cx="1100667" cy="1077218"/>
+            </a:xfrm>
+            <a:prstGeom prst="ellipse">
+              <a:avLst/>
+            </a:prstGeom>
+            <a:noFill/>
+            <a:ln>
+              <a:solidFill>
+                <a:schemeClr val="tx1"/>
+              </a:solidFill>
+            </a:ln>
+          </p:spPr>
+          <p:style>
+            <a:lnRef idx="2">
+              <a:schemeClr val="accent1">
+                <a:shade val="50000"/>
+              </a:schemeClr>
+            </a:lnRef>
+            <a:fillRef idx="1">
+              <a:schemeClr val="accent1"/>
+            </a:fillRef>
+            <a:effectRef idx="0">
+              <a:schemeClr val="accent1"/>
+            </a:effectRef>
+            <a:fontRef idx="minor">
+              <a:schemeClr val="lt1"/>
+            </a:fontRef>
+          </p:style>
+          <p:txBody>
+            <a:bodyPr rtlCol="0" anchor="ctr"/>
+            <a:lstStyle/>
+            <a:p>
+              <a:pPr algn="ctr"/>
+              <a:r>
+                <a:rPr lang="en-GB" sz="1400" dirty="0">
+                  <a:solidFill>
+                    <a:schemeClr val="tx1"/>
+                  </a:solidFill>
+                </a:rPr>
+                <a:t>Q10</a:t>
+              </a:r>
+            </a:p>
+            <a:p>
+              <a:pPr algn="ctr"/>
+              <a:endParaRPr lang="en-GB" sz="1400" dirty="0">
+                <a:solidFill>
+                  <a:schemeClr val="tx1"/>
+                </a:solidFill>
+              </a:endParaRPr>
+            </a:p>
+            <a:p>
+              <a:pPr algn="ctr"/>
+              <a:endParaRPr lang="en-GB" sz="1400" dirty="0">
+                <a:solidFill>
+                  <a:schemeClr val="tx1"/>
+                </a:solidFill>
+              </a:endParaRPr>
+            </a:p>
+          </p:txBody>
+        </p:sp>
+        <p:sp>
+          <p:nvSpPr>
+            <p:cNvPr id="36" name="Oval 35">
+              <a:extLst>
+                <a:ext uri="{FF2B5EF4-FFF2-40B4-BE49-F238E27FC236}">
+                  <a16:creationId xmlns:a16="http://schemas.microsoft.com/office/drawing/2014/main" id="{2B0E4DF3-F6E0-4FFE-93EB-1F1B74293664}"/>
+                </a:ext>
+              </a:extLst>
+            </p:cNvPr>
+            <p:cNvSpPr/>
+            <p:nvPr/>
+          </p:nvSpPr>
+          <p:spPr>
+            <a:xfrm>
+              <a:off x="2729238" y="874900"/>
+              <a:ext cx="1100667" cy="1077218"/>
+            </a:xfrm>
+            <a:prstGeom prst="ellipse">
+              <a:avLst/>
+            </a:prstGeom>
+            <a:noFill/>
+            <a:ln>
+              <a:solidFill>
+                <a:schemeClr val="tx1"/>
+              </a:solidFill>
+            </a:ln>
+          </p:spPr>
+          <p:style>
+            <a:lnRef idx="2">
+              <a:schemeClr val="accent1">
+                <a:shade val="50000"/>
+              </a:schemeClr>
+            </a:lnRef>
+            <a:fillRef idx="1">
+              <a:schemeClr val="accent1"/>
+            </a:fillRef>
+            <a:effectRef idx="0">
+              <a:schemeClr val="accent1"/>
+            </a:effectRef>
+            <a:fontRef idx="minor">
+              <a:schemeClr val="lt1"/>
+            </a:fontRef>
+          </p:style>
+          <p:txBody>
+            <a:bodyPr rtlCol="0" anchor="ctr"/>
+            <a:lstStyle/>
+            <a:p>
+              <a:pPr algn="ctr"/>
+              <a:r>
+                <a:rPr lang="en-GB" sz="1400" dirty="0">
+                  <a:solidFill>
+                    <a:schemeClr val="tx1"/>
+                  </a:solidFill>
+                </a:rPr>
+                <a:t>       ML2</a:t>
+              </a:r>
+            </a:p>
+          </p:txBody>
+        </p:sp>
+        <p:sp>
+          <p:nvSpPr>
+            <p:cNvPr id="37" name="Oval 36">
+              <a:extLst>
+                <a:ext uri="{FF2B5EF4-FFF2-40B4-BE49-F238E27FC236}">
+                  <a16:creationId xmlns:a16="http://schemas.microsoft.com/office/drawing/2014/main" id="{C3D35DCD-B18C-480B-92FD-9B02EA8E8E7D}"/>
+                </a:ext>
+              </a:extLst>
+            </p:cNvPr>
+            <p:cNvSpPr/>
+            <p:nvPr/>
+          </p:nvSpPr>
+          <p:spPr>
+            <a:xfrm>
+              <a:off x="1505739" y="1325396"/>
+              <a:ext cx="1100667" cy="1077218"/>
+            </a:xfrm>
+            <a:prstGeom prst="ellipse">
+              <a:avLst/>
+            </a:prstGeom>
+            <a:noFill/>
+            <a:ln>
+              <a:solidFill>
+                <a:schemeClr val="tx1"/>
+              </a:solidFill>
+            </a:ln>
+          </p:spPr>
+          <p:style>
+            <a:lnRef idx="2">
+              <a:schemeClr val="accent1">
+                <a:shade val="50000"/>
+              </a:schemeClr>
+            </a:lnRef>
+            <a:fillRef idx="1">
+              <a:schemeClr val="accent1"/>
+            </a:fillRef>
+            <a:effectRef idx="0">
+              <a:schemeClr val="accent1"/>
+            </a:effectRef>
+            <a:fontRef idx="minor">
+              <a:schemeClr val="lt1"/>
+            </a:fontRef>
+          </p:style>
+          <p:txBody>
+            <a:bodyPr rtlCol="0" anchor="ctr"/>
+            <a:lstStyle/>
+            <a:p>
+              <a:pPr algn="ctr"/>
+              <a:r>
+                <a:rPr lang="en-GB" sz="1400" dirty="0">
+                  <a:solidFill>
+                    <a:schemeClr val="tx1"/>
+                  </a:solidFill>
+                </a:rPr>
+                <a:t>ML1</a:t>
+              </a:r>
+            </a:p>
+          </p:txBody>
+        </p:sp>
+        <p:sp>
+          <p:nvSpPr>
+            <p:cNvPr id="38" name="TextBox 37">
+              <a:extLst>
+                <a:ext uri="{FF2B5EF4-FFF2-40B4-BE49-F238E27FC236}">
+                  <a16:creationId xmlns:a16="http://schemas.microsoft.com/office/drawing/2014/main" id="{08F9F24C-DC2B-44B1-A885-20A8F84E010B}"/>
+                </a:ext>
+              </a:extLst>
+            </p:cNvPr>
+            <p:cNvSpPr txBox="1"/>
+            <p:nvPr/>
+          </p:nvSpPr>
+          <p:spPr>
+            <a:xfrm>
+              <a:off x="2606406" y="2162451"/>
+              <a:ext cx="2077530" cy="646331"/>
+            </a:xfrm>
+            <a:prstGeom prst="rect">
+              <a:avLst/>
+            </a:prstGeom>
+            <a:noFill/>
+          </p:spPr>
+          <p:txBody>
+            <a:bodyPr wrap="square" rtlCol="0">
+              <a:spAutoFit/>
+            </a:bodyPr>
+            <a:lstStyle/>
+            <a:p>
+              <a:r>
+                <a:rPr lang="en-GB" sz="1200" dirty="0"/>
+                <a:t>rotate = “none”</a:t>
+              </a:r>
+            </a:p>
+            <a:p>
+              <a:r>
+                <a:rPr lang="en-GB" sz="1200" dirty="0"/>
+                <a:t>means that ML1 and ML2 are uncorrelated (no overlap)</a:t>
+              </a:r>
+            </a:p>
+          </p:txBody>
+        </p:sp>
+        <p:cxnSp>
+          <p:nvCxnSpPr>
+            <p:cNvPr id="39" name="Straight Arrow Connector 38">
+              <a:extLst>
+                <a:ext uri="{FF2B5EF4-FFF2-40B4-BE49-F238E27FC236}">
+                  <a16:creationId xmlns:a16="http://schemas.microsoft.com/office/drawing/2014/main" id="{27ECE7C7-0E1C-43E5-B61D-77FC835C10A6}"/>
+                </a:ext>
+              </a:extLst>
+            </p:cNvPr>
+            <p:cNvCxnSpPr>
+              <a:cxnSpLocks/>
+            </p:cNvCxnSpPr>
+            <p:nvPr/>
+          </p:nvCxnSpPr>
+          <p:spPr>
+            <a:xfrm flipH="1">
+              <a:off x="2960823" y="672742"/>
+              <a:ext cx="394044" cy="618296"/>
+            </a:xfrm>
+            <a:prstGeom prst="straightConnector1">
+              <a:avLst/>
+            </a:prstGeom>
+            <a:ln>
+              <a:solidFill>
+                <a:schemeClr val="accent6"/>
+              </a:solidFill>
+              <a:tailEnd type="triangle"/>
+            </a:ln>
+          </p:spPr>
+          <p:style>
+            <a:lnRef idx="1">
+              <a:schemeClr val="accent1"/>
+            </a:lnRef>
+            <a:fillRef idx="0">
+              <a:schemeClr val="accent1"/>
+            </a:fillRef>
+            <a:effectRef idx="0">
+              <a:schemeClr val="accent1"/>
+            </a:effectRef>
+            <a:fontRef idx="minor">
+              <a:schemeClr val="tx1"/>
+            </a:fontRef>
+          </p:style>
+        </p:cxnSp>
+        <p:sp>
+          <p:nvSpPr>
+            <p:cNvPr id="40" name="TextBox 39">
+              <a:extLst>
+                <a:ext uri="{FF2B5EF4-FFF2-40B4-BE49-F238E27FC236}">
+                  <a16:creationId xmlns:a16="http://schemas.microsoft.com/office/drawing/2014/main" id="{465FDB86-A93E-4932-9C05-605DD688CA12}"/>
+                </a:ext>
+              </a:extLst>
+            </p:cNvPr>
+            <p:cNvSpPr txBox="1"/>
+            <p:nvPr/>
+          </p:nvSpPr>
+          <p:spPr>
+            <a:xfrm>
+              <a:off x="3312335" y="312156"/>
+              <a:ext cx="1371601" cy="461665"/>
+            </a:xfrm>
+            <a:prstGeom prst="rect">
+              <a:avLst/>
+            </a:prstGeom>
+            <a:noFill/>
+            <a:ln>
+              <a:noFill/>
+            </a:ln>
+          </p:spPr>
+          <p:txBody>
+            <a:bodyPr wrap="square" rtlCol="0">
+              <a:spAutoFit/>
+            </a:bodyPr>
+            <a:lstStyle/>
+            <a:p>
+              <a:r>
+                <a:rPr lang="en-GB" sz="1200" dirty="0">
+                  <a:solidFill>
+                    <a:schemeClr val="accent6"/>
+                  </a:solidFill>
+                </a:rPr>
+                <a:t>Variance in Q10 explained by ML2</a:t>
+              </a:r>
+            </a:p>
+          </p:txBody>
+        </p:sp>
+        <p:cxnSp>
+          <p:nvCxnSpPr>
+            <p:cNvPr id="41" name="Straight Arrow Connector 40">
+              <a:extLst>
+                <a:ext uri="{FF2B5EF4-FFF2-40B4-BE49-F238E27FC236}">
+                  <a16:creationId xmlns:a16="http://schemas.microsoft.com/office/drawing/2014/main" id="{22C0AD0A-3881-40E2-BECE-500920B93A85}"/>
+                </a:ext>
+              </a:extLst>
+            </p:cNvPr>
+            <p:cNvCxnSpPr>
+              <a:cxnSpLocks/>
+            </p:cNvCxnSpPr>
+            <p:nvPr/>
+          </p:nvCxnSpPr>
+          <p:spPr>
+            <a:xfrm>
+              <a:off x="1532670" y="1291038"/>
+              <a:ext cx="833368" cy="277264"/>
+            </a:xfrm>
+            <a:prstGeom prst="straightConnector1">
+              <a:avLst/>
+            </a:prstGeom>
+            <a:ln>
+              <a:solidFill>
+                <a:schemeClr val="accent6"/>
+              </a:solidFill>
+              <a:tailEnd type="triangle"/>
+            </a:ln>
+          </p:spPr>
+          <p:style>
+            <a:lnRef idx="1">
+              <a:schemeClr val="accent1"/>
+            </a:lnRef>
+            <a:fillRef idx="0">
+              <a:schemeClr val="accent1"/>
+            </a:fillRef>
+            <a:effectRef idx="0">
+              <a:schemeClr val="accent1"/>
+            </a:effectRef>
+            <a:fontRef idx="minor">
+              <a:schemeClr val="tx1"/>
+            </a:fontRef>
+          </p:style>
+        </p:cxnSp>
+        <p:sp>
+          <p:nvSpPr>
+            <p:cNvPr id="42" name="TextBox 41">
+              <a:extLst>
+                <a:ext uri="{FF2B5EF4-FFF2-40B4-BE49-F238E27FC236}">
+                  <a16:creationId xmlns:a16="http://schemas.microsoft.com/office/drawing/2014/main" id="{ED506DE6-49AC-4F89-8C17-1C1148B3EC1B}"/>
+                </a:ext>
+              </a:extLst>
+            </p:cNvPr>
+            <p:cNvSpPr txBox="1"/>
+            <p:nvPr/>
+          </p:nvSpPr>
+          <p:spPr>
+            <a:xfrm>
+              <a:off x="486440" y="878547"/>
+              <a:ext cx="1277596" cy="461665"/>
+            </a:xfrm>
+            <a:prstGeom prst="rect">
+              <a:avLst/>
+            </a:prstGeom>
+            <a:noFill/>
+          </p:spPr>
+          <p:txBody>
+            <a:bodyPr wrap="square" rtlCol="0">
+              <a:spAutoFit/>
+            </a:bodyPr>
+            <a:lstStyle/>
+            <a:p>
+              <a:r>
+                <a:rPr lang="en-GB" sz="1200" dirty="0">
+                  <a:solidFill>
+                    <a:schemeClr val="accent6"/>
+                  </a:solidFill>
+                </a:rPr>
+                <a:t>Variance in Q10 explained by ML1</a:t>
+              </a:r>
+            </a:p>
+          </p:txBody>
+        </p:sp>
+      </p:grpSp>
     </p:spTree>
     <p:extLst>
       <p:ext uri="{BB962C8B-B14F-4D97-AF65-F5344CB8AC3E}">
-        <p14:creationId xmlns:p14="http://schemas.microsoft.com/office/powerpoint/2010/main" val="1182809476"/>
+        <p14:creationId xmlns:p14="http://schemas.microsoft.com/office/powerpoint/2010/main" val="356154166"/>
       </p:ext>
     </p:extLst>
   </p:cSld>
@@ -8046,236 +9530,916 @@
           <a:chExt cx="0" cy="0"/>
         </a:xfrm>
       </p:grpSpPr>
-      <p:pic>
-        <p:nvPicPr>
-          <p:cNvPr id="10" name="Picture 9">
-            <a:extLst>
-              <a:ext uri="{FF2B5EF4-FFF2-40B4-BE49-F238E27FC236}">
-                <a16:creationId xmlns:a16="http://schemas.microsoft.com/office/drawing/2014/main" id="{B3F4931C-F9FB-440B-B1BA-4D66E0860170}"/>
-              </a:ext>
-            </a:extLst>
-          </p:cNvPr>
-          <p:cNvPicPr>
-            <a:picLocks noChangeAspect="1"/>
-          </p:cNvPicPr>
-          <p:nvPr/>
-        </p:nvPicPr>
-        <p:blipFill>
-          <a:blip r:embed="rId2"/>
-          <a:stretch>
-            <a:fillRect/>
-          </a:stretch>
-        </p:blipFill>
-        <p:spPr>
-          <a:xfrm>
-            <a:off x="2906200" y="412481"/>
-            <a:ext cx="8021169" cy="5982535"/>
-          </a:xfrm>
-          <a:prstGeom prst="rect">
-            <a:avLst/>
-          </a:prstGeom>
-        </p:spPr>
-      </p:pic>
-      <p:sp>
-        <p:nvSpPr>
-          <p:cNvPr id="11" name="TextBox 10">
-            <a:extLst>
-              <a:ext uri="{FF2B5EF4-FFF2-40B4-BE49-F238E27FC236}">
-                <a16:creationId xmlns:a16="http://schemas.microsoft.com/office/drawing/2014/main" id="{493E50EB-A39A-4313-86FF-0F97860C9441}"/>
-              </a:ext>
-            </a:extLst>
-          </p:cNvPr>
-          <p:cNvSpPr txBox="1"/>
-          <p:nvPr/>
-        </p:nvSpPr>
-        <p:spPr>
-          <a:xfrm>
-            <a:off x="7338602" y="1409822"/>
-            <a:ext cx="4281898" cy="1354217"/>
-          </a:xfrm>
-          <a:prstGeom prst="rect">
-            <a:avLst/>
-          </a:prstGeom>
-          <a:noFill/>
-        </p:spPr>
-        <p:txBody>
-          <a:bodyPr wrap="square" rtlCol="0">
-            <a:spAutoFit/>
-          </a:bodyPr>
-          <a:lstStyle/>
-          <a:p>
-            <a:r>
-              <a:rPr lang="en-GB" dirty="0">
-                <a:solidFill>
-                  <a:srgbClr val="A41AE4"/>
-                </a:solidFill>
-              </a:rPr>
-              <a:t>The proportion of variance in each item that is left </a:t>
-            </a:r>
-            <a:r>
-              <a:rPr lang="en-GB" i="1" dirty="0">
-                <a:solidFill>
-                  <a:srgbClr val="A41AE4"/>
-                </a:solidFill>
-              </a:rPr>
-              <a:t>unexplained</a:t>
-            </a:r>
-            <a:r>
-              <a:rPr lang="en-GB" dirty="0">
-                <a:solidFill>
-                  <a:srgbClr val="A41AE4"/>
-                </a:solidFill>
-              </a:rPr>
-              <a:t> by the factors is 1 minus the communality. </a:t>
-            </a:r>
-          </a:p>
-          <a:p>
-            <a:r>
-              <a:rPr lang="en-GB" sz="1400" dirty="0">
-                <a:solidFill>
-                  <a:srgbClr val="A41AE4"/>
-                </a:solidFill>
-              </a:rPr>
-              <a:t>e.g., 1 - 0.30 = 0.70</a:t>
-            </a:r>
-          </a:p>
-          <a:p>
-            <a:r>
-              <a:rPr lang="en-GB" sz="1400" dirty="0">
-                <a:solidFill>
-                  <a:srgbClr val="A41AE4"/>
-                </a:solidFill>
-              </a:rPr>
-              <a:t>70% of the variance in item 6 is left unexplained</a:t>
-            </a:r>
-          </a:p>
-        </p:txBody>
-      </p:sp>
-      <p:sp>
-        <p:nvSpPr>
-          <p:cNvPr id="7" name="Rectangle 6">
-            <a:extLst>
-              <a:ext uri="{FF2B5EF4-FFF2-40B4-BE49-F238E27FC236}">
-                <a16:creationId xmlns:a16="http://schemas.microsoft.com/office/drawing/2014/main" id="{784F6F5B-D766-4856-B749-EDD476E6C58D}"/>
-              </a:ext>
-            </a:extLst>
-          </p:cNvPr>
-          <p:cNvSpPr/>
-          <p:nvPr/>
-        </p:nvSpPr>
-        <p:spPr>
-          <a:xfrm>
-            <a:off x="5626100" y="1536701"/>
-            <a:ext cx="584200" cy="2108200"/>
-          </a:xfrm>
-          <a:prstGeom prst="rect">
-            <a:avLst/>
-          </a:prstGeom>
-          <a:noFill/>
-          <a:ln>
-            <a:solidFill>
-              <a:srgbClr val="A41AE4"/>
-            </a:solidFill>
-          </a:ln>
-        </p:spPr>
-        <p:style>
-          <a:lnRef idx="2">
-            <a:schemeClr val="accent1">
-              <a:shade val="50000"/>
-            </a:schemeClr>
-          </a:lnRef>
-          <a:fillRef idx="1">
-            <a:schemeClr val="accent1"/>
-          </a:fillRef>
-          <a:effectRef idx="0">
-            <a:schemeClr val="accent1"/>
-          </a:effectRef>
-          <a:fontRef idx="minor">
-            <a:schemeClr val="lt1"/>
-          </a:fontRef>
-        </p:style>
-        <p:txBody>
-          <a:bodyPr rtlCol="0" anchor="ctr"/>
-          <a:lstStyle/>
-          <a:p>
-            <a:pPr algn="ctr"/>
-            <a:endParaRPr lang="en-GB"/>
-          </a:p>
-        </p:txBody>
-      </p:sp>
-      <p:pic>
-        <p:nvPicPr>
-          <p:cNvPr id="5" name="Picture 4">
-            <a:extLst>
-              <a:ext uri="{FF2B5EF4-FFF2-40B4-BE49-F238E27FC236}">
-                <a16:creationId xmlns:a16="http://schemas.microsoft.com/office/drawing/2014/main" id="{B88D991B-8CBA-4FA2-8D4D-27BF186BF096}"/>
-              </a:ext>
-            </a:extLst>
-          </p:cNvPr>
-          <p:cNvPicPr>
-            <a:picLocks noChangeAspect="1"/>
-          </p:cNvPicPr>
-          <p:nvPr/>
-        </p:nvPicPr>
-        <p:blipFill>
-          <a:blip r:embed="rId3"/>
-          <a:stretch>
-            <a:fillRect/>
-          </a:stretch>
-        </p:blipFill>
-        <p:spPr>
-          <a:xfrm>
-            <a:off x="2918865" y="6438549"/>
-            <a:ext cx="485843" cy="257211"/>
-          </a:xfrm>
-          <a:prstGeom prst="rect">
-            <a:avLst/>
-          </a:prstGeom>
-        </p:spPr>
-      </p:pic>
-      <p:sp>
-        <p:nvSpPr>
-          <p:cNvPr id="8" name="TextBox 7">
-            <a:extLst>
-              <a:ext uri="{FF2B5EF4-FFF2-40B4-BE49-F238E27FC236}">
-                <a16:creationId xmlns:a16="http://schemas.microsoft.com/office/drawing/2014/main" id="{E35F28DC-BFB5-4A99-96DD-FCB2CFBB942D}"/>
-              </a:ext>
-            </a:extLst>
-          </p:cNvPr>
-          <p:cNvSpPr txBox="1"/>
-          <p:nvPr/>
-        </p:nvSpPr>
-        <p:spPr>
-          <a:xfrm>
-            <a:off x="75499" y="-25167"/>
-            <a:ext cx="5893501" cy="461665"/>
-          </a:xfrm>
-          <a:prstGeom prst="rect">
-            <a:avLst/>
-          </a:prstGeom>
-          <a:noFill/>
-        </p:spPr>
-        <p:txBody>
-          <a:bodyPr wrap="square" rtlCol="0">
-            <a:spAutoFit/>
-          </a:bodyPr>
-          <a:lstStyle/>
-          <a:p>
-            <a:r>
-              <a:rPr lang="en-GB" sz="2400" u="sng" dirty="0">
-                <a:solidFill>
-                  <a:srgbClr val="A41AE4"/>
-                </a:solidFill>
-              </a:rPr>
-              <a:t>UNIQUENESS</a:t>
-            </a:r>
-          </a:p>
-        </p:txBody>
-      </p:sp>
+      <p:grpSp>
+        <p:nvGrpSpPr>
+          <p:cNvPr id="37" name="Group 36">
+            <a:extLst>
+              <a:ext uri="{FF2B5EF4-FFF2-40B4-BE49-F238E27FC236}">
+                <a16:creationId xmlns:a16="http://schemas.microsoft.com/office/drawing/2014/main" id="{04D83235-ABD5-426B-A921-4956851097C8}"/>
+              </a:ext>
+            </a:extLst>
+          </p:cNvPr>
+          <p:cNvGrpSpPr/>
+          <p:nvPr/>
+        </p:nvGrpSpPr>
+        <p:grpSpPr>
+          <a:xfrm>
+            <a:off x="486440" y="312156"/>
+            <a:ext cx="4197496" cy="2496626"/>
+            <a:chOff x="486440" y="312156"/>
+            <a:chExt cx="4197496" cy="2496626"/>
+          </a:xfrm>
+        </p:grpSpPr>
+        <p:sp>
+          <p:nvSpPr>
+            <p:cNvPr id="4" name="Oval 3">
+              <a:extLst>
+                <a:ext uri="{FF2B5EF4-FFF2-40B4-BE49-F238E27FC236}">
+                  <a16:creationId xmlns:a16="http://schemas.microsoft.com/office/drawing/2014/main" id="{EFDF76FB-4C32-4775-B90A-FBEE6E3B8690}"/>
+                </a:ext>
+              </a:extLst>
+            </p:cNvPr>
+            <p:cNvSpPr/>
+            <p:nvPr/>
+          </p:nvSpPr>
+          <p:spPr>
+            <a:xfrm>
+              <a:off x="2024323" y="672742"/>
+              <a:ext cx="1100667" cy="1077218"/>
+            </a:xfrm>
+            <a:prstGeom prst="ellipse">
+              <a:avLst/>
+            </a:prstGeom>
+            <a:noFill/>
+            <a:ln>
+              <a:solidFill>
+                <a:schemeClr val="tx1"/>
+              </a:solidFill>
+            </a:ln>
+          </p:spPr>
+          <p:style>
+            <a:lnRef idx="2">
+              <a:schemeClr val="accent1">
+                <a:shade val="50000"/>
+              </a:schemeClr>
+            </a:lnRef>
+            <a:fillRef idx="1">
+              <a:schemeClr val="accent1"/>
+            </a:fillRef>
+            <a:effectRef idx="0">
+              <a:schemeClr val="accent1"/>
+            </a:effectRef>
+            <a:fontRef idx="minor">
+              <a:schemeClr val="lt1"/>
+            </a:fontRef>
+          </p:style>
+          <p:txBody>
+            <a:bodyPr rtlCol="0" anchor="ctr"/>
+            <a:lstStyle/>
+            <a:p>
+              <a:pPr algn="ctr"/>
+              <a:r>
+                <a:rPr lang="en-GB" sz="1400" dirty="0">
+                  <a:solidFill>
+                    <a:schemeClr val="tx1"/>
+                  </a:solidFill>
+                </a:rPr>
+                <a:t>Q10</a:t>
+              </a:r>
+            </a:p>
+            <a:p>
+              <a:pPr algn="ctr"/>
+              <a:endParaRPr lang="en-GB" sz="1400" dirty="0">
+                <a:solidFill>
+                  <a:schemeClr val="tx1"/>
+                </a:solidFill>
+              </a:endParaRPr>
+            </a:p>
+            <a:p>
+              <a:pPr algn="ctr"/>
+              <a:endParaRPr lang="en-GB" sz="1400" dirty="0">
+                <a:solidFill>
+                  <a:schemeClr val="tx1"/>
+                </a:solidFill>
+              </a:endParaRPr>
+            </a:p>
+          </p:txBody>
+        </p:sp>
+        <p:sp>
+          <p:nvSpPr>
+            <p:cNvPr id="5" name="Oval 4">
+              <a:extLst>
+                <a:ext uri="{FF2B5EF4-FFF2-40B4-BE49-F238E27FC236}">
+                  <a16:creationId xmlns:a16="http://schemas.microsoft.com/office/drawing/2014/main" id="{8DAA364F-F5F3-4E13-9BB4-621D795AF70F}"/>
+                </a:ext>
+              </a:extLst>
+            </p:cNvPr>
+            <p:cNvSpPr/>
+            <p:nvPr/>
+          </p:nvSpPr>
+          <p:spPr>
+            <a:xfrm>
+              <a:off x="2729238" y="874900"/>
+              <a:ext cx="1100667" cy="1077218"/>
+            </a:xfrm>
+            <a:prstGeom prst="ellipse">
+              <a:avLst/>
+            </a:prstGeom>
+            <a:noFill/>
+            <a:ln>
+              <a:solidFill>
+                <a:schemeClr val="tx1"/>
+              </a:solidFill>
+            </a:ln>
+          </p:spPr>
+          <p:style>
+            <a:lnRef idx="2">
+              <a:schemeClr val="accent1">
+                <a:shade val="50000"/>
+              </a:schemeClr>
+            </a:lnRef>
+            <a:fillRef idx="1">
+              <a:schemeClr val="accent1"/>
+            </a:fillRef>
+            <a:effectRef idx="0">
+              <a:schemeClr val="accent1"/>
+            </a:effectRef>
+            <a:fontRef idx="minor">
+              <a:schemeClr val="lt1"/>
+            </a:fontRef>
+          </p:style>
+          <p:txBody>
+            <a:bodyPr rtlCol="0" anchor="ctr"/>
+            <a:lstStyle/>
+            <a:p>
+              <a:pPr algn="ctr"/>
+              <a:r>
+                <a:rPr lang="en-GB" sz="1400" dirty="0">
+                  <a:solidFill>
+                    <a:schemeClr val="tx1"/>
+                  </a:solidFill>
+                </a:rPr>
+                <a:t>       ML2</a:t>
+              </a:r>
+            </a:p>
+          </p:txBody>
+        </p:sp>
+        <p:sp>
+          <p:nvSpPr>
+            <p:cNvPr id="6" name="Oval 5">
+              <a:extLst>
+                <a:ext uri="{FF2B5EF4-FFF2-40B4-BE49-F238E27FC236}">
+                  <a16:creationId xmlns:a16="http://schemas.microsoft.com/office/drawing/2014/main" id="{04348250-38BF-42A2-8502-7490D0515FA9}"/>
+                </a:ext>
+              </a:extLst>
+            </p:cNvPr>
+            <p:cNvSpPr/>
+            <p:nvPr/>
+          </p:nvSpPr>
+          <p:spPr>
+            <a:xfrm>
+              <a:off x="1505739" y="1325396"/>
+              <a:ext cx="1100667" cy="1077218"/>
+            </a:xfrm>
+            <a:prstGeom prst="ellipse">
+              <a:avLst/>
+            </a:prstGeom>
+            <a:noFill/>
+            <a:ln>
+              <a:solidFill>
+                <a:schemeClr val="tx1"/>
+              </a:solidFill>
+            </a:ln>
+          </p:spPr>
+          <p:style>
+            <a:lnRef idx="2">
+              <a:schemeClr val="accent1">
+                <a:shade val="50000"/>
+              </a:schemeClr>
+            </a:lnRef>
+            <a:fillRef idx="1">
+              <a:schemeClr val="accent1"/>
+            </a:fillRef>
+            <a:effectRef idx="0">
+              <a:schemeClr val="accent1"/>
+            </a:effectRef>
+            <a:fontRef idx="minor">
+              <a:schemeClr val="lt1"/>
+            </a:fontRef>
+          </p:style>
+          <p:txBody>
+            <a:bodyPr rtlCol="0" anchor="ctr"/>
+            <a:lstStyle/>
+            <a:p>
+              <a:pPr algn="ctr"/>
+              <a:r>
+                <a:rPr lang="en-GB" sz="1400" dirty="0">
+                  <a:solidFill>
+                    <a:schemeClr val="tx1"/>
+                  </a:solidFill>
+                </a:rPr>
+                <a:t>ML1</a:t>
+              </a:r>
+            </a:p>
+          </p:txBody>
+        </p:sp>
+        <p:sp>
+          <p:nvSpPr>
+            <p:cNvPr id="7" name="TextBox 6">
+              <a:extLst>
+                <a:ext uri="{FF2B5EF4-FFF2-40B4-BE49-F238E27FC236}">
+                  <a16:creationId xmlns:a16="http://schemas.microsoft.com/office/drawing/2014/main" id="{B5E6333B-3460-49B7-B0F5-3727C2FE6D66}"/>
+                </a:ext>
+              </a:extLst>
+            </p:cNvPr>
+            <p:cNvSpPr txBox="1"/>
+            <p:nvPr/>
+          </p:nvSpPr>
+          <p:spPr>
+            <a:xfrm>
+              <a:off x="2606406" y="2162451"/>
+              <a:ext cx="2077530" cy="646331"/>
+            </a:xfrm>
+            <a:prstGeom prst="rect">
+              <a:avLst/>
+            </a:prstGeom>
+            <a:noFill/>
+          </p:spPr>
+          <p:txBody>
+            <a:bodyPr wrap="square" rtlCol="0">
+              <a:spAutoFit/>
+            </a:bodyPr>
+            <a:lstStyle/>
+            <a:p>
+              <a:r>
+                <a:rPr lang="en-GB" sz="1200" dirty="0"/>
+                <a:t>rotate = “none”</a:t>
+              </a:r>
+            </a:p>
+            <a:p>
+              <a:r>
+                <a:rPr lang="en-GB" sz="1200" dirty="0"/>
+                <a:t>means that ML1 and ML2 are uncorrelated (no overlap)</a:t>
+              </a:r>
+            </a:p>
+          </p:txBody>
+        </p:sp>
+        <p:cxnSp>
+          <p:nvCxnSpPr>
+            <p:cNvPr id="10" name="Straight Arrow Connector 9">
+              <a:extLst>
+                <a:ext uri="{FF2B5EF4-FFF2-40B4-BE49-F238E27FC236}">
+                  <a16:creationId xmlns:a16="http://schemas.microsoft.com/office/drawing/2014/main" id="{A4694E18-B29B-491E-8BE2-ABEA2F32E745}"/>
+                </a:ext>
+              </a:extLst>
+            </p:cNvPr>
+            <p:cNvCxnSpPr>
+              <a:cxnSpLocks/>
+            </p:cNvCxnSpPr>
+            <p:nvPr/>
+          </p:nvCxnSpPr>
+          <p:spPr>
+            <a:xfrm flipH="1">
+              <a:off x="2960823" y="672742"/>
+              <a:ext cx="394044" cy="618296"/>
+            </a:xfrm>
+            <a:prstGeom prst="straightConnector1">
+              <a:avLst/>
+            </a:prstGeom>
+            <a:ln>
+              <a:solidFill>
+                <a:schemeClr val="accent6"/>
+              </a:solidFill>
+              <a:tailEnd type="triangle"/>
+            </a:ln>
+          </p:spPr>
+          <p:style>
+            <a:lnRef idx="1">
+              <a:schemeClr val="accent1"/>
+            </a:lnRef>
+            <a:fillRef idx="0">
+              <a:schemeClr val="accent1"/>
+            </a:fillRef>
+            <a:effectRef idx="0">
+              <a:schemeClr val="accent1"/>
+            </a:effectRef>
+            <a:fontRef idx="minor">
+              <a:schemeClr val="tx1"/>
+            </a:fontRef>
+          </p:style>
+        </p:cxnSp>
+        <p:sp>
+          <p:nvSpPr>
+            <p:cNvPr id="12" name="TextBox 11">
+              <a:extLst>
+                <a:ext uri="{FF2B5EF4-FFF2-40B4-BE49-F238E27FC236}">
+                  <a16:creationId xmlns:a16="http://schemas.microsoft.com/office/drawing/2014/main" id="{B0F9F603-9E19-44D1-B713-67458AD6D29A}"/>
+                </a:ext>
+              </a:extLst>
+            </p:cNvPr>
+            <p:cNvSpPr txBox="1"/>
+            <p:nvPr/>
+          </p:nvSpPr>
+          <p:spPr>
+            <a:xfrm>
+              <a:off x="3312335" y="312156"/>
+              <a:ext cx="1371601" cy="461665"/>
+            </a:xfrm>
+            <a:prstGeom prst="rect">
+              <a:avLst/>
+            </a:prstGeom>
+            <a:noFill/>
+            <a:ln>
+              <a:noFill/>
+            </a:ln>
+          </p:spPr>
+          <p:txBody>
+            <a:bodyPr wrap="square" rtlCol="0">
+              <a:spAutoFit/>
+            </a:bodyPr>
+            <a:lstStyle/>
+            <a:p>
+              <a:r>
+                <a:rPr lang="en-GB" sz="1200" dirty="0">
+                  <a:solidFill>
+                    <a:schemeClr val="accent6"/>
+                  </a:solidFill>
+                </a:rPr>
+                <a:t>Variance in Q10 explained by ML2</a:t>
+              </a:r>
+            </a:p>
+          </p:txBody>
+        </p:sp>
+        <p:cxnSp>
+          <p:nvCxnSpPr>
+            <p:cNvPr id="14" name="Straight Arrow Connector 13">
+              <a:extLst>
+                <a:ext uri="{FF2B5EF4-FFF2-40B4-BE49-F238E27FC236}">
+                  <a16:creationId xmlns:a16="http://schemas.microsoft.com/office/drawing/2014/main" id="{448AC6AC-B206-4A6E-B35A-140099446885}"/>
+                </a:ext>
+              </a:extLst>
+            </p:cNvPr>
+            <p:cNvCxnSpPr>
+              <a:cxnSpLocks/>
+            </p:cNvCxnSpPr>
+            <p:nvPr/>
+          </p:nvCxnSpPr>
+          <p:spPr>
+            <a:xfrm>
+              <a:off x="1532670" y="1291038"/>
+              <a:ext cx="833368" cy="277264"/>
+            </a:xfrm>
+            <a:prstGeom prst="straightConnector1">
+              <a:avLst/>
+            </a:prstGeom>
+            <a:ln>
+              <a:solidFill>
+                <a:schemeClr val="accent6"/>
+              </a:solidFill>
+              <a:tailEnd type="triangle"/>
+            </a:ln>
+          </p:spPr>
+          <p:style>
+            <a:lnRef idx="1">
+              <a:schemeClr val="accent1"/>
+            </a:lnRef>
+            <a:fillRef idx="0">
+              <a:schemeClr val="accent1"/>
+            </a:fillRef>
+            <a:effectRef idx="0">
+              <a:schemeClr val="accent1"/>
+            </a:effectRef>
+            <a:fontRef idx="minor">
+              <a:schemeClr val="tx1"/>
+            </a:fontRef>
+          </p:style>
+        </p:cxnSp>
+        <p:sp>
+          <p:nvSpPr>
+            <p:cNvPr id="15" name="TextBox 14">
+              <a:extLst>
+                <a:ext uri="{FF2B5EF4-FFF2-40B4-BE49-F238E27FC236}">
+                  <a16:creationId xmlns:a16="http://schemas.microsoft.com/office/drawing/2014/main" id="{D8CCE2EA-2B04-4648-B3AD-5942E36544E1}"/>
+                </a:ext>
+              </a:extLst>
+            </p:cNvPr>
+            <p:cNvSpPr txBox="1"/>
+            <p:nvPr/>
+          </p:nvSpPr>
+          <p:spPr>
+            <a:xfrm>
+              <a:off x="486440" y="878547"/>
+              <a:ext cx="1277596" cy="461665"/>
+            </a:xfrm>
+            <a:prstGeom prst="rect">
+              <a:avLst/>
+            </a:prstGeom>
+            <a:noFill/>
+          </p:spPr>
+          <p:txBody>
+            <a:bodyPr wrap="square" rtlCol="0">
+              <a:spAutoFit/>
+            </a:bodyPr>
+            <a:lstStyle/>
+            <a:p>
+              <a:r>
+                <a:rPr lang="en-GB" sz="1200" dirty="0">
+                  <a:solidFill>
+                    <a:schemeClr val="accent6"/>
+                  </a:solidFill>
+                </a:rPr>
+                <a:t>Variance in Q10 explained by ML1</a:t>
+              </a:r>
+            </a:p>
+          </p:txBody>
+        </p:sp>
+      </p:grpSp>
+      <p:grpSp>
+        <p:nvGrpSpPr>
+          <p:cNvPr id="48" name="Group 47">
+            <a:extLst>
+              <a:ext uri="{FF2B5EF4-FFF2-40B4-BE49-F238E27FC236}">
+                <a16:creationId xmlns:a16="http://schemas.microsoft.com/office/drawing/2014/main" id="{5982B066-63C0-4527-968B-0D62BDCC5CE2}"/>
+              </a:ext>
+            </a:extLst>
+          </p:cNvPr>
+          <p:cNvGrpSpPr/>
+          <p:nvPr/>
+        </p:nvGrpSpPr>
+        <p:grpSpPr>
+          <a:xfrm>
+            <a:off x="5511259" y="3283956"/>
+            <a:ext cx="4897889" cy="2486235"/>
+            <a:chOff x="5511259" y="3283956"/>
+            <a:chExt cx="4897889" cy="2486235"/>
+          </a:xfrm>
+        </p:grpSpPr>
+        <p:sp>
+          <p:nvSpPr>
+            <p:cNvPr id="20" name="Oval 19">
+              <a:extLst>
+                <a:ext uri="{FF2B5EF4-FFF2-40B4-BE49-F238E27FC236}">
+                  <a16:creationId xmlns:a16="http://schemas.microsoft.com/office/drawing/2014/main" id="{6A96E06A-7197-4250-97BE-C97BC6D4C6BA}"/>
+                </a:ext>
+              </a:extLst>
+            </p:cNvPr>
+            <p:cNvSpPr/>
+            <p:nvPr/>
+          </p:nvSpPr>
+          <p:spPr>
+            <a:xfrm>
+              <a:off x="6810830" y="3845833"/>
+              <a:ext cx="1100667" cy="1077218"/>
+            </a:xfrm>
+            <a:prstGeom prst="ellipse">
+              <a:avLst/>
+            </a:prstGeom>
+            <a:noFill/>
+            <a:ln>
+              <a:solidFill>
+                <a:schemeClr val="tx1"/>
+              </a:solidFill>
+            </a:ln>
+          </p:spPr>
+          <p:style>
+            <a:lnRef idx="2">
+              <a:schemeClr val="accent1">
+                <a:shade val="50000"/>
+              </a:schemeClr>
+            </a:lnRef>
+            <a:fillRef idx="1">
+              <a:schemeClr val="accent1"/>
+            </a:fillRef>
+            <a:effectRef idx="0">
+              <a:schemeClr val="accent1"/>
+            </a:effectRef>
+            <a:fontRef idx="minor">
+              <a:schemeClr val="lt1"/>
+            </a:fontRef>
+          </p:style>
+          <p:txBody>
+            <a:bodyPr rtlCol="0" anchor="ctr"/>
+            <a:lstStyle/>
+            <a:p>
+              <a:r>
+                <a:rPr lang="en-GB" sz="1400" dirty="0">
+                  <a:solidFill>
+                    <a:schemeClr val="tx1"/>
+                  </a:solidFill>
+                </a:rPr>
+                <a:t>Q10               </a:t>
+              </a:r>
+            </a:p>
+            <a:p>
+              <a:pPr algn="ctr"/>
+              <a:endParaRPr lang="en-GB" sz="1400" dirty="0">
+                <a:solidFill>
+                  <a:schemeClr val="tx1"/>
+                </a:solidFill>
+              </a:endParaRPr>
+            </a:p>
+            <a:p>
+              <a:pPr algn="ctr"/>
+              <a:endParaRPr lang="en-GB" sz="1400" dirty="0">
+                <a:solidFill>
+                  <a:schemeClr val="tx1"/>
+                </a:solidFill>
+              </a:endParaRPr>
+            </a:p>
+          </p:txBody>
+        </p:sp>
+        <p:sp>
+          <p:nvSpPr>
+            <p:cNvPr id="21" name="Oval 20">
+              <a:extLst>
+                <a:ext uri="{FF2B5EF4-FFF2-40B4-BE49-F238E27FC236}">
+                  <a16:creationId xmlns:a16="http://schemas.microsoft.com/office/drawing/2014/main" id="{C0564B65-D620-42C5-9426-3DA1B52DD7E7}"/>
+                </a:ext>
+              </a:extLst>
+            </p:cNvPr>
+            <p:cNvSpPr/>
+            <p:nvPr/>
+          </p:nvSpPr>
+          <p:spPr>
+            <a:xfrm>
+              <a:off x="7386226" y="4219297"/>
+              <a:ext cx="1100667" cy="1077218"/>
+            </a:xfrm>
+            <a:prstGeom prst="ellipse">
+              <a:avLst/>
+            </a:prstGeom>
+            <a:noFill/>
+            <a:ln>
+              <a:solidFill>
+                <a:schemeClr val="tx1"/>
+              </a:solidFill>
+            </a:ln>
+          </p:spPr>
+          <p:style>
+            <a:lnRef idx="2">
+              <a:schemeClr val="accent1">
+                <a:shade val="50000"/>
+              </a:schemeClr>
+            </a:lnRef>
+            <a:fillRef idx="1">
+              <a:schemeClr val="accent1"/>
+            </a:fillRef>
+            <a:effectRef idx="0">
+              <a:schemeClr val="accent1"/>
+            </a:effectRef>
+            <a:fontRef idx="minor">
+              <a:schemeClr val="lt1"/>
+            </a:fontRef>
+          </p:style>
+          <p:txBody>
+            <a:bodyPr rtlCol="0" anchor="ctr"/>
+            <a:lstStyle/>
+            <a:p>
+              <a:pPr algn="ctr"/>
+              <a:r>
+                <a:rPr lang="en-GB" sz="1400" dirty="0">
+                  <a:solidFill>
+                    <a:schemeClr val="tx1"/>
+                  </a:solidFill>
+                </a:rPr>
+                <a:t>       </a:t>
+              </a:r>
+            </a:p>
+            <a:p>
+              <a:pPr algn="ctr"/>
+              <a:r>
+                <a:rPr lang="en-GB" sz="1400" dirty="0">
+                  <a:solidFill>
+                    <a:schemeClr val="tx1"/>
+                  </a:solidFill>
+                </a:rPr>
+                <a:t>       ML2</a:t>
+              </a:r>
+            </a:p>
+            <a:p>
+              <a:pPr algn="ctr"/>
+              <a:endParaRPr lang="en-GB" sz="1400" dirty="0">
+                <a:solidFill>
+                  <a:schemeClr val="tx1"/>
+                </a:solidFill>
+              </a:endParaRPr>
+            </a:p>
+            <a:p>
+              <a:pPr algn="ctr"/>
+              <a:endParaRPr lang="en-GB" sz="1400" dirty="0">
+                <a:solidFill>
+                  <a:schemeClr val="tx1"/>
+                </a:solidFill>
+              </a:endParaRPr>
+            </a:p>
+            <a:p>
+              <a:pPr algn="ctr"/>
+              <a:endParaRPr lang="en-GB" sz="1400" dirty="0">
+                <a:solidFill>
+                  <a:schemeClr val="tx1"/>
+                </a:solidFill>
+              </a:endParaRPr>
+            </a:p>
+          </p:txBody>
+        </p:sp>
+        <p:sp>
+          <p:nvSpPr>
+            <p:cNvPr id="22" name="Oval 21">
+              <a:extLst>
+                <a:ext uri="{FF2B5EF4-FFF2-40B4-BE49-F238E27FC236}">
+                  <a16:creationId xmlns:a16="http://schemas.microsoft.com/office/drawing/2014/main" id="{7A6485E5-CA75-410F-9666-C5CF9CE70DB8}"/>
+                </a:ext>
+              </a:extLst>
+            </p:cNvPr>
+            <p:cNvSpPr/>
+            <p:nvPr/>
+          </p:nvSpPr>
+          <p:spPr>
+            <a:xfrm>
+              <a:off x="7230951" y="4692973"/>
+              <a:ext cx="1100667" cy="1077218"/>
+            </a:xfrm>
+            <a:prstGeom prst="ellipse">
+              <a:avLst/>
+            </a:prstGeom>
+            <a:noFill/>
+            <a:ln>
+              <a:solidFill>
+                <a:schemeClr val="tx1"/>
+              </a:solidFill>
+            </a:ln>
+          </p:spPr>
+          <p:style>
+            <a:lnRef idx="2">
+              <a:schemeClr val="accent1">
+                <a:shade val="50000"/>
+              </a:schemeClr>
+            </a:lnRef>
+            <a:fillRef idx="1">
+              <a:schemeClr val="accent1"/>
+            </a:fillRef>
+            <a:effectRef idx="0">
+              <a:schemeClr val="accent1"/>
+            </a:effectRef>
+            <a:fontRef idx="minor">
+              <a:schemeClr val="lt1"/>
+            </a:fontRef>
+          </p:style>
+          <p:txBody>
+            <a:bodyPr rtlCol="0" anchor="ctr"/>
+            <a:lstStyle/>
+            <a:p>
+              <a:pPr algn="ctr"/>
+              <a:endParaRPr lang="en-GB" sz="1400" dirty="0">
+                <a:solidFill>
+                  <a:schemeClr val="tx1"/>
+                </a:solidFill>
+              </a:endParaRPr>
+            </a:p>
+            <a:p>
+              <a:pPr algn="ctr"/>
+              <a:endParaRPr lang="en-GB" sz="1400" dirty="0">
+                <a:solidFill>
+                  <a:schemeClr val="tx1"/>
+                </a:solidFill>
+              </a:endParaRPr>
+            </a:p>
+            <a:p>
+              <a:pPr algn="ctr"/>
+              <a:endParaRPr lang="en-GB" sz="1400" dirty="0">
+                <a:solidFill>
+                  <a:schemeClr val="tx1"/>
+                </a:solidFill>
+              </a:endParaRPr>
+            </a:p>
+            <a:p>
+              <a:pPr algn="ctr"/>
+              <a:r>
+                <a:rPr lang="en-GB" sz="1400" dirty="0">
+                  <a:solidFill>
+                    <a:schemeClr val="tx1"/>
+                  </a:solidFill>
+                </a:rPr>
+                <a:t>ML1</a:t>
+              </a:r>
+            </a:p>
+          </p:txBody>
+        </p:sp>
+        <p:sp>
+          <p:nvSpPr>
+            <p:cNvPr id="23" name="TextBox 22">
+              <a:extLst>
+                <a:ext uri="{FF2B5EF4-FFF2-40B4-BE49-F238E27FC236}">
+                  <a16:creationId xmlns:a16="http://schemas.microsoft.com/office/drawing/2014/main" id="{FE117F04-68F6-4086-B5FC-FF8EE2C5EE9E}"/>
+                </a:ext>
+              </a:extLst>
+            </p:cNvPr>
+            <p:cNvSpPr txBox="1"/>
+            <p:nvPr/>
+          </p:nvSpPr>
+          <p:spPr>
+            <a:xfrm>
+              <a:off x="8331618" y="5072521"/>
+              <a:ext cx="2077530" cy="646331"/>
+            </a:xfrm>
+            <a:prstGeom prst="rect">
+              <a:avLst/>
+            </a:prstGeom>
+            <a:noFill/>
+          </p:spPr>
+          <p:txBody>
+            <a:bodyPr wrap="square" rtlCol="0">
+              <a:spAutoFit/>
+            </a:bodyPr>
+            <a:lstStyle/>
+            <a:p>
+              <a:r>
+                <a:rPr lang="en-GB" sz="1200" dirty="0"/>
+                <a:t>oblique rotation</a:t>
+              </a:r>
+            </a:p>
+            <a:p>
+              <a:r>
+                <a:rPr lang="en-GB" sz="1200" dirty="0"/>
+                <a:t>means that ML1 and ML2 are correlated (overlap)</a:t>
+              </a:r>
+            </a:p>
+          </p:txBody>
+        </p:sp>
+        <p:cxnSp>
+          <p:nvCxnSpPr>
+            <p:cNvPr id="24" name="Straight Arrow Connector 23">
+              <a:extLst>
+                <a:ext uri="{FF2B5EF4-FFF2-40B4-BE49-F238E27FC236}">
+                  <a16:creationId xmlns:a16="http://schemas.microsoft.com/office/drawing/2014/main" id="{EF8F1832-5760-45D1-A7AD-580A555A28A2}"/>
+                </a:ext>
+              </a:extLst>
+            </p:cNvPr>
+            <p:cNvCxnSpPr>
+              <a:cxnSpLocks/>
+            </p:cNvCxnSpPr>
+            <p:nvPr/>
+          </p:nvCxnSpPr>
+          <p:spPr>
+            <a:xfrm flipH="1">
+              <a:off x="7705725" y="3671414"/>
+              <a:ext cx="227748" cy="752237"/>
+            </a:xfrm>
+            <a:prstGeom prst="straightConnector1">
+              <a:avLst/>
+            </a:prstGeom>
+            <a:ln>
+              <a:solidFill>
+                <a:schemeClr val="accent6"/>
+              </a:solidFill>
+              <a:tailEnd type="triangle"/>
+            </a:ln>
+          </p:spPr>
+          <p:style>
+            <a:lnRef idx="1">
+              <a:schemeClr val="accent1"/>
+            </a:lnRef>
+            <a:fillRef idx="0">
+              <a:schemeClr val="accent1"/>
+            </a:fillRef>
+            <a:effectRef idx="0">
+              <a:schemeClr val="accent1"/>
+            </a:effectRef>
+            <a:fontRef idx="minor">
+              <a:schemeClr val="tx1"/>
+            </a:fontRef>
+          </p:style>
+        </p:cxnSp>
+        <p:sp>
+          <p:nvSpPr>
+            <p:cNvPr id="25" name="TextBox 24">
+              <a:extLst>
+                <a:ext uri="{FF2B5EF4-FFF2-40B4-BE49-F238E27FC236}">
+                  <a16:creationId xmlns:a16="http://schemas.microsoft.com/office/drawing/2014/main" id="{8C913297-ABE7-409C-94A8-D4E519F1A502}"/>
+                </a:ext>
+              </a:extLst>
+            </p:cNvPr>
+            <p:cNvSpPr txBox="1"/>
+            <p:nvPr/>
+          </p:nvSpPr>
+          <p:spPr>
+            <a:xfrm>
+              <a:off x="7888250" y="3283956"/>
+              <a:ext cx="1371601" cy="461665"/>
+            </a:xfrm>
+            <a:prstGeom prst="rect">
+              <a:avLst/>
+            </a:prstGeom>
+            <a:noFill/>
+            <a:ln>
+              <a:noFill/>
+            </a:ln>
+          </p:spPr>
+          <p:txBody>
+            <a:bodyPr wrap="square" rtlCol="0">
+              <a:spAutoFit/>
+            </a:bodyPr>
+            <a:lstStyle/>
+            <a:p>
+              <a:r>
+                <a:rPr lang="en-GB" sz="1200" dirty="0">
+                  <a:solidFill>
+                    <a:schemeClr val="accent6"/>
+                  </a:solidFill>
+                </a:rPr>
+                <a:t>Variance in Q10 explained by ML2</a:t>
+              </a:r>
+            </a:p>
+          </p:txBody>
+        </p:sp>
+        <p:cxnSp>
+          <p:nvCxnSpPr>
+            <p:cNvPr id="26" name="Straight Arrow Connector 25">
+              <a:extLst>
+                <a:ext uri="{FF2B5EF4-FFF2-40B4-BE49-F238E27FC236}">
+                  <a16:creationId xmlns:a16="http://schemas.microsoft.com/office/drawing/2014/main" id="{C8F02547-3E0E-47D4-9947-7EDF5B0D79EE}"/>
+                </a:ext>
+              </a:extLst>
+            </p:cNvPr>
+            <p:cNvCxnSpPr>
+              <a:cxnSpLocks/>
+            </p:cNvCxnSpPr>
+            <p:nvPr/>
+          </p:nvCxnSpPr>
+          <p:spPr>
+            <a:xfrm flipV="1">
+              <a:off x="6649332" y="4883877"/>
+              <a:ext cx="736894" cy="308496"/>
+            </a:xfrm>
+            <a:prstGeom prst="straightConnector1">
+              <a:avLst/>
+            </a:prstGeom>
+            <a:ln>
+              <a:solidFill>
+                <a:schemeClr val="accent6"/>
+              </a:solidFill>
+              <a:tailEnd type="triangle"/>
+            </a:ln>
+          </p:spPr>
+          <p:style>
+            <a:lnRef idx="1">
+              <a:schemeClr val="accent1"/>
+            </a:lnRef>
+            <a:fillRef idx="0">
+              <a:schemeClr val="accent1"/>
+            </a:fillRef>
+            <a:effectRef idx="0">
+              <a:schemeClr val="accent1"/>
+            </a:effectRef>
+            <a:fontRef idx="minor">
+              <a:schemeClr val="tx1"/>
+            </a:fontRef>
+          </p:style>
+        </p:cxnSp>
+        <p:sp>
+          <p:nvSpPr>
+            <p:cNvPr id="27" name="TextBox 26">
+              <a:extLst>
+                <a:ext uri="{FF2B5EF4-FFF2-40B4-BE49-F238E27FC236}">
+                  <a16:creationId xmlns:a16="http://schemas.microsoft.com/office/drawing/2014/main" id="{4ACFBE9B-9A27-42A8-A768-2288E9B80590}"/>
+                </a:ext>
+              </a:extLst>
+            </p:cNvPr>
+            <p:cNvSpPr txBox="1"/>
+            <p:nvPr/>
+          </p:nvSpPr>
+          <p:spPr>
+            <a:xfrm>
+              <a:off x="5511259" y="4976186"/>
+              <a:ext cx="1277596" cy="461665"/>
+            </a:xfrm>
+            <a:prstGeom prst="rect">
+              <a:avLst/>
+            </a:prstGeom>
+            <a:noFill/>
+          </p:spPr>
+          <p:txBody>
+            <a:bodyPr wrap="square" rtlCol="0">
+              <a:spAutoFit/>
+            </a:bodyPr>
+            <a:lstStyle/>
+            <a:p>
+              <a:r>
+                <a:rPr lang="en-GB" sz="1200" dirty="0">
+                  <a:solidFill>
+                    <a:schemeClr val="accent6"/>
+                  </a:solidFill>
+                </a:rPr>
+                <a:t>Variance in Q10 explained by ML1</a:t>
+              </a:r>
+            </a:p>
+          </p:txBody>
+        </p:sp>
+      </p:grpSp>
     </p:spTree>
     <p:extLst>
       <p:ext uri="{BB962C8B-B14F-4D97-AF65-F5344CB8AC3E}">
-        <p14:creationId xmlns:p14="http://schemas.microsoft.com/office/powerpoint/2010/main" val="1158259338"/>
+        <p14:creationId xmlns:p14="http://schemas.microsoft.com/office/powerpoint/2010/main" val="2138890212"/>
       </p:ext>
     </p:extLst>
   </p:cSld>
@@ -8304,10 +10468,10 @@
       </p:grpSpPr>
       <p:pic>
         <p:nvPicPr>
-          <p:cNvPr id="9" name="Picture 8">
-            <a:extLst>
-              <a:ext uri="{FF2B5EF4-FFF2-40B4-BE49-F238E27FC236}">
-                <a16:creationId xmlns:a16="http://schemas.microsoft.com/office/drawing/2014/main" id="{148C49B8-33C3-4F52-BF2E-4C511E028175}"/>
+          <p:cNvPr id="3" name="Picture 2">
+            <a:extLst>
+              <a:ext uri="{FF2B5EF4-FFF2-40B4-BE49-F238E27FC236}">
+                <a16:creationId xmlns:a16="http://schemas.microsoft.com/office/drawing/2014/main" id="{15289AD6-4496-4E3E-9826-2F63976ED24A}"/>
               </a:ext>
             </a:extLst>
           </p:cNvPr>
@@ -8324,8 +10488,8 @@
         </p:blipFill>
         <p:spPr>
           <a:xfrm>
-            <a:off x="2906200" y="412481"/>
-            <a:ext cx="8021169" cy="5982535"/>
+            <a:off x="3299793" y="632993"/>
+            <a:ext cx="8869013" cy="6011114"/>
           </a:xfrm>
           <a:prstGeom prst="rect">
             <a:avLst/>
@@ -8334,10 +10498,10 @@
       </p:pic>
       <p:sp>
         <p:nvSpPr>
-          <p:cNvPr id="11" name="TextBox 10">
-            <a:extLst>
-              <a:ext uri="{FF2B5EF4-FFF2-40B4-BE49-F238E27FC236}">
-                <a16:creationId xmlns:a16="http://schemas.microsoft.com/office/drawing/2014/main" id="{493E50EB-A39A-4313-86FF-0F97860C9441}"/>
+          <p:cNvPr id="6" name="TextBox 5">
+            <a:extLst>
+              <a:ext uri="{FF2B5EF4-FFF2-40B4-BE49-F238E27FC236}">
+                <a16:creationId xmlns:a16="http://schemas.microsoft.com/office/drawing/2014/main" id="{1519AEAF-4003-41C0-A386-9B9E629497B9}"/>
               </a:ext>
             </a:extLst>
           </p:cNvPr>
@@ -8346,8 +10510,8 @@
         </p:nvSpPr>
         <p:spPr>
           <a:xfrm>
-            <a:off x="7338602" y="1409822"/>
-            <a:ext cx="4281898" cy="1754326"/>
+            <a:off x="429071" y="2240819"/>
+            <a:ext cx="2283114" cy="646331"/>
           </a:xfrm>
           <a:prstGeom prst="rect">
             <a:avLst/>
@@ -8366,9 +10530,38 @@
                   <a:srgbClr val="A41AE4"/>
                 </a:solidFill>
               </a:rPr>
-              <a:t>The extent to which a given item loads on to a single factor vs onto multiple factors is termed ‘complexity’. </a:t>
-            </a:r>
-          </a:p>
+              <a:t>Each row is an item (one of our variables)</a:t>
+            </a:r>
+          </a:p>
+        </p:txBody>
+      </p:sp>
+      <p:sp>
+        <p:nvSpPr>
+          <p:cNvPr id="19" name="TextBox 18">
+            <a:extLst>
+              <a:ext uri="{FF2B5EF4-FFF2-40B4-BE49-F238E27FC236}">
+                <a16:creationId xmlns:a16="http://schemas.microsoft.com/office/drawing/2014/main" id="{3E957946-CE17-4628-B08D-798207573E9E}"/>
+              </a:ext>
+            </a:extLst>
+          </p:cNvPr>
+          <p:cNvSpPr txBox="1"/>
+          <p:nvPr/>
+        </p:nvSpPr>
+        <p:spPr>
+          <a:xfrm>
+            <a:off x="429071" y="822649"/>
+            <a:ext cx="1780729" cy="1200329"/>
+          </a:xfrm>
+          <a:prstGeom prst="rect">
+            <a:avLst/>
+          </a:prstGeom>
+          <a:noFill/>
+        </p:spPr>
+        <p:txBody>
+          <a:bodyPr wrap="square" rtlCol="0">
+            <a:spAutoFit/>
+          </a:bodyPr>
+          <a:lstStyle/>
           <a:p>
             <a:r>
               <a:rPr lang="en-GB" dirty="0">
@@ -8376,22 +10569,77 @@
                   <a:srgbClr val="A41AE4"/>
                 </a:solidFill>
               </a:rPr>
-              <a:t>It equals 1 if an item loads only on one factor, 2 if it loads evenly on 2 factors, and so on. </a:t>
-            </a:r>
-            <a:endParaRPr lang="en-GB" sz="1400" dirty="0">
-              <a:solidFill>
-                <a:srgbClr val="A41AE4"/>
-              </a:solidFill>
-            </a:endParaRPr>
-          </a:p>
-        </p:txBody>
-      </p:sp>
-      <p:sp>
-        <p:nvSpPr>
-          <p:cNvPr id="5" name="Rectangle 4">
-            <a:extLst>
-              <a:ext uri="{FF2B5EF4-FFF2-40B4-BE49-F238E27FC236}">
-                <a16:creationId xmlns:a16="http://schemas.microsoft.com/office/drawing/2014/main" id="{B1057B80-52F8-4291-8FFC-AF3B21F9FA65}"/>
+              <a:t>Each column is a factor</a:t>
+            </a:r>
+            <a:br>
+              <a:rPr lang="en-GB" dirty="0">
+                <a:solidFill>
+                  <a:srgbClr val="A41AE4"/>
+                </a:solidFill>
+              </a:rPr>
+            </a:br>
+            <a:r>
+              <a:rPr lang="en-GB" sz="1200" dirty="0">
+                <a:solidFill>
+                  <a:srgbClr val="A41AE4"/>
+                </a:solidFill>
+              </a:rPr>
+              <a:t>(these are named according to the extraction method)</a:t>
+            </a:r>
+          </a:p>
+        </p:txBody>
+      </p:sp>
+      <p:cxnSp>
+        <p:nvCxnSpPr>
+          <p:cNvPr id="21" name="Straight Arrow Connector 20">
+            <a:extLst>
+              <a:ext uri="{FF2B5EF4-FFF2-40B4-BE49-F238E27FC236}">
+                <a16:creationId xmlns:a16="http://schemas.microsoft.com/office/drawing/2014/main" id="{2BF88D99-D232-4D31-AC2B-AD263814ED77}"/>
+              </a:ext>
+            </a:extLst>
+          </p:cNvPr>
+          <p:cNvCxnSpPr>
+            <a:cxnSpLocks/>
+            <a:stCxn id="19" idx="3"/>
+          </p:cNvCxnSpPr>
+          <p:nvPr/>
+        </p:nvCxnSpPr>
+        <p:spPr>
+          <a:xfrm flipV="1">
+            <a:off x="2209800" y="1422402"/>
+            <a:ext cx="1651000" cy="412"/>
+          </a:xfrm>
+          <a:prstGeom prst="straightConnector1">
+            <a:avLst/>
+          </a:prstGeom>
+          <a:ln>
+            <a:solidFill>
+              <a:srgbClr val="A41AE4"/>
+            </a:solidFill>
+            <a:tailEnd type="triangle"/>
+          </a:ln>
+        </p:spPr>
+        <p:style>
+          <a:lnRef idx="1">
+            <a:schemeClr val="accent2"/>
+          </a:lnRef>
+          <a:fillRef idx="0">
+            <a:schemeClr val="accent2"/>
+          </a:fillRef>
+          <a:effectRef idx="0">
+            <a:schemeClr val="accent2"/>
+          </a:effectRef>
+          <a:fontRef idx="minor">
+            <a:schemeClr val="tx1"/>
+          </a:fontRef>
+        </p:style>
+      </p:cxnSp>
+      <p:sp>
+        <p:nvSpPr>
+          <p:cNvPr id="23" name="Left Brace 22">
+            <a:extLst>
+              <a:ext uri="{FF2B5EF4-FFF2-40B4-BE49-F238E27FC236}">
+                <a16:creationId xmlns:a16="http://schemas.microsoft.com/office/drawing/2014/main" id="{7A002C84-DBF4-4C1B-92E3-9515A372B2E8}"/>
               </a:ext>
             </a:extLst>
           </p:cNvPr>
@@ -8400,8 +10648,57 @@
         </p:nvSpPr>
         <p:spPr>
           <a:xfrm>
-            <a:off x="6197600" y="1536701"/>
-            <a:ext cx="546100" cy="2108200"/>
+            <a:off x="2929467" y="1607762"/>
+            <a:ext cx="401976" cy="2126038"/>
+          </a:xfrm>
+          <a:prstGeom prst="leftBrace">
+            <a:avLst/>
+          </a:prstGeom>
+          <a:ln w="12700">
+            <a:solidFill>
+              <a:srgbClr val="A41AE4"/>
+            </a:solidFill>
+          </a:ln>
+        </p:spPr>
+        <p:style>
+          <a:lnRef idx="1">
+            <a:schemeClr val="accent2"/>
+          </a:lnRef>
+          <a:fillRef idx="0">
+            <a:schemeClr val="accent2"/>
+          </a:fillRef>
+          <a:effectRef idx="0">
+            <a:schemeClr val="accent2"/>
+          </a:effectRef>
+          <a:fontRef idx="minor">
+            <a:schemeClr val="tx1"/>
+          </a:fontRef>
+        </p:style>
+        <p:txBody>
+          <a:bodyPr rtlCol="0" anchor="ctr"/>
+          <a:lstStyle/>
+          <a:p>
+            <a:pPr algn="ctr"/>
+            <a:endParaRPr lang="en-GB"/>
+          </a:p>
+        </p:txBody>
+      </p:sp>
+      <p:sp>
+        <p:nvSpPr>
+          <p:cNvPr id="24" name="Rectangle 23">
+            <a:extLst>
+              <a:ext uri="{FF2B5EF4-FFF2-40B4-BE49-F238E27FC236}">
+                <a16:creationId xmlns:a16="http://schemas.microsoft.com/office/drawing/2014/main" id="{9C66D4C5-D7CE-4979-8C83-BA3107A7840E}"/>
+              </a:ext>
+            </a:extLst>
+          </p:cNvPr>
+          <p:cNvSpPr/>
+          <p:nvPr/>
+        </p:nvSpPr>
+        <p:spPr>
+          <a:xfrm>
+            <a:off x="3742267" y="1536701"/>
+            <a:ext cx="1327990" cy="2264420"/>
           </a:xfrm>
           <a:prstGeom prst="rect">
             <a:avLst/>
@@ -8438,42 +10735,12 @@
           </a:p>
         </p:txBody>
       </p:sp>
-      <p:pic>
-        <p:nvPicPr>
-          <p:cNvPr id="6" name="Picture 5">
-            <a:extLst>
-              <a:ext uri="{FF2B5EF4-FFF2-40B4-BE49-F238E27FC236}">
-                <a16:creationId xmlns:a16="http://schemas.microsoft.com/office/drawing/2014/main" id="{A675734B-43B5-4209-A920-CFC726D6529F}"/>
-              </a:ext>
-            </a:extLst>
-          </p:cNvPr>
-          <p:cNvPicPr>
-            <a:picLocks noChangeAspect="1"/>
-          </p:cNvPicPr>
-          <p:nvPr/>
-        </p:nvPicPr>
-        <p:blipFill>
-          <a:blip r:embed="rId3"/>
-          <a:stretch>
-            <a:fillRect/>
-          </a:stretch>
-        </p:blipFill>
-        <p:spPr>
-          <a:xfrm>
-            <a:off x="2918865" y="6438549"/>
-            <a:ext cx="485843" cy="257211"/>
-          </a:xfrm>
-          <a:prstGeom prst="rect">
-            <a:avLst/>
-          </a:prstGeom>
-        </p:spPr>
-      </p:pic>
-      <p:sp>
-        <p:nvSpPr>
-          <p:cNvPr id="8" name="TextBox 7">
-            <a:extLst>
-              <a:ext uri="{FF2B5EF4-FFF2-40B4-BE49-F238E27FC236}">
-                <a16:creationId xmlns:a16="http://schemas.microsoft.com/office/drawing/2014/main" id="{F1F1BB60-76C3-42C7-886D-6F0159D8DADD}"/>
+      <p:sp>
+        <p:nvSpPr>
+          <p:cNvPr id="12" name="TextBox 11">
+            <a:extLst>
+              <a:ext uri="{FF2B5EF4-FFF2-40B4-BE49-F238E27FC236}">
+                <a16:creationId xmlns:a16="http://schemas.microsoft.com/office/drawing/2014/main" id="{02B9EF90-F348-4C67-8F54-FA122021CEA6}"/>
               </a:ext>
             </a:extLst>
           </p:cNvPr>
@@ -8502,15 +10769,761 @@
                   <a:srgbClr val="A41AE4"/>
                 </a:solidFill>
               </a:rPr>
-              <a:t>COMPLEXITY</a:t>
-            </a:r>
-          </a:p>
-        </p:txBody>
-      </p:sp>
+              <a:t>PATTERN MATRIX</a:t>
+            </a:r>
+          </a:p>
+        </p:txBody>
+      </p:sp>
+      <p:sp>
+        <p:nvSpPr>
+          <p:cNvPr id="9" name="TextBox 8">
+            <a:extLst>
+              <a:ext uri="{FF2B5EF4-FFF2-40B4-BE49-F238E27FC236}">
+                <a16:creationId xmlns:a16="http://schemas.microsoft.com/office/drawing/2014/main" id="{0EB27A0A-0A8E-47AD-B3A8-2C716FB8128A}"/>
+              </a:ext>
+            </a:extLst>
+          </p:cNvPr>
+          <p:cNvSpPr txBox="1"/>
+          <p:nvPr/>
+        </p:nvSpPr>
+        <p:spPr>
+          <a:xfrm>
+            <a:off x="7121745" y="2887150"/>
+            <a:ext cx="4796871" cy="1354217"/>
+          </a:xfrm>
+          <a:prstGeom prst="rect">
+            <a:avLst/>
+          </a:prstGeom>
+          <a:noFill/>
+        </p:spPr>
+        <p:txBody>
+          <a:bodyPr wrap="square" rtlCol="0">
+            <a:spAutoFit/>
+          </a:bodyPr>
+          <a:lstStyle/>
+          <a:p>
+            <a:r>
+              <a:rPr lang="en-GB" dirty="0">
+                <a:solidFill>
+                  <a:srgbClr val="A41AE4"/>
+                </a:solidFill>
+              </a:rPr>
+              <a:t>A squared loading reflects the proportion of variance in an item that is uniquely explained by a factor.  </a:t>
+            </a:r>
+          </a:p>
+          <a:p>
+            <a:r>
+              <a:rPr lang="en-GB" sz="1400" dirty="0">
+                <a:solidFill>
+                  <a:srgbClr val="A41AE4"/>
+                </a:solidFill>
+              </a:rPr>
+              <a:t>e.g., 0.60</a:t>
+            </a:r>
+            <a:r>
+              <a:rPr lang="en-GB" sz="1400" b="0" i="0" dirty="0">
+                <a:solidFill>
+                  <a:srgbClr val="A41AE4"/>
+                </a:solidFill>
+                <a:effectLst/>
+                <a:latin typeface="-apple-system"/>
+              </a:rPr>
+              <a:t>² </a:t>
+            </a:r>
+            <a:r>
+              <a:rPr lang="en-GB" sz="1400" dirty="0">
+                <a:solidFill>
+                  <a:srgbClr val="A41AE4"/>
+                </a:solidFill>
+              </a:rPr>
+              <a:t> = 0.36</a:t>
+            </a:r>
+          </a:p>
+          <a:p>
+            <a:r>
+              <a:rPr lang="en-GB" sz="1400" dirty="0">
+                <a:solidFill>
+                  <a:srgbClr val="A41AE4"/>
+                </a:solidFill>
+              </a:rPr>
+              <a:t>36% of the variance in Q10 is explained by Factor 2</a:t>
+            </a:r>
+          </a:p>
+        </p:txBody>
+      </p:sp>
+      <p:sp>
+        <p:nvSpPr>
+          <p:cNvPr id="10" name="TextBox 9">
+            <a:extLst>
+              <a:ext uri="{FF2B5EF4-FFF2-40B4-BE49-F238E27FC236}">
+                <a16:creationId xmlns:a16="http://schemas.microsoft.com/office/drawing/2014/main" id="{38A4E531-FCB1-4FD3-8F3A-4ECE09E4C498}"/>
+              </a:ext>
+            </a:extLst>
+          </p:cNvPr>
+          <p:cNvSpPr txBox="1"/>
+          <p:nvPr/>
+        </p:nvSpPr>
+        <p:spPr>
+          <a:xfrm>
+            <a:off x="7121745" y="1508921"/>
+            <a:ext cx="4641184" cy="1405513"/>
+          </a:xfrm>
+          <a:prstGeom prst="rect">
+            <a:avLst/>
+          </a:prstGeom>
+          <a:noFill/>
+        </p:spPr>
+        <p:txBody>
+          <a:bodyPr wrap="square">
+            <a:spAutoFit/>
+          </a:bodyPr>
+          <a:lstStyle/>
+          <a:p>
+            <a:r>
+              <a:rPr lang="en-GB" dirty="0">
+                <a:solidFill>
+                  <a:srgbClr val="A41AE4"/>
+                </a:solidFill>
+              </a:rPr>
+              <a:t>Loadings show the association between each item and each factor. </a:t>
+            </a:r>
+          </a:p>
+          <a:p>
+            <a:r>
+              <a:rPr lang="en-GB" sz="1400" dirty="0">
+                <a:solidFill>
+                  <a:srgbClr val="A41AE4"/>
+                </a:solidFill>
+              </a:rPr>
+              <a:t>With an oblique rotation, the pattern matrix shows standardised regression coefficients:</a:t>
+            </a:r>
+          </a:p>
+          <a:p>
+            <a:r>
+              <a:rPr lang="en-GB" sz="1200" dirty="0" err="1">
+                <a:solidFill>
+                  <a:srgbClr val="A41AE4"/>
+                </a:solidFill>
+              </a:rPr>
+              <a:t>item</a:t>
+            </a:r>
+            <a:r>
+              <a:rPr lang="en-GB" sz="1200" baseline="-25000" dirty="0" err="1">
+                <a:solidFill>
+                  <a:srgbClr val="A41AE4"/>
+                </a:solidFill>
+              </a:rPr>
+              <a:t>i</a:t>
+            </a:r>
+            <a:r>
+              <a:rPr lang="en-GB" sz="1200" dirty="0">
+                <a:solidFill>
+                  <a:srgbClr val="A41AE4"/>
+                </a:solidFill>
+                <a:latin typeface="Helvetica Neue"/>
+              </a:rPr>
+              <a:t> </a:t>
+            </a:r>
+            <a:r>
+              <a:rPr lang="en-GB" sz="1200" dirty="0">
+                <a:solidFill>
+                  <a:srgbClr val="A41AE4"/>
+                </a:solidFill>
+              </a:rPr>
+              <a:t>= loading</a:t>
+            </a:r>
+            <a:r>
+              <a:rPr lang="en-GB" sz="1200" baseline="-25000" dirty="0">
+                <a:solidFill>
+                  <a:srgbClr val="A41AE4"/>
+                </a:solidFill>
+              </a:rPr>
+              <a:t>F1,i</a:t>
+            </a:r>
+            <a:r>
+              <a:rPr lang="en-GB" sz="1200" dirty="0">
+                <a:solidFill>
+                  <a:srgbClr val="A41AE4"/>
+                </a:solidFill>
+              </a:rPr>
+              <a:t>*Factor1 + loading</a:t>
+            </a:r>
+            <a:r>
+              <a:rPr lang="en-GB" sz="1200" baseline="-25000" dirty="0">
+                <a:solidFill>
+                  <a:srgbClr val="A41AE4"/>
+                </a:solidFill>
+              </a:rPr>
+              <a:t>F2,i</a:t>
+            </a:r>
+            <a:r>
+              <a:rPr lang="en-GB" sz="1200" dirty="0">
+                <a:solidFill>
+                  <a:srgbClr val="A41AE4"/>
+                </a:solidFill>
+              </a:rPr>
+              <a:t>*Factor2 + … + </a:t>
+            </a:r>
+            <a:r>
+              <a:rPr lang="en-GB" sz="1200" dirty="0" err="1">
+                <a:solidFill>
+                  <a:srgbClr val="A41AE4"/>
+                </a:solidFill>
+              </a:rPr>
+              <a:t>uniqueness</a:t>
+            </a:r>
+            <a:r>
+              <a:rPr lang="en-GB" sz="1200" baseline="-25000" dirty="0" err="1">
+                <a:solidFill>
+                  <a:srgbClr val="A41AE4"/>
+                </a:solidFill>
+              </a:rPr>
+              <a:t>i</a:t>
+            </a:r>
+            <a:endParaRPr lang="en-GB" sz="1200" baseline="-25000" dirty="0">
+              <a:solidFill>
+                <a:srgbClr val="A41AE4"/>
+              </a:solidFill>
+            </a:endParaRPr>
+          </a:p>
+          <a:p>
+            <a:endParaRPr lang="en-GB" sz="1400" baseline="-25000" dirty="0">
+              <a:solidFill>
+                <a:srgbClr val="A41AE4"/>
+              </a:solidFill>
+            </a:endParaRPr>
+          </a:p>
+        </p:txBody>
+      </p:sp>
+      <p:cxnSp>
+        <p:nvCxnSpPr>
+          <p:cNvPr id="13" name="Straight Connector 12">
+            <a:extLst>
+              <a:ext uri="{FF2B5EF4-FFF2-40B4-BE49-F238E27FC236}">
+                <a16:creationId xmlns:a16="http://schemas.microsoft.com/office/drawing/2014/main" id="{4EA116A4-2B28-4492-90D1-5D775E1B5E30}"/>
+              </a:ext>
+            </a:extLst>
+          </p:cNvPr>
+          <p:cNvCxnSpPr>
+            <a:cxnSpLocks/>
+          </p:cNvCxnSpPr>
+          <p:nvPr/>
+        </p:nvCxnSpPr>
+        <p:spPr>
+          <a:xfrm>
+            <a:off x="8296275" y="1057275"/>
+            <a:ext cx="2066925" cy="0"/>
+          </a:xfrm>
+          <a:prstGeom prst="line">
+            <a:avLst/>
+          </a:prstGeom>
+          <a:ln w="38100">
+            <a:solidFill>
+              <a:srgbClr val="FF0000"/>
+            </a:solidFill>
+          </a:ln>
+        </p:spPr>
+        <p:style>
+          <a:lnRef idx="1">
+            <a:schemeClr val="accent2"/>
+          </a:lnRef>
+          <a:fillRef idx="0">
+            <a:schemeClr val="accent2"/>
+          </a:fillRef>
+          <a:effectRef idx="0">
+            <a:schemeClr val="accent2"/>
+          </a:effectRef>
+          <a:fontRef idx="minor">
+            <a:schemeClr val="tx1"/>
+          </a:fontRef>
+        </p:style>
+      </p:cxnSp>
+      <p:grpSp>
+        <p:nvGrpSpPr>
+          <p:cNvPr id="15" name="Group 14">
+            <a:extLst>
+              <a:ext uri="{FF2B5EF4-FFF2-40B4-BE49-F238E27FC236}">
+                <a16:creationId xmlns:a16="http://schemas.microsoft.com/office/drawing/2014/main" id="{0354BDAE-A5CD-4F11-9828-040C16236B48}"/>
+              </a:ext>
+            </a:extLst>
+          </p:cNvPr>
+          <p:cNvGrpSpPr/>
+          <p:nvPr/>
+        </p:nvGrpSpPr>
+        <p:grpSpPr>
+          <a:xfrm>
+            <a:off x="6993392" y="4292663"/>
+            <a:ext cx="4897889" cy="2486235"/>
+            <a:chOff x="5511259" y="3283956"/>
+            <a:chExt cx="4897889" cy="2486235"/>
+          </a:xfrm>
+        </p:grpSpPr>
+        <p:sp>
+          <p:nvSpPr>
+            <p:cNvPr id="16" name="Oval 15">
+              <a:extLst>
+                <a:ext uri="{FF2B5EF4-FFF2-40B4-BE49-F238E27FC236}">
+                  <a16:creationId xmlns:a16="http://schemas.microsoft.com/office/drawing/2014/main" id="{76E2686C-066A-4E80-91BB-208B27ED24EA}"/>
+                </a:ext>
+              </a:extLst>
+            </p:cNvPr>
+            <p:cNvSpPr/>
+            <p:nvPr/>
+          </p:nvSpPr>
+          <p:spPr>
+            <a:xfrm>
+              <a:off x="6810830" y="3845833"/>
+              <a:ext cx="1100667" cy="1077218"/>
+            </a:xfrm>
+            <a:prstGeom prst="ellipse">
+              <a:avLst/>
+            </a:prstGeom>
+            <a:noFill/>
+            <a:ln>
+              <a:solidFill>
+                <a:schemeClr val="tx1"/>
+              </a:solidFill>
+            </a:ln>
+          </p:spPr>
+          <p:style>
+            <a:lnRef idx="2">
+              <a:schemeClr val="accent1">
+                <a:shade val="50000"/>
+              </a:schemeClr>
+            </a:lnRef>
+            <a:fillRef idx="1">
+              <a:schemeClr val="accent1"/>
+            </a:fillRef>
+            <a:effectRef idx="0">
+              <a:schemeClr val="accent1"/>
+            </a:effectRef>
+            <a:fontRef idx="minor">
+              <a:schemeClr val="lt1"/>
+            </a:fontRef>
+          </p:style>
+          <p:txBody>
+            <a:bodyPr rtlCol="0" anchor="ctr"/>
+            <a:lstStyle/>
+            <a:p>
+              <a:r>
+                <a:rPr lang="en-GB" sz="1400" dirty="0">
+                  <a:solidFill>
+                    <a:schemeClr val="tx1"/>
+                  </a:solidFill>
+                </a:rPr>
+                <a:t>Q10               </a:t>
+              </a:r>
+            </a:p>
+            <a:p>
+              <a:pPr algn="ctr"/>
+              <a:endParaRPr lang="en-GB" sz="1400" dirty="0">
+                <a:solidFill>
+                  <a:schemeClr val="tx1"/>
+                </a:solidFill>
+              </a:endParaRPr>
+            </a:p>
+            <a:p>
+              <a:pPr algn="ctr"/>
+              <a:endParaRPr lang="en-GB" sz="1400" dirty="0">
+                <a:solidFill>
+                  <a:schemeClr val="tx1"/>
+                </a:solidFill>
+              </a:endParaRPr>
+            </a:p>
+          </p:txBody>
+        </p:sp>
+        <p:sp>
+          <p:nvSpPr>
+            <p:cNvPr id="17" name="Oval 16">
+              <a:extLst>
+                <a:ext uri="{FF2B5EF4-FFF2-40B4-BE49-F238E27FC236}">
+                  <a16:creationId xmlns:a16="http://schemas.microsoft.com/office/drawing/2014/main" id="{F1000354-F43C-4474-AC92-25D3084E1CC2}"/>
+                </a:ext>
+              </a:extLst>
+            </p:cNvPr>
+            <p:cNvSpPr/>
+            <p:nvPr/>
+          </p:nvSpPr>
+          <p:spPr>
+            <a:xfrm>
+              <a:off x="7386226" y="4219297"/>
+              <a:ext cx="1100667" cy="1077218"/>
+            </a:xfrm>
+            <a:prstGeom prst="ellipse">
+              <a:avLst/>
+            </a:prstGeom>
+            <a:noFill/>
+            <a:ln>
+              <a:solidFill>
+                <a:schemeClr val="tx1"/>
+              </a:solidFill>
+            </a:ln>
+          </p:spPr>
+          <p:style>
+            <a:lnRef idx="2">
+              <a:schemeClr val="accent1">
+                <a:shade val="50000"/>
+              </a:schemeClr>
+            </a:lnRef>
+            <a:fillRef idx="1">
+              <a:schemeClr val="accent1"/>
+            </a:fillRef>
+            <a:effectRef idx="0">
+              <a:schemeClr val="accent1"/>
+            </a:effectRef>
+            <a:fontRef idx="minor">
+              <a:schemeClr val="lt1"/>
+            </a:fontRef>
+          </p:style>
+          <p:txBody>
+            <a:bodyPr rtlCol="0" anchor="ctr"/>
+            <a:lstStyle/>
+            <a:p>
+              <a:pPr algn="ctr"/>
+              <a:r>
+                <a:rPr lang="en-GB" sz="1400" dirty="0">
+                  <a:solidFill>
+                    <a:schemeClr val="tx1"/>
+                  </a:solidFill>
+                </a:rPr>
+                <a:t>       </a:t>
+              </a:r>
+            </a:p>
+            <a:p>
+              <a:pPr algn="ctr"/>
+              <a:r>
+                <a:rPr lang="en-GB" sz="1400" dirty="0">
+                  <a:solidFill>
+                    <a:schemeClr val="tx1"/>
+                  </a:solidFill>
+                </a:rPr>
+                <a:t>       ML2</a:t>
+              </a:r>
+            </a:p>
+            <a:p>
+              <a:pPr algn="ctr"/>
+              <a:endParaRPr lang="en-GB" sz="1400" dirty="0">
+                <a:solidFill>
+                  <a:schemeClr val="tx1"/>
+                </a:solidFill>
+              </a:endParaRPr>
+            </a:p>
+            <a:p>
+              <a:pPr algn="ctr"/>
+              <a:endParaRPr lang="en-GB" sz="1400" dirty="0">
+                <a:solidFill>
+                  <a:schemeClr val="tx1"/>
+                </a:solidFill>
+              </a:endParaRPr>
+            </a:p>
+            <a:p>
+              <a:pPr algn="ctr"/>
+              <a:endParaRPr lang="en-GB" sz="1400" dirty="0">
+                <a:solidFill>
+                  <a:schemeClr val="tx1"/>
+                </a:solidFill>
+              </a:endParaRPr>
+            </a:p>
+          </p:txBody>
+        </p:sp>
+        <p:sp>
+          <p:nvSpPr>
+            <p:cNvPr id="18" name="Oval 17">
+              <a:extLst>
+                <a:ext uri="{FF2B5EF4-FFF2-40B4-BE49-F238E27FC236}">
+                  <a16:creationId xmlns:a16="http://schemas.microsoft.com/office/drawing/2014/main" id="{E7999FD8-209A-4AE2-A0F9-CF759F73B79B}"/>
+                </a:ext>
+              </a:extLst>
+            </p:cNvPr>
+            <p:cNvSpPr/>
+            <p:nvPr/>
+          </p:nvSpPr>
+          <p:spPr>
+            <a:xfrm>
+              <a:off x="7230951" y="4692973"/>
+              <a:ext cx="1100667" cy="1077218"/>
+            </a:xfrm>
+            <a:prstGeom prst="ellipse">
+              <a:avLst/>
+            </a:prstGeom>
+            <a:noFill/>
+            <a:ln>
+              <a:solidFill>
+                <a:schemeClr val="tx1"/>
+              </a:solidFill>
+            </a:ln>
+          </p:spPr>
+          <p:style>
+            <a:lnRef idx="2">
+              <a:schemeClr val="accent1">
+                <a:shade val="50000"/>
+              </a:schemeClr>
+            </a:lnRef>
+            <a:fillRef idx="1">
+              <a:schemeClr val="accent1"/>
+            </a:fillRef>
+            <a:effectRef idx="0">
+              <a:schemeClr val="accent1"/>
+            </a:effectRef>
+            <a:fontRef idx="minor">
+              <a:schemeClr val="lt1"/>
+            </a:fontRef>
+          </p:style>
+          <p:txBody>
+            <a:bodyPr rtlCol="0" anchor="ctr"/>
+            <a:lstStyle/>
+            <a:p>
+              <a:pPr algn="ctr"/>
+              <a:endParaRPr lang="en-GB" sz="1400" dirty="0">
+                <a:solidFill>
+                  <a:schemeClr val="tx1"/>
+                </a:solidFill>
+              </a:endParaRPr>
+            </a:p>
+            <a:p>
+              <a:pPr algn="ctr"/>
+              <a:endParaRPr lang="en-GB" sz="1400" dirty="0">
+                <a:solidFill>
+                  <a:schemeClr val="tx1"/>
+                </a:solidFill>
+              </a:endParaRPr>
+            </a:p>
+            <a:p>
+              <a:pPr algn="ctr"/>
+              <a:endParaRPr lang="en-GB" sz="1400" dirty="0">
+                <a:solidFill>
+                  <a:schemeClr val="tx1"/>
+                </a:solidFill>
+              </a:endParaRPr>
+            </a:p>
+            <a:p>
+              <a:pPr algn="ctr"/>
+              <a:r>
+                <a:rPr lang="en-GB" sz="1400" dirty="0">
+                  <a:solidFill>
+                    <a:schemeClr val="tx1"/>
+                  </a:solidFill>
+                </a:rPr>
+                <a:t>ML1</a:t>
+              </a:r>
+            </a:p>
+          </p:txBody>
+        </p:sp>
+        <p:sp>
+          <p:nvSpPr>
+            <p:cNvPr id="20" name="TextBox 19">
+              <a:extLst>
+                <a:ext uri="{FF2B5EF4-FFF2-40B4-BE49-F238E27FC236}">
+                  <a16:creationId xmlns:a16="http://schemas.microsoft.com/office/drawing/2014/main" id="{3E92A4EB-AD9F-4267-A16E-94E82451856B}"/>
+                </a:ext>
+              </a:extLst>
+            </p:cNvPr>
+            <p:cNvSpPr txBox="1"/>
+            <p:nvPr/>
+          </p:nvSpPr>
+          <p:spPr>
+            <a:xfrm>
+              <a:off x="8331618" y="5072521"/>
+              <a:ext cx="2077530" cy="646331"/>
+            </a:xfrm>
+            <a:prstGeom prst="rect">
+              <a:avLst/>
+            </a:prstGeom>
+            <a:noFill/>
+          </p:spPr>
+          <p:txBody>
+            <a:bodyPr wrap="square" rtlCol="0">
+              <a:spAutoFit/>
+            </a:bodyPr>
+            <a:lstStyle/>
+            <a:p>
+              <a:r>
+                <a:rPr lang="en-GB" sz="1200" dirty="0"/>
+                <a:t>oblique rotation</a:t>
+              </a:r>
+            </a:p>
+            <a:p>
+              <a:r>
+                <a:rPr lang="en-GB" sz="1200" dirty="0"/>
+                <a:t>means that ML1 and ML2 are correlated (overlap)</a:t>
+              </a:r>
+            </a:p>
+          </p:txBody>
+        </p:sp>
+        <p:cxnSp>
+          <p:nvCxnSpPr>
+            <p:cNvPr id="22" name="Straight Arrow Connector 21">
+              <a:extLst>
+                <a:ext uri="{FF2B5EF4-FFF2-40B4-BE49-F238E27FC236}">
+                  <a16:creationId xmlns:a16="http://schemas.microsoft.com/office/drawing/2014/main" id="{A46ACA3C-3292-4663-AB0A-6EE8E3992798}"/>
+                </a:ext>
+              </a:extLst>
+            </p:cNvPr>
+            <p:cNvCxnSpPr>
+              <a:cxnSpLocks/>
+            </p:cNvCxnSpPr>
+            <p:nvPr/>
+          </p:nvCxnSpPr>
+          <p:spPr>
+            <a:xfrm flipH="1">
+              <a:off x="7705725" y="3671414"/>
+              <a:ext cx="227748" cy="752237"/>
+            </a:xfrm>
+            <a:prstGeom prst="straightConnector1">
+              <a:avLst/>
+            </a:prstGeom>
+            <a:ln>
+              <a:solidFill>
+                <a:schemeClr val="accent6"/>
+              </a:solidFill>
+              <a:tailEnd type="triangle"/>
+            </a:ln>
+          </p:spPr>
+          <p:style>
+            <a:lnRef idx="1">
+              <a:schemeClr val="accent1"/>
+            </a:lnRef>
+            <a:fillRef idx="0">
+              <a:schemeClr val="accent1"/>
+            </a:fillRef>
+            <a:effectRef idx="0">
+              <a:schemeClr val="accent1"/>
+            </a:effectRef>
+            <a:fontRef idx="minor">
+              <a:schemeClr val="tx1"/>
+            </a:fontRef>
+          </p:style>
+        </p:cxnSp>
+        <p:sp>
+          <p:nvSpPr>
+            <p:cNvPr id="25" name="TextBox 24">
+              <a:extLst>
+                <a:ext uri="{FF2B5EF4-FFF2-40B4-BE49-F238E27FC236}">
+                  <a16:creationId xmlns:a16="http://schemas.microsoft.com/office/drawing/2014/main" id="{10283DB4-D201-4FD8-9270-1892B113A965}"/>
+                </a:ext>
+              </a:extLst>
+            </p:cNvPr>
+            <p:cNvSpPr txBox="1"/>
+            <p:nvPr/>
+          </p:nvSpPr>
+          <p:spPr>
+            <a:xfrm>
+              <a:off x="7888250" y="3283956"/>
+              <a:ext cx="1371601" cy="461665"/>
+            </a:xfrm>
+            <a:prstGeom prst="rect">
+              <a:avLst/>
+            </a:prstGeom>
+            <a:noFill/>
+            <a:ln>
+              <a:noFill/>
+            </a:ln>
+          </p:spPr>
+          <p:txBody>
+            <a:bodyPr wrap="square" rtlCol="0">
+              <a:spAutoFit/>
+            </a:bodyPr>
+            <a:lstStyle/>
+            <a:p>
+              <a:r>
+                <a:rPr lang="en-GB" sz="1200" dirty="0">
+                  <a:solidFill>
+                    <a:schemeClr val="accent6"/>
+                  </a:solidFill>
+                </a:rPr>
+                <a:t>Variance in Q10 explained by ML2</a:t>
+              </a:r>
+            </a:p>
+          </p:txBody>
+        </p:sp>
+        <p:cxnSp>
+          <p:nvCxnSpPr>
+            <p:cNvPr id="26" name="Straight Arrow Connector 25">
+              <a:extLst>
+                <a:ext uri="{FF2B5EF4-FFF2-40B4-BE49-F238E27FC236}">
+                  <a16:creationId xmlns:a16="http://schemas.microsoft.com/office/drawing/2014/main" id="{E3781CEF-26F8-44DA-B38C-38CAB16D92E5}"/>
+                </a:ext>
+              </a:extLst>
+            </p:cNvPr>
+            <p:cNvCxnSpPr>
+              <a:cxnSpLocks/>
+            </p:cNvCxnSpPr>
+            <p:nvPr/>
+          </p:nvCxnSpPr>
+          <p:spPr>
+            <a:xfrm flipV="1">
+              <a:off x="6649332" y="4883877"/>
+              <a:ext cx="736894" cy="308496"/>
+            </a:xfrm>
+            <a:prstGeom prst="straightConnector1">
+              <a:avLst/>
+            </a:prstGeom>
+            <a:ln>
+              <a:solidFill>
+                <a:schemeClr val="accent6"/>
+              </a:solidFill>
+              <a:tailEnd type="triangle"/>
+            </a:ln>
+          </p:spPr>
+          <p:style>
+            <a:lnRef idx="1">
+              <a:schemeClr val="accent1"/>
+            </a:lnRef>
+            <a:fillRef idx="0">
+              <a:schemeClr val="accent1"/>
+            </a:fillRef>
+            <a:effectRef idx="0">
+              <a:schemeClr val="accent1"/>
+            </a:effectRef>
+            <a:fontRef idx="minor">
+              <a:schemeClr val="tx1"/>
+            </a:fontRef>
+          </p:style>
+        </p:cxnSp>
+        <p:sp>
+          <p:nvSpPr>
+            <p:cNvPr id="27" name="TextBox 26">
+              <a:extLst>
+                <a:ext uri="{FF2B5EF4-FFF2-40B4-BE49-F238E27FC236}">
+                  <a16:creationId xmlns:a16="http://schemas.microsoft.com/office/drawing/2014/main" id="{3F4DD1CD-61A2-4684-9C5F-6BD70BC0C9CA}"/>
+                </a:ext>
+              </a:extLst>
+            </p:cNvPr>
+            <p:cNvSpPr txBox="1"/>
+            <p:nvPr/>
+          </p:nvSpPr>
+          <p:spPr>
+            <a:xfrm>
+              <a:off x="5511259" y="4976186"/>
+              <a:ext cx="1277596" cy="461665"/>
+            </a:xfrm>
+            <a:prstGeom prst="rect">
+              <a:avLst/>
+            </a:prstGeom>
+            <a:noFill/>
+          </p:spPr>
+          <p:txBody>
+            <a:bodyPr wrap="square" rtlCol="0">
+              <a:spAutoFit/>
+            </a:bodyPr>
+            <a:lstStyle/>
+            <a:p>
+              <a:r>
+                <a:rPr lang="en-GB" sz="1200" dirty="0">
+                  <a:solidFill>
+                    <a:schemeClr val="accent6"/>
+                  </a:solidFill>
+                </a:rPr>
+                <a:t>Variance in Q10 explained by ML1</a:t>
+              </a:r>
+            </a:p>
+          </p:txBody>
+        </p:sp>
+      </p:grpSp>
     </p:spTree>
     <p:extLst>
       <p:ext uri="{BB962C8B-B14F-4D97-AF65-F5344CB8AC3E}">
-        <p14:creationId xmlns:p14="http://schemas.microsoft.com/office/powerpoint/2010/main" val="2075510392"/>
+        <p14:creationId xmlns:p14="http://schemas.microsoft.com/office/powerpoint/2010/main" val="3151301133"/>
       </p:ext>
     </p:extLst>
   </p:cSld>
@@ -8537,12 +11550,325 @@
           <a:chExt cx="0" cy="0"/>
         </a:xfrm>
       </p:grpSpPr>
+      <p:sp>
+        <p:nvSpPr>
+          <p:cNvPr id="12" name="TextBox 11">
+            <a:extLst>
+              <a:ext uri="{FF2B5EF4-FFF2-40B4-BE49-F238E27FC236}">
+                <a16:creationId xmlns:a16="http://schemas.microsoft.com/office/drawing/2014/main" id="{02B9EF90-F348-4C67-8F54-FA122021CEA6}"/>
+              </a:ext>
+            </a:extLst>
+          </p:cNvPr>
+          <p:cNvSpPr txBox="1"/>
+          <p:nvPr/>
+        </p:nvSpPr>
+        <p:spPr>
+          <a:xfrm>
+            <a:off x="75499" y="-25167"/>
+            <a:ext cx="7344476" cy="461665"/>
+          </a:xfrm>
+          <a:prstGeom prst="rect">
+            <a:avLst/>
+          </a:prstGeom>
+          <a:noFill/>
+        </p:spPr>
+        <p:txBody>
+          <a:bodyPr wrap="square" rtlCol="0">
+            <a:spAutoFit/>
+          </a:bodyPr>
+          <a:lstStyle/>
+          <a:p>
+            <a:r>
+              <a:rPr lang="en-GB" sz="2400" u="sng" dirty="0">
+                <a:solidFill>
+                  <a:srgbClr val="A41AE4"/>
+                </a:solidFill>
+              </a:rPr>
+              <a:t>RABBIT HOLE: STRUCTURE vs PATTERN MATRIX</a:t>
+            </a:r>
+          </a:p>
+        </p:txBody>
+      </p:sp>
+      <p:grpSp>
+        <p:nvGrpSpPr>
+          <p:cNvPr id="15" name="Group 14">
+            <a:extLst>
+              <a:ext uri="{FF2B5EF4-FFF2-40B4-BE49-F238E27FC236}">
+                <a16:creationId xmlns:a16="http://schemas.microsoft.com/office/drawing/2014/main" id="{0354BDAE-A5CD-4F11-9828-040C16236B48}"/>
+              </a:ext>
+            </a:extLst>
+          </p:cNvPr>
+          <p:cNvGrpSpPr/>
+          <p:nvPr/>
+        </p:nvGrpSpPr>
+        <p:grpSpPr>
+          <a:xfrm>
+            <a:off x="1787388" y="4300595"/>
+            <a:ext cx="1676063" cy="1924358"/>
+            <a:chOff x="6810830" y="3845833"/>
+            <a:chExt cx="1676063" cy="1924358"/>
+          </a:xfrm>
+        </p:grpSpPr>
+        <p:sp>
+          <p:nvSpPr>
+            <p:cNvPr id="16" name="Oval 15">
+              <a:extLst>
+                <a:ext uri="{FF2B5EF4-FFF2-40B4-BE49-F238E27FC236}">
+                  <a16:creationId xmlns:a16="http://schemas.microsoft.com/office/drawing/2014/main" id="{76E2686C-066A-4E80-91BB-208B27ED24EA}"/>
+                </a:ext>
+              </a:extLst>
+            </p:cNvPr>
+            <p:cNvSpPr/>
+            <p:nvPr/>
+          </p:nvSpPr>
+          <p:spPr>
+            <a:xfrm>
+              <a:off x="6810830" y="3845833"/>
+              <a:ext cx="1100667" cy="1077218"/>
+            </a:xfrm>
+            <a:prstGeom prst="ellipse">
+              <a:avLst/>
+            </a:prstGeom>
+            <a:noFill/>
+            <a:ln>
+              <a:solidFill>
+                <a:schemeClr val="tx1"/>
+              </a:solidFill>
+            </a:ln>
+          </p:spPr>
+          <p:style>
+            <a:lnRef idx="2">
+              <a:schemeClr val="accent1">
+                <a:shade val="50000"/>
+              </a:schemeClr>
+            </a:lnRef>
+            <a:fillRef idx="1">
+              <a:schemeClr val="accent1"/>
+            </a:fillRef>
+            <a:effectRef idx="0">
+              <a:schemeClr val="accent1"/>
+            </a:effectRef>
+            <a:fontRef idx="minor">
+              <a:schemeClr val="lt1"/>
+            </a:fontRef>
+          </p:style>
+          <p:txBody>
+            <a:bodyPr rtlCol="0" anchor="ctr"/>
+            <a:lstStyle/>
+            <a:p>
+              <a:r>
+                <a:rPr lang="en-GB" sz="1400" dirty="0">
+                  <a:solidFill>
+                    <a:schemeClr val="tx1"/>
+                  </a:solidFill>
+                </a:rPr>
+                <a:t>Q10               </a:t>
+              </a:r>
+            </a:p>
+            <a:p>
+              <a:pPr algn="ctr"/>
+              <a:endParaRPr lang="en-GB" sz="1400" dirty="0">
+                <a:solidFill>
+                  <a:schemeClr val="tx1"/>
+                </a:solidFill>
+              </a:endParaRPr>
+            </a:p>
+            <a:p>
+              <a:pPr algn="ctr"/>
+              <a:endParaRPr lang="en-GB" sz="1400" dirty="0">
+                <a:solidFill>
+                  <a:schemeClr val="tx1"/>
+                </a:solidFill>
+              </a:endParaRPr>
+            </a:p>
+          </p:txBody>
+        </p:sp>
+        <p:sp>
+          <p:nvSpPr>
+            <p:cNvPr id="17" name="Oval 16">
+              <a:extLst>
+                <a:ext uri="{FF2B5EF4-FFF2-40B4-BE49-F238E27FC236}">
+                  <a16:creationId xmlns:a16="http://schemas.microsoft.com/office/drawing/2014/main" id="{F1000354-F43C-4474-AC92-25D3084E1CC2}"/>
+                </a:ext>
+              </a:extLst>
+            </p:cNvPr>
+            <p:cNvSpPr/>
+            <p:nvPr/>
+          </p:nvSpPr>
+          <p:spPr>
+            <a:xfrm>
+              <a:off x="7386226" y="4219297"/>
+              <a:ext cx="1100667" cy="1077218"/>
+            </a:xfrm>
+            <a:prstGeom prst="ellipse">
+              <a:avLst/>
+            </a:prstGeom>
+            <a:noFill/>
+            <a:ln>
+              <a:solidFill>
+                <a:schemeClr val="bg2">
+                  <a:lumMod val="90000"/>
+                </a:schemeClr>
+              </a:solidFill>
+            </a:ln>
+          </p:spPr>
+          <p:style>
+            <a:lnRef idx="2">
+              <a:schemeClr val="accent1">
+                <a:shade val="50000"/>
+              </a:schemeClr>
+            </a:lnRef>
+            <a:fillRef idx="1">
+              <a:schemeClr val="accent1"/>
+            </a:fillRef>
+            <a:effectRef idx="0">
+              <a:schemeClr val="accent1"/>
+            </a:effectRef>
+            <a:fontRef idx="minor">
+              <a:schemeClr val="lt1"/>
+            </a:fontRef>
+          </p:style>
+          <p:txBody>
+            <a:bodyPr rtlCol="0" anchor="ctr"/>
+            <a:lstStyle/>
+            <a:p>
+              <a:pPr algn="ctr"/>
+              <a:r>
+                <a:rPr lang="en-GB" sz="1400" dirty="0">
+                  <a:solidFill>
+                    <a:schemeClr val="tx1"/>
+                  </a:solidFill>
+                </a:rPr>
+                <a:t>       </a:t>
+              </a:r>
+            </a:p>
+            <a:p>
+              <a:pPr algn="ctr"/>
+              <a:r>
+                <a:rPr lang="en-GB" sz="1400" dirty="0">
+                  <a:solidFill>
+                    <a:schemeClr val="tx1"/>
+                  </a:solidFill>
+                </a:rPr>
+                <a:t>       ML2</a:t>
+              </a:r>
+            </a:p>
+            <a:p>
+              <a:pPr algn="ctr"/>
+              <a:endParaRPr lang="en-GB" sz="1400" dirty="0">
+                <a:solidFill>
+                  <a:schemeClr val="tx1"/>
+                </a:solidFill>
+              </a:endParaRPr>
+            </a:p>
+            <a:p>
+              <a:pPr algn="ctr"/>
+              <a:endParaRPr lang="en-GB" sz="1400" dirty="0">
+                <a:solidFill>
+                  <a:schemeClr val="tx1"/>
+                </a:solidFill>
+              </a:endParaRPr>
+            </a:p>
+            <a:p>
+              <a:pPr algn="ctr"/>
+              <a:endParaRPr lang="en-GB" sz="1400" dirty="0">
+                <a:solidFill>
+                  <a:schemeClr val="tx1"/>
+                </a:solidFill>
+              </a:endParaRPr>
+            </a:p>
+          </p:txBody>
+        </p:sp>
+        <p:sp>
+          <p:nvSpPr>
+            <p:cNvPr id="18" name="Oval 17">
+              <a:extLst>
+                <a:ext uri="{FF2B5EF4-FFF2-40B4-BE49-F238E27FC236}">
+                  <a16:creationId xmlns:a16="http://schemas.microsoft.com/office/drawing/2014/main" id="{E7999FD8-209A-4AE2-A0F9-CF759F73B79B}"/>
+                </a:ext>
+              </a:extLst>
+            </p:cNvPr>
+            <p:cNvSpPr/>
+            <p:nvPr/>
+          </p:nvSpPr>
+          <p:spPr>
+            <a:xfrm>
+              <a:off x="7230951" y="4692973"/>
+              <a:ext cx="1100667" cy="1077218"/>
+            </a:xfrm>
+            <a:prstGeom prst="ellipse">
+              <a:avLst/>
+            </a:prstGeom>
+            <a:noFill/>
+            <a:ln>
+              <a:solidFill>
+                <a:schemeClr val="tx1"/>
+              </a:solidFill>
+            </a:ln>
+          </p:spPr>
+          <p:style>
+            <a:lnRef idx="2">
+              <a:schemeClr val="accent1">
+                <a:shade val="50000"/>
+              </a:schemeClr>
+            </a:lnRef>
+            <a:fillRef idx="1">
+              <a:schemeClr val="accent1"/>
+            </a:fillRef>
+            <a:effectRef idx="0">
+              <a:schemeClr val="accent1"/>
+            </a:effectRef>
+            <a:fontRef idx="minor">
+              <a:schemeClr val="lt1"/>
+            </a:fontRef>
+          </p:style>
+          <p:txBody>
+            <a:bodyPr rtlCol="0" anchor="ctr"/>
+            <a:lstStyle/>
+            <a:p>
+              <a:pPr algn="ctr"/>
+              <a:endParaRPr lang="en-GB" sz="1400" dirty="0">
+                <a:solidFill>
+                  <a:schemeClr val="tx1"/>
+                </a:solidFill>
+              </a:endParaRPr>
+            </a:p>
+            <a:p>
+              <a:pPr algn="ctr"/>
+              <a:endParaRPr lang="en-GB" sz="1400" dirty="0">
+                <a:solidFill>
+                  <a:schemeClr val="tx1"/>
+                </a:solidFill>
+              </a:endParaRPr>
+            </a:p>
+            <a:p>
+              <a:pPr algn="ctr"/>
+              <a:endParaRPr lang="en-GB" sz="1400" dirty="0">
+                <a:solidFill>
+                  <a:schemeClr val="tx1"/>
+                </a:solidFill>
+              </a:endParaRPr>
+            </a:p>
+            <a:p>
+              <a:pPr algn="ctr"/>
+              <a:r>
+                <a:rPr lang="en-GB" sz="1400" dirty="0">
+                  <a:solidFill>
+                    <a:schemeClr val="tx1"/>
+                  </a:solidFill>
+                </a:rPr>
+                <a:t>ML1</a:t>
+              </a:r>
+            </a:p>
+          </p:txBody>
+        </p:sp>
+      </p:grpSp>
       <p:pic>
         <p:nvPicPr>
-          <p:cNvPr id="11" name="Picture 10">
-            <a:extLst>
-              <a:ext uri="{FF2B5EF4-FFF2-40B4-BE49-F238E27FC236}">
-                <a16:creationId xmlns:a16="http://schemas.microsoft.com/office/drawing/2014/main" id="{A71ABA2F-69E9-4566-B57A-9652F0B275D8}"/>
+          <p:cNvPr id="4" name="Picture 3">
+            <a:extLst>
+              <a:ext uri="{FF2B5EF4-FFF2-40B4-BE49-F238E27FC236}">
+                <a16:creationId xmlns:a16="http://schemas.microsoft.com/office/drawing/2014/main" id="{C01118E9-9649-417B-A306-9EFBC4614B6F}"/>
               </a:ext>
             </a:extLst>
           </p:cNvPr>
@@ -8559,291 +11885,290 @@
         </p:blipFill>
         <p:spPr>
           <a:xfrm>
-            <a:off x="2906200" y="412481"/>
-            <a:ext cx="8021169" cy="5982535"/>
+            <a:off x="3280743" y="418540"/>
+            <a:ext cx="8478433" cy="3467584"/>
           </a:xfrm>
           <a:prstGeom prst="rect">
             <a:avLst/>
           </a:prstGeom>
         </p:spPr>
       </p:pic>
-      <p:sp>
-        <p:nvSpPr>
-          <p:cNvPr id="10" name="TextBox 9">
-            <a:extLst>
-              <a:ext uri="{FF2B5EF4-FFF2-40B4-BE49-F238E27FC236}">
-                <a16:creationId xmlns:a16="http://schemas.microsoft.com/office/drawing/2014/main" id="{8A3C40CD-B6C6-4273-BE13-3DB5447020D2}"/>
-              </a:ext>
-            </a:extLst>
-          </p:cNvPr>
-          <p:cNvSpPr txBox="1"/>
-          <p:nvPr/>
-        </p:nvSpPr>
-        <p:spPr>
-          <a:xfrm>
-            <a:off x="7405958" y="3009482"/>
-            <a:ext cx="4659042" cy="2031325"/>
-          </a:xfrm>
-          <a:prstGeom prst="rect">
-            <a:avLst/>
-          </a:prstGeom>
-          <a:noFill/>
-        </p:spPr>
-        <p:txBody>
-          <a:bodyPr wrap="square" rtlCol="0">
-            <a:spAutoFit/>
-          </a:bodyPr>
-          <a:lstStyle/>
-          <a:p>
-            <a:r>
-              <a:rPr lang="en-GB" dirty="0">
-                <a:solidFill>
-                  <a:srgbClr val="A41AE4"/>
-                </a:solidFill>
-              </a:rPr>
-              <a:t>Square all the loadings for each factor and add them up. This gives you the “SS loadings”. </a:t>
-            </a:r>
-          </a:p>
-          <a:p>
-            <a:endParaRPr lang="en-GB" dirty="0">
+      <p:grpSp>
+        <p:nvGrpSpPr>
+          <p:cNvPr id="29" name="Group 28">
+            <a:extLst>
+              <a:ext uri="{FF2B5EF4-FFF2-40B4-BE49-F238E27FC236}">
+                <a16:creationId xmlns:a16="http://schemas.microsoft.com/office/drawing/2014/main" id="{872BABA9-4332-48C8-87F8-DA14197902B1}"/>
+              </a:ext>
+            </a:extLst>
+          </p:cNvPr>
+          <p:cNvGrpSpPr/>
+          <p:nvPr/>
+        </p:nvGrpSpPr>
+        <p:grpSpPr>
+          <a:xfrm>
+            <a:off x="5257968" y="4329831"/>
+            <a:ext cx="1676063" cy="1924358"/>
+            <a:chOff x="6810830" y="3845833"/>
+            <a:chExt cx="1676063" cy="1924358"/>
+          </a:xfrm>
+        </p:grpSpPr>
+        <p:sp>
+          <p:nvSpPr>
+            <p:cNvPr id="30" name="Oval 29">
+              <a:extLst>
+                <a:ext uri="{FF2B5EF4-FFF2-40B4-BE49-F238E27FC236}">
+                  <a16:creationId xmlns:a16="http://schemas.microsoft.com/office/drawing/2014/main" id="{30B6EE96-99FE-4F30-92DD-64E27ED20ADF}"/>
+                </a:ext>
+              </a:extLst>
+            </p:cNvPr>
+            <p:cNvSpPr/>
+            <p:nvPr/>
+          </p:nvSpPr>
+          <p:spPr>
+            <a:xfrm>
+              <a:off x="6810830" y="3845833"/>
+              <a:ext cx="1100667" cy="1077218"/>
+            </a:xfrm>
+            <a:prstGeom prst="ellipse">
+              <a:avLst/>
+            </a:prstGeom>
+            <a:noFill/>
+            <a:ln>
               <a:solidFill>
-                <a:srgbClr val="A41AE4"/>
+                <a:schemeClr val="tx1"/>
               </a:solidFill>
-            </a:endParaRPr>
-          </a:p>
-          <a:p>
-            <a:r>
-              <a:rPr lang="en-GB" dirty="0">
-                <a:solidFill>
-                  <a:srgbClr val="A41AE4"/>
-                </a:solidFill>
-              </a:rPr>
-              <a:t>These are the same as the eigenvalues unless an oblique rotation is used. As the variance in each item is scaled to be 1, the total variance in the data is equal to the number of items. </a:t>
-            </a:r>
-          </a:p>
-        </p:txBody>
-      </p:sp>
-      <p:sp>
-        <p:nvSpPr>
-          <p:cNvPr id="2" name="Rectangle 1">
-            <a:extLst>
-              <a:ext uri="{FF2B5EF4-FFF2-40B4-BE49-F238E27FC236}">
-                <a16:creationId xmlns:a16="http://schemas.microsoft.com/office/drawing/2014/main" id="{C2BCBBA2-6170-4304-B738-4C2A80CF295E}"/>
-              </a:ext>
-            </a:extLst>
-          </p:cNvPr>
-          <p:cNvSpPr/>
-          <p:nvPr/>
-        </p:nvSpPr>
-        <p:spPr>
-          <a:xfrm>
-            <a:off x="3733800" y="1524000"/>
-            <a:ext cx="660400" cy="2146300"/>
-          </a:xfrm>
-          <a:prstGeom prst="rect">
-            <a:avLst/>
-          </a:prstGeom>
-          <a:noFill/>
-          <a:ln>
-            <a:solidFill>
-              <a:srgbClr val="A41AE4"/>
-            </a:solidFill>
-          </a:ln>
-        </p:spPr>
-        <p:style>
-          <a:lnRef idx="2">
-            <a:schemeClr val="accent1">
-              <a:shade val="50000"/>
-            </a:schemeClr>
-          </a:lnRef>
-          <a:fillRef idx="1">
-            <a:schemeClr val="accent1"/>
-          </a:fillRef>
-          <a:effectRef idx="0">
-            <a:schemeClr val="accent1"/>
-          </a:effectRef>
-          <a:fontRef idx="minor">
-            <a:schemeClr val="lt1"/>
-          </a:fontRef>
-        </p:style>
-        <p:txBody>
-          <a:bodyPr rtlCol="0" anchor="ctr"/>
-          <a:lstStyle/>
-          <a:p>
-            <a:pPr algn="ctr"/>
-            <a:endParaRPr lang="en-GB"/>
-          </a:p>
-        </p:txBody>
-      </p:sp>
-      <p:sp>
-        <p:nvSpPr>
-          <p:cNvPr id="3" name="Rectangle 2">
-            <a:extLst>
-              <a:ext uri="{FF2B5EF4-FFF2-40B4-BE49-F238E27FC236}">
-                <a16:creationId xmlns:a16="http://schemas.microsoft.com/office/drawing/2014/main" id="{5C0699FC-5F6A-463E-8040-0B41C1910E71}"/>
-              </a:ext>
-            </a:extLst>
-          </p:cNvPr>
-          <p:cNvSpPr/>
-          <p:nvPr/>
-        </p:nvSpPr>
-        <p:spPr>
-          <a:xfrm>
-            <a:off x="5410200" y="4013200"/>
-            <a:ext cx="558800" cy="292100"/>
-          </a:xfrm>
-          <a:prstGeom prst="rect">
-            <a:avLst/>
-          </a:prstGeom>
-          <a:noFill/>
-          <a:ln>
-            <a:solidFill>
-              <a:srgbClr val="A41AE4"/>
-            </a:solidFill>
-          </a:ln>
-        </p:spPr>
-        <p:style>
-          <a:lnRef idx="2">
-            <a:schemeClr val="accent1">
-              <a:shade val="50000"/>
-            </a:schemeClr>
-          </a:lnRef>
-          <a:fillRef idx="1">
-            <a:schemeClr val="accent1"/>
-          </a:fillRef>
-          <a:effectRef idx="0">
-            <a:schemeClr val="accent1"/>
-          </a:effectRef>
-          <a:fontRef idx="minor">
-            <a:schemeClr val="lt1"/>
-          </a:fontRef>
-        </p:style>
-        <p:txBody>
-          <a:bodyPr rtlCol="0" anchor="ctr"/>
-          <a:lstStyle/>
-          <a:p>
-            <a:pPr algn="ctr"/>
-            <a:endParaRPr lang="en-GB"/>
-          </a:p>
-        </p:txBody>
-      </p:sp>
-      <p:cxnSp>
-        <p:nvCxnSpPr>
-          <p:cNvPr id="5" name="Straight Connector 4">
-            <a:extLst>
-              <a:ext uri="{FF2B5EF4-FFF2-40B4-BE49-F238E27FC236}">
-                <a16:creationId xmlns:a16="http://schemas.microsoft.com/office/drawing/2014/main" id="{E615AC58-D23A-4AEB-8717-002173D23750}"/>
-              </a:ext>
-            </a:extLst>
-          </p:cNvPr>
-          <p:cNvCxnSpPr>
-            <a:stCxn id="2" idx="2"/>
-            <a:endCxn id="3" idx="1"/>
-          </p:cNvCxnSpPr>
-          <p:nvPr/>
-        </p:nvCxnSpPr>
-        <p:spPr>
-          <a:xfrm>
-            <a:off x="4064000" y="3670300"/>
-            <a:ext cx="1346200" cy="488950"/>
-          </a:xfrm>
-          <a:prstGeom prst="line">
-            <a:avLst/>
-          </a:prstGeom>
-          <a:ln>
-            <a:solidFill>
-              <a:srgbClr val="A41AE4"/>
-            </a:solidFill>
-          </a:ln>
-        </p:spPr>
-        <p:style>
-          <a:lnRef idx="1">
-            <a:schemeClr val="accent1"/>
-          </a:lnRef>
-          <a:fillRef idx="0">
-            <a:schemeClr val="accent1"/>
-          </a:fillRef>
-          <a:effectRef idx="0">
-            <a:schemeClr val="accent1"/>
-          </a:effectRef>
-          <a:fontRef idx="minor">
-            <a:schemeClr val="tx1"/>
-          </a:fontRef>
-        </p:style>
-      </p:cxnSp>
-      <p:pic>
-        <p:nvPicPr>
-          <p:cNvPr id="7" name="Picture 6">
-            <a:extLst>
-              <a:ext uri="{FF2B5EF4-FFF2-40B4-BE49-F238E27FC236}">
-                <a16:creationId xmlns:a16="http://schemas.microsoft.com/office/drawing/2014/main" id="{ADB236A3-9512-4AB6-97C3-780881DE678C}"/>
-              </a:ext>
-            </a:extLst>
-          </p:cNvPr>
-          <p:cNvPicPr>
-            <a:picLocks noChangeAspect="1"/>
-          </p:cNvPicPr>
-          <p:nvPr/>
-        </p:nvPicPr>
-        <p:blipFill>
-          <a:blip r:embed="rId3"/>
-          <a:stretch>
-            <a:fillRect/>
-          </a:stretch>
-        </p:blipFill>
-        <p:spPr>
-          <a:xfrm>
-            <a:off x="2918865" y="6438549"/>
-            <a:ext cx="485843" cy="257211"/>
-          </a:xfrm>
-          <a:prstGeom prst="rect">
-            <a:avLst/>
-          </a:prstGeom>
-        </p:spPr>
-      </p:pic>
-      <p:sp>
-        <p:nvSpPr>
-          <p:cNvPr id="8" name="TextBox 7">
-            <a:extLst>
-              <a:ext uri="{FF2B5EF4-FFF2-40B4-BE49-F238E27FC236}">
-                <a16:creationId xmlns:a16="http://schemas.microsoft.com/office/drawing/2014/main" id="{9A5B0410-193E-4331-BCA5-805FE3C6F857}"/>
-              </a:ext>
-            </a:extLst>
-          </p:cNvPr>
-          <p:cNvSpPr txBox="1"/>
-          <p:nvPr/>
-        </p:nvSpPr>
-        <p:spPr>
-          <a:xfrm>
-            <a:off x="75499" y="-25167"/>
-            <a:ext cx="5893501" cy="461665"/>
-          </a:xfrm>
-          <a:prstGeom prst="rect">
-            <a:avLst/>
-          </a:prstGeom>
-          <a:noFill/>
-        </p:spPr>
-        <p:txBody>
-          <a:bodyPr wrap="square" rtlCol="0">
-            <a:spAutoFit/>
-          </a:bodyPr>
-          <a:lstStyle/>
-          <a:p>
-            <a:r>
-              <a:rPr lang="en-GB" sz="2400" u="sng" dirty="0">
-                <a:solidFill>
-                  <a:srgbClr val="A41AE4"/>
-                </a:solidFill>
-              </a:rPr>
-              <a:t>SS Loadings &amp; “Variance Accounted For”</a:t>
-            </a:r>
-          </a:p>
-        </p:txBody>
-      </p:sp>
+            </a:ln>
+          </p:spPr>
+          <p:style>
+            <a:lnRef idx="2">
+              <a:schemeClr val="accent1">
+                <a:shade val="50000"/>
+              </a:schemeClr>
+            </a:lnRef>
+            <a:fillRef idx="1">
+              <a:schemeClr val="accent1"/>
+            </a:fillRef>
+            <a:effectRef idx="0">
+              <a:schemeClr val="accent1"/>
+            </a:effectRef>
+            <a:fontRef idx="minor">
+              <a:schemeClr val="lt1"/>
+            </a:fontRef>
+          </p:style>
+          <p:txBody>
+            <a:bodyPr rtlCol="0" anchor="ctr"/>
+            <a:lstStyle/>
+            <a:p>
+              <a:r>
+                <a:rPr lang="en-GB" sz="1400" dirty="0">
+                  <a:solidFill>
+                    <a:schemeClr val="tx1"/>
+                  </a:solidFill>
+                </a:rPr>
+                <a:t>Q10               </a:t>
+              </a:r>
+            </a:p>
+            <a:p>
+              <a:pPr algn="ctr"/>
+              <a:endParaRPr lang="en-GB" sz="1400" dirty="0">
+                <a:solidFill>
+                  <a:schemeClr val="tx1"/>
+                </a:solidFill>
+              </a:endParaRPr>
+            </a:p>
+            <a:p>
+              <a:pPr algn="ctr"/>
+              <a:endParaRPr lang="en-GB" sz="1400" dirty="0">
+                <a:solidFill>
+                  <a:schemeClr val="tx1"/>
+                </a:solidFill>
+              </a:endParaRPr>
+            </a:p>
+          </p:txBody>
+        </p:sp>
+        <p:sp>
+          <p:nvSpPr>
+            <p:cNvPr id="31" name="Oval 30">
+              <a:extLst>
+                <a:ext uri="{FF2B5EF4-FFF2-40B4-BE49-F238E27FC236}">
+                  <a16:creationId xmlns:a16="http://schemas.microsoft.com/office/drawing/2014/main" id="{261C28C7-6A8C-4269-8039-23C64C954131}"/>
+                </a:ext>
+              </a:extLst>
+            </p:cNvPr>
+            <p:cNvSpPr/>
+            <p:nvPr/>
+          </p:nvSpPr>
+          <p:spPr>
+            <a:xfrm>
+              <a:off x="7386226" y="4219297"/>
+              <a:ext cx="1100667" cy="1077218"/>
+            </a:xfrm>
+            <a:prstGeom prst="ellipse">
+              <a:avLst/>
+            </a:prstGeom>
+            <a:noFill/>
+            <a:ln>
+              <a:solidFill>
+                <a:schemeClr val="tx1"/>
+              </a:solidFill>
+            </a:ln>
+          </p:spPr>
+          <p:style>
+            <a:lnRef idx="2">
+              <a:schemeClr val="accent1">
+                <a:shade val="50000"/>
+              </a:schemeClr>
+            </a:lnRef>
+            <a:fillRef idx="1">
+              <a:schemeClr val="accent1"/>
+            </a:fillRef>
+            <a:effectRef idx="0">
+              <a:schemeClr val="accent1"/>
+            </a:effectRef>
+            <a:fontRef idx="minor">
+              <a:schemeClr val="lt1"/>
+            </a:fontRef>
+          </p:style>
+          <p:txBody>
+            <a:bodyPr rtlCol="0" anchor="ctr"/>
+            <a:lstStyle/>
+            <a:p>
+              <a:pPr algn="ctr"/>
+              <a:r>
+                <a:rPr lang="en-GB" sz="1400" dirty="0">
+                  <a:solidFill>
+                    <a:schemeClr val="tx1"/>
+                  </a:solidFill>
+                </a:rPr>
+                <a:t>       </a:t>
+              </a:r>
+            </a:p>
+            <a:p>
+              <a:pPr algn="ctr"/>
+              <a:r>
+                <a:rPr lang="en-GB" sz="1400" dirty="0">
+                  <a:solidFill>
+                    <a:schemeClr val="tx1"/>
+                  </a:solidFill>
+                </a:rPr>
+                <a:t>       ML2</a:t>
+              </a:r>
+            </a:p>
+            <a:p>
+              <a:pPr algn="ctr"/>
+              <a:endParaRPr lang="en-GB" sz="1400" dirty="0">
+                <a:solidFill>
+                  <a:schemeClr val="tx1"/>
+                </a:solidFill>
+              </a:endParaRPr>
+            </a:p>
+            <a:p>
+              <a:pPr algn="ctr"/>
+              <a:endParaRPr lang="en-GB" sz="1400" dirty="0">
+                <a:solidFill>
+                  <a:schemeClr val="tx1"/>
+                </a:solidFill>
+              </a:endParaRPr>
+            </a:p>
+            <a:p>
+              <a:pPr algn="ctr"/>
+              <a:endParaRPr lang="en-GB" sz="1400" dirty="0">
+                <a:solidFill>
+                  <a:schemeClr val="tx1"/>
+                </a:solidFill>
+              </a:endParaRPr>
+            </a:p>
+          </p:txBody>
+        </p:sp>
+        <p:sp>
+          <p:nvSpPr>
+            <p:cNvPr id="32" name="Oval 31">
+              <a:extLst>
+                <a:ext uri="{FF2B5EF4-FFF2-40B4-BE49-F238E27FC236}">
+                  <a16:creationId xmlns:a16="http://schemas.microsoft.com/office/drawing/2014/main" id="{400007EE-CCFE-4B15-B059-846DC1E85392}"/>
+                </a:ext>
+              </a:extLst>
+            </p:cNvPr>
+            <p:cNvSpPr/>
+            <p:nvPr/>
+          </p:nvSpPr>
+          <p:spPr>
+            <a:xfrm>
+              <a:off x="7230951" y="4692973"/>
+              <a:ext cx="1100667" cy="1077218"/>
+            </a:xfrm>
+            <a:prstGeom prst="ellipse">
+              <a:avLst/>
+            </a:prstGeom>
+            <a:noFill/>
+            <a:ln>
+              <a:solidFill>
+                <a:schemeClr val="tx1"/>
+              </a:solidFill>
+            </a:ln>
+          </p:spPr>
+          <p:style>
+            <a:lnRef idx="2">
+              <a:schemeClr val="accent1">
+                <a:shade val="50000"/>
+              </a:schemeClr>
+            </a:lnRef>
+            <a:fillRef idx="1">
+              <a:schemeClr val="accent1"/>
+            </a:fillRef>
+            <a:effectRef idx="0">
+              <a:schemeClr val="accent1"/>
+            </a:effectRef>
+            <a:fontRef idx="minor">
+              <a:schemeClr val="lt1"/>
+            </a:fontRef>
+          </p:style>
+          <p:txBody>
+            <a:bodyPr rtlCol="0" anchor="ctr"/>
+            <a:lstStyle/>
+            <a:p>
+              <a:pPr algn="ctr"/>
+              <a:endParaRPr lang="en-GB" sz="1400" dirty="0">
+                <a:solidFill>
+                  <a:schemeClr val="tx1"/>
+                </a:solidFill>
+              </a:endParaRPr>
+            </a:p>
+            <a:p>
+              <a:pPr algn="ctr"/>
+              <a:endParaRPr lang="en-GB" sz="1400" dirty="0">
+                <a:solidFill>
+                  <a:schemeClr val="tx1"/>
+                </a:solidFill>
+              </a:endParaRPr>
+            </a:p>
+            <a:p>
+              <a:pPr algn="ctr"/>
+              <a:endParaRPr lang="en-GB" sz="1400" dirty="0">
+                <a:solidFill>
+                  <a:schemeClr val="tx1"/>
+                </a:solidFill>
+              </a:endParaRPr>
+            </a:p>
+            <a:p>
+              <a:pPr algn="ctr"/>
+              <a:r>
+                <a:rPr lang="en-GB" sz="1400" dirty="0">
+                  <a:solidFill>
+                    <a:schemeClr val="tx1"/>
+                  </a:solidFill>
+                </a:rPr>
+                <a:t>ML1</a:t>
+              </a:r>
+            </a:p>
+          </p:txBody>
+        </p:sp>
+      </p:grpSp>
     </p:spTree>
     <p:extLst>
       <p:ext uri="{BB962C8B-B14F-4D97-AF65-F5344CB8AC3E}">
-        <p14:creationId xmlns:p14="http://schemas.microsoft.com/office/powerpoint/2010/main" val="2648255724"/>
+        <p14:creationId xmlns:p14="http://schemas.microsoft.com/office/powerpoint/2010/main" val="758712006"/>
       </p:ext>
     </p:extLst>
   </p:cSld>
@@ -8872,10 +12197,10 @@
       </p:grpSpPr>
       <p:pic>
         <p:nvPicPr>
-          <p:cNvPr id="8" name="Picture 7">
-            <a:extLst>
-              <a:ext uri="{FF2B5EF4-FFF2-40B4-BE49-F238E27FC236}">
-                <a16:creationId xmlns:a16="http://schemas.microsoft.com/office/drawing/2014/main" id="{3770CDBE-8198-4526-B184-889BAED407B7}"/>
+          <p:cNvPr id="15" name="Picture 14">
+            <a:extLst>
+              <a:ext uri="{FF2B5EF4-FFF2-40B4-BE49-F238E27FC236}">
+                <a16:creationId xmlns:a16="http://schemas.microsoft.com/office/drawing/2014/main" id="{2E526E6A-7A23-4B28-A948-A05CF9D18E4D}"/>
               </a:ext>
             </a:extLst>
           </p:cNvPr>
@@ -8902,10 +12227,10 @@
       </p:pic>
       <p:sp>
         <p:nvSpPr>
-          <p:cNvPr id="12" name="TextBox 11">
-            <a:extLst>
-              <a:ext uri="{FF2B5EF4-FFF2-40B4-BE49-F238E27FC236}">
-                <a16:creationId xmlns:a16="http://schemas.microsoft.com/office/drawing/2014/main" id="{E7768DC0-53D9-42C6-904C-602DA558CA6A}"/>
+          <p:cNvPr id="6" name="TextBox 5">
+            <a:extLst>
+              <a:ext uri="{FF2B5EF4-FFF2-40B4-BE49-F238E27FC236}">
+                <a16:creationId xmlns:a16="http://schemas.microsoft.com/office/drawing/2014/main" id="{1519AEAF-4003-41C0-A386-9B9E629497B9}"/>
               </a:ext>
             </a:extLst>
           </p:cNvPr>
@@ -8914,8 +12239,8 @@
         </p:nvSpPr>
         <p:spPr>
           <a:xfrm>
-            <a:off x="7329758" y="3818756"/>
-            <a:ext cx="4550916" cy="1354217"/>
+            <a:off x="429071" y="2240819"/>
+            <a:ext cx="2283114" cy="646331"/>
           </a:xfrm>
           <a:prstGeom prst="rect">
             <a:avLst/>
@@ -8934,7 +12259,46 @@
                   <a:srgbClr val="A41AE4"/>
                 </a:solidFill>
               </a:rPr>
-              <a:t>SS loadings divided by number of items gives the proportion of variance in the data explained by each factor</a:t>
+              <a:t>Each row is an item (one of our variables)</a:t>
+            </a:r>
+          </a:p>
+        </p:txBody>
+      </p:sp>
+      <p:sp>
+        <p:nvSpPr>
+          <p:cNvPr id="7" name="TextBox 6">
+            <a:extLst>
+              <a:ext uri="{FF2B5EF4-FFF2-40B4-BE49-F238E27FC236}">
+                <a16:creationId xmlns:a16="http://schemas.microsoft.com/office/drawing/2014/main" id="{34939B2C-7D92-4974-87B9-9C5C9439F97F}"/>
+              </a:ext>
+            </a:extLst>
+          </p:cNvPr>
+          <p:cNvSpPr txBox="1"/>
+          <p:nvPr/>
+        </p:nvSpPr>
+        <p:spPr>
+          <a:xfrm>
+            <a:off x="7121745" y="4261898"/>
+            <a:ext cx="4796871" cy="1354217"/>
+          </a:xfrm>
+          <a:prstGeom prst="rect">
+            <a:avLst/>
+          </a:prstGeom>
+          <a:noFill/>
+        </p:spPr>
+        <p:txBody>
+          <a:bodyPr wrap="square" rtlCol="0">
+            <a:spAutoFit/>
+          </a:bodyPr>
+          <a:lstStyle/>
+          <a:p>
+            <a:r>
+              <a:rPr lang="en-GB" dirty="0">
+                <a:solidFill>
+                  <a:srgbClr val="A41AE4"/>
+                </a:solidFill>
+              </a:rPr>
+              <a:t>A squared loading reflects the proportion of variance in an item that is uniquely explained by a factor.  </a:t>
             </a:r>
           </a:p>
           <a:p>
@@ -8944,27 +12308,144 @@
                   <a:srgbClr val="A41AE4"/>
                 </a:solidFill>
               </a:rPr>
-              <a:t>e.g., 1.73/9 = 0.19</a:t>
-            </a:r>
-          </a:p>
-          <a:p>
+              <a:t>e.g., -0.60</a:t>
+            </a:r>
+            <a:r>
+              <a:rPr lang="en-GB" sz="1400" b="0" i="0" dirty="0">
+                <a:solidFill>
+                  <a:srgbClr val="A41AE4"/>
+                </a:solidFill>
+                <a:effectLst/>
+                <a:latin typeface="-apple-system"/>
+              </a:rPr>
+              <a:t>² </a:t>
+            </a:r>
             <a:r>
               <a:rPr lang="en-GB" sz="1400" dirty="0">
                 <a:solidFill>
                   <a:srgbClr val="A41AE4"/>
                 </a:solidFill>
               </a:rPr>
-              <a:t>19% of the variance is explained by Factor 1</a:t>
-            </a:r>
-          </a:p>
-        </p:txBody>
-      </p:sp>
-      <p:sp>
-        <p:nvSpPr>
-          <p:cNvPr id="11" name="Rectangle 10">
-            <a:extLst>
-              <a:ext uri="{FF2B5EF4-FFF2-40B4-BE49-F238E27FC236}">
-                <a16:creationId xmlns:a16="http://schemas.microsoft.com/office/drawing/2014/main" id="{1C7B9257-FBDF-46EF-874C-7F3089725E1E}"/>
+              <a:t> = 0.36</a:t>
+            </a:r>
+          </a:p>
+          <a:p>
+            <a:r>
+              <a:rPr lang="en-GB" sz="1400" dirty="0">
+                <a:solidFill>
+                  <a:srgbClr val="A41AE4"/>
+                </a:solidFill>
+              </a:rPr>
+              <a:t>36% of the variance in item 1 is explained by Factor 1</a:t>
+            </a:r>
+          </a:p>
+        </p:txBody>
+      </p:sp>
+      <p:sp>
+        <p:nvSpPr>
+          <p:cNvPr id="19" name="TextBox 18">
+            <a:extLst>
+              <a:ext uri="{FF2B5EF4-FFF2-40B4-BE49-F238E27FC236}">
+                <a16:creationId xmlns:a16="http://schemas.microsoft.com/office/drawing/2014/main" id="{3E957946-CE17-4628-B08D-798207573E9E}"/>
+              </a:ext>
+            </a:extLst>
+          </p:cNvPr>
+          <p:cNvSpPr txBox="1"/>
+          <p:nvPr/>
+        </p:nvSpPr>
+        <p:spPr>
+          <a:xfrm>
+            <a:off x="429071" y="822649"/>
+            <a:ext cx="1780729" cy="1200329"/>
+          </a:xfrm>
+          <a:prstGeom prst="rect">
+            <a:avLst/>
+          </a:prstGeom>
+          <a:noFill/>
+        </p:spPr>
+        <p:txBody>
+          <a:bodyPr wrap="square" rtlCol="0">
+            <a:spAutoFit/>
+          </a:bodyPr>
+          <a:lstStyle/>
+          <a:p>
+            <a:r>
+              <a:rPr lang="en-GB" dirty="0">
+                <a:solidFill>
+                  <a:srgbClr val="A41AE4"/>
+                </a:solidFill>
+              </a:rPr>
+              <a:t>Each column is a factor</a:t>
+            </a:r>
+            <a:br>
+              <a:rPr lang="en-GB" dirty="0">
+                <a:solidFill>
+                  <a:srgbClr val="A41AE4"/>
+                </a:solidFill>
+              </a:rPr>
+            </a:br>
+            <a:r>
+              <a:rPr lang="en-GB" sz="1200" dirty="0">
+                <a:solidFill>
+                  <a:srgbClr val="A41AE4"/>
+                </a:solidFill>
+              </a:rPr>
+              <a:t>(these are named according to the extraction method)</a:t>
+            </a:r>
+          </a:p>
+        </p:txBody>
+      </p:sp>
+      <p:cxnSp>
+        <p:nvCxnSpPr>
+          <p:cNvPr id="21" name="Straight Arrow Connector 20">
+            <a:extLst>
+              <a:ext uri="{FF2B5EF4-FFF2-40B4-BE49-F238E27FC236}">
+                <a16:creationId xmlns:a16="http://schemas.microsoft.com/office/drawing/2014/main" id="{2BF88D99-D232-4D31-AC2B-AD263814ED77}"/>
+              </a:ext>
+            </a:extLst>
+          </p:cNvPr>
+          <p:cNvCxnSpPr>
+            <a:cxnSpLocks/>
+            <a:stCxn id="19" idx="3"/>
+          </p:cNvCxnSpPr>
+          <p:nvPr/>
+        </p:nvCxnSpPr>
+        <p:spPr>
+          <a:xfrm flipV="1">
+            <a:off x="2209800" y="1422402"/>
+            <a:ext cx="1651000" cy="412"/>
+          </a:xfrm>
+          <a:prstGeom prst="straightConnector1">
+            <a:avLst/>
+          </a:prstGeom>
+          <a:ln>
+            <a:solidFill>
+              <a:srgbClr val="A41AE4"/>
+            </a:solidFill>
+            <a:tailEnd type="triangle"/>
+          </a:ln>
+        </p:spPr>
+        <p:style>
+          <a:lnRef idx="1">
+            <a:schemeClr val="accent2"/>
+          </a:lnRef>
+          <a:fillRef idx="0">
+            <a:schemeClr val="accent2"/>
+          </a:fillRef>
+          <a:effectRef idx="0">
+            <a:schemeClr val="accent2"/>
+          </a:effectRef>
+          <a:fontRef idx="minor">
+            <a:schemeClr val="tx1"/>
+          </a:fontRef>
+        </p:style>
+      </p:cxnSp>
+      <p:sp>
+        <p:nvSpPr>
+          <p:cNvPr id="23" name="Left Brace 22">
+            <a:extLst>
+              <a:ext uri="{FF2B5EF4-FFF2-40B4-BE49-F238E27FC236}">
+                <a16:creationId xmlns:a16="http://schemas.microsoft.com/office/drawing/2014/main" id="{7A002C84-DBF4-4C1B-92E3-9515A372B2E8}"/>
               </a:ext>
             </a:extLst>
           </p:cNvPr>
@@ -8972,9 +12453,224 @@
           <p:nvPr/>
         </p:nvSpPr>
         <p:spPr>
-          <a:xfrm flipV="1">
-            <a:off x="5410199" y="4279899"/>
-            <a:ext cx="1112287" cy="238796"/>
+          <a:xfrm>
+            <a:off x="2712185" y="1559270"/>
+            <a:ext cx="177081" cy="2009430"/>
+          </a:xfrm>
+          <a:prstGeom prst="leftBrace">
+            <a:avLst/>
+          </a:prstGeom>
+          <a:ln w="12700">
+            <a:solidFill>
+              <a:srgbClr val="A41AE4"/>
+            </a:solidFill>
+          </a:ln>
+        </p:spPr>
+        <p:style>
+          <a:lnRef idx="1">
+            <a:schemeClr val="accent2"/>
+          </a:lnRef>
+          <a:fillRef idx="0">
+            <a:schemeClr val="accent2"/>
+          </a:fillRef>
+          <a:effectRef idx="0">
+            <a:schemeClr val="accent2"/>
+          </a:effectRef>
+          <a:fontRef idx="minor">
+            <a:schemeClr val="tx1"/>
+          </a:fontRef>
+        </p:style>
+        <p:txBody>
+          <a:bodyPr rtlCol="0" anchor="ctr"/>
+          <a:lstStyle/>
+          <a:p>
+            <a:pPr algn="ctr"/>
+            <a:endParaRPr lang="en-GB"/>
+          </a:p>
+        </p:txBody>
+      </p:sp>
+      <p:sp>
+        <p:nvSpPr>
+          <p:cNvPr id="20" name="TextBox 19">
+            <a:extLst>
+              <a:ext uri="{FF2B5EF4-FFF2-40B4-BE49-F238E27FC236}">
+                <a16:creationId xmlns:a16="http://schemas.microsoft.com/office/drawing/2014/main" id="{8A932784-3152-4FEC-A4BA-9D8ED5FC7B85}"/>
+              </a:ext>
+            </a:extLst>
+          </p:cNvPr>
+          <p:cNvSpPr txBox="1"/>
+          <p:nvPr/>
+        </p:nvSpPr>
+        <p:spPr>
+          <a:xfrm>
+            <a:off x="7121745" y="1691423"/>
+            <a:ext cx="4641184" cy="2267287"/>
+          </a:xfrm>
+          <a:prstGeom prst="rect">
+            <a:avLst/>
+          </a:prstGeom>
+          <a:noFill/>
+        </p:spPr>
+        <p:txBody>
+          <a:bodyPr wrap="square">
+            <a:spAutoFit/>
+          </a:bodyPr>
+          <a:lstStyle/>
+          <a:p>
+            <a:r>
+              <a:rPr lang="en-GB" dirty="0">
+                <a:solidFill>
+                  <a:srgbClr val="A41AE4"/>
+                </a:solidFill>
+              </a:rPr>
+              <a:t>Loadings show the association between each item and each factor. </a:t>
+            </a:r>
+          </a:p>
+          <a:p>
+            <a:br>
+              <a:rPr lang="en-GB" sz="1400" dirty="0">
+                <a:solidFill>
+                  <a:srgbClr val="A41AE4"/>
+                </a:solidFill>
+              </a:rPr>
+            </a:br>
+            <a:r>
+              <a:rPr lang="en-GB" sz="1400" dirty="0">
+                <a:solidFill>
+                  <a:srgbClr val="A41AE4"/>
+                </a:solidFill>
+              </a:rPr>
+              <a:t>With an oblique rotation, the pattern matrix shows standardised regression coefficients:</a:t>
+            </a:r>
+          </a:p>
+          <a:p>
+            <a:r>
+              <a:rPr lang="en-GB" sz="1200" dirty="0" err="1">
+                <a:solidFill>
+                  <a:srgbClr val="A41AE4"/>
+                </a:solidFill>
+              </a:rPr>
+              <a:t>item</a:t>
+            </a:r>
+            <a:r>
+              <a:rPr lang="en-GB" sz="1200" baseline="-25000" dirty="0" err="1">
+                <a:solidFill>
+                  <a:srgbClr val="A41AE4"/>
+                </a:solidFill>
+              </a:rPr>
+              <a:t>i</a:t>
+            </a:r>
+            <a:r>
+              <a:rPr lang="en-GB" sz="1200" dirty="0">
+                <a:solidFill>
+                  <a:srgbClr val="A41AE4"/>
+                </a:solidFill>
+                <a:latin typeface="Helvetica Neue"/>
+              </a:rPr>
+              <a:t> </a:t>
+            </a:r>
+            <a:r>
+              <a:rPr lang="en-GB" sz="1200" dirty="0">
+                <a:solidFill>
+                  <a:srgbClr val="A41AE4"/>
+                </a:solidFill>
+              </a:rPr>
+              <a:t>= loading</a:t>
+            </a:r>
+            <a:r>
+              <a:rPr lang="en-GB" sz="1200" baseline="-25000" dirty="0">
+                <a:solidFill>
+                  <a:srgbClr val="A41AE4"/>
+                </a:solidFill>
+              </a:rPr>
+              <a:t>F1,i</a:t>
+            </a:r>
+            <a:r>
+              <a:rPr lang="en-GB" sz="1200" dirty="0">
+                <a:solidFill>
+                  <a:srgbClr val="A41AE4"/>
+                </a:solidFill>
+              </a:rPr>
+              <a:t>*Factor1 + loading</a:t>
+            </a:r>
+            <a:r>
+              <a:rPr lang="en-GB" sz="1200" baseline="-25000" dirty="0">
+                <a:solidFill>
+                  <a:srgbClr val="A41AE4"/>
+                </a:solidFill>
+              </a:rPr>
+              <a:t>F2,i</a:t>
+            </a:r>
+            <a:r>
+              <a:rPr lang="en-GB" sz="1200" dirty="0">
+                <a:solidFill>
+                  <a:srgbClr val="A41AE4"/>
+                </a:solidFill>
+              </a:rPr>
+              <a:t>*Factor2 + … + </a:t>
+            </a:r>
+            <a:r>
+              <a:rPr lang="en-GB" sz="1200" dirty="0" err="1">
+                <a:solidFill>
+                  <a:srgbClr val="A41AE4"/>
+                </a:solidFill>
+              </a:rPr>
+              <a:t>uniqueness</a:t>
+            </a:r>
+            <a:r>
+              <a:rPr lang="en-GB" sz="1200" baseline="-25000" dirty="0" err="1">
+                <a:solidFill>
+                  <a:srgbClr val="A41AE4"/>
+                </a:solidFill>
+              </a:rPr>
+              <a:t>i</a:t>
+            </a:r>
+            <a:endParaRPr lang="en-GB" sz="1200" baseline="-25000" dirty="0">
+              <a:solidFill>
+                <a:srgbClr val="A41AE4"/>
+              </a:solidFill>
+            </a:endParaRPr>
+          </a:p>
+          <a:p>
+            <a:endParaRPr lang="en-GB" sz="1400" baseline="-25000" dirty="0">
+              <a:solidFill>
+                <a:srgbClr val="A41AE4"/>
+              </a:solidFill>
+            </a:endParaRPr>
+          </a:p>
+          <a:p>
+            <a:r>
+              <a:rPr lang="en-GB" sz="1400" dirty="0">
+                <a:solidFill>
+                  <a:srgbClr val="A41AE4"/>
+                </a:solidFill>
+              </a:rPr>
+              <a:t>With no rotation or an orthogonal rotation these are correlation coefficients, and the pattern matrix is identical to the structure matrix*</a:t>
+            </a:r>
+            <a:endParaRPr lang="en-GB" sz="1400" baseline="-25000" dirty="0">
+              <a:solidFill>
+                <a:srgbClr val="A41AE4"/>
+              </a:solidFill>
+            </a:endParaRPr>
+          </a:p>
+        </p:txBody>
+      </p:sp>
+      <p:sp>
+        <p:nvSpPr>
+          <p:cNvPr id="24" name="Rectangle 23">
+            <a:extLst>
+              <a:ext uri="{FF2B5EF4-FFF2-40B4-BE49-F238E27FC236}">
+                <a16:creationId xmlns:a16="http://schemas.microsoft.com/office/drawing/2014/main" id="{9C66D4C5-D7CE-4979-8C83-BA3107A7840E}"/>
+              </a:ext>
+            </a:extLst>
+          </p:cNvPr>
+          <p:cNvSpPr/>
+          <p:nvPr/>
+        </p:nvSpPr>
+        <p:spPr>
+          <a:xfrm>
+            <a:off x="3692743" y="1536701"/>
+            <a:ext cx="1377514" cy="2108200"/>
           </a:xfrm>
           <a:prstGeom prst="rect">
             <a:avLst/>
@@ -9011,12 +12707,167 @@
           </a:p>
         </p:txBody>
       </p:sp>
+      <p:sp>
+        <p:nvSpPr>
+          <p:cNvPr id="10" name="TextBox 9">
+            <a:extLst>
+              <a:ext uri="{FF2B5EF4-FFF2-40B4-BE49-F238E27FC236}">
+                <a16:creationId xmlns:a16="http://schemas.microsoft.com/office/drawing/2014/main" id="{8AF5C982-EADB-41EC-A56F-CA743F71CEDC}"/>
+              </a:ext>
+            </a:extLst>
+          </p:cNvPr>
+          <p:cNvSpPr txBox="1"/>
+          <p:nvPr/>
+        </p:nvSpPr>
+        <p:spPr>
+          <a:xfrm>
+            <a:off x="6012111" y="5994143"/>
+            <a:ext cx="6179382" cy="861774"/>
+          </a:xfrm>
+          <a:prstGeom prst="rect">
+            <a:avLst/>
+          </a:prstGeom>
+          <a:noFill/>
+        </p:spPr>
+        <p:txBody>
+          <a:bodyPr wrap="square" rtlCol="0">
+            <a:spAutoFit/>
+          </a:bodyPr>
+          <a:lstStyle/>
+          <a:p>
+            <a:r>
+              <a:rPr lang="en-GB" sz="1000" dirty="0">
+                <a:solidFill>
+                  <a:srgbClr val="A41AE4"/>
+                </a:solidFill>
+              </a:rPr>
+              <a:t>*When an oblique rotation is used, factors can be correlated. Therefore to get the </a:t>
+            </a:r>
+            <a:r>
+              <a:rPr lang="en-GB" sz="1000" i="1" dirty="0">
+                <a:solidFill>
+                  <a:srgbClr val="A41AE4"/>
+                </a:solidFill>
+              </a:rPr>
+              <a:t>unique </a:t>
+            </a:r>
+            <a:r>
+              <a:rPr lang="en-GB" sz="1000" dirty="0">
+                <a:solidFill>
+                  <a:srgbClr val="A41AE4"/>
+                </a:solidFill>
+              </a:rPr>
+              <a:t>association between item and factors, we need the regression weights from a model of </a:t>
+            </a:r>
+            <a:r>
+              <a:rPr lang="en-GB" sz="1000" dirty="0">
+                <a:solidFill>
+                  <a:srgbClr val="A41AE4"/>
+                </a:solidFill>
+                <a:latin typeface="Courier New" panose="02070309020205020404" pitchFamily="49" charset="0"/>
+                <a:cs typeface="Courier New" panose="02070309020205020404" pitchFamily="49" charset="0"/>
+              </a:rPr>
+              <a:t>item ~ factor1 + factor2</a:t>
+            </a:r>
+            <a:r>
+              <a:rPr lang="en-GB" sz="1000" dirty="0">
+                <a:solidFill>
+                  <a:srgbClr val="A41AE4"/>
+                </a:solidFill>
+              </a:rPr>
+              <a:t>. </a:t>
+            </a:r>
+          </a:p>
+          <a:p>
+            <a:r>
+              <a:rPr lang="en-GB" sz="1000" dirty="0">
+                <a:solidFill>
+                  <a:srgbClr val="A41AE4"/>
+                </a:solidFill>
+              </a:rPr>
+              <a:t>If the factors are </a:t>
+            </a:r>
+            <a:r>
+              <a:rPr lang="en-GB" sz="1000" b="1" dirty="0">
+                <a:solidFill>
+                  <a:srgbClr val="A41AE4"/>
+                </a:solidFill>
+              </a:rPr>
+              <a:t>not</a:t>
+            </a:r>
+            <a:r>
+              <a:rPr lang="en-GB" sz="1000" dirty="0">
+                <a:solidFill>
+                  <a:srgbClr val="A41AE4"/>
+                </a:solidFill>
+              </a:rPr>
+              <a:t> correlated (by definition they are uncorrelated when no rotation or an orthogonal rotation is used), then these regression weights are just the same as the correlations </a:t>
+            </a:r>
+            <a:r>
+              <a:rPr lang="en-GB" sz="1000" dirty="0" err="1">
+                <a:solidFill>
+                  <a:srgbClr val="A41AE4"/>
+                </a:solidFill>
+                <a:latin typeface="Courier New" panose="02070309020205020404" pitchFamily="49" charset="0"/>
+                <a:cs typeface="Courier New" panose="02070309020205020404" pitchFamily="49" charset="0"/>
+              </a:rPr>
+              <a:t>cor</a:t>
+            </a:r>
+            <a:r>
+              <a:rPr lang="en-GB" sz="1000" dirty="0">
+                <a:solidFill>
+                  <a:srgbClr val="A41AE4"/>
+                </a:solidFill>
+                <a:latin typeface="Courier New" panose="02070309020205020404" pitchFamily="49" charset="0"/>
+                <a:cs typeface="Courier New" panose="02070309020205020404" pitchFamily="49" charset="0"/>
+              </a:rPr>
+              <a:t>(item, factor1) </a:t>
+            </a:r>
+            <a:r>
+              <a:rPr lang="en-GB" sz="1000" dirty="0">
+                <a:solidFill>
+                  <a:srgbClr val="A41AE4"/>
+                </a:solidFill>
+              </a:rPr>
+              <a:t>and </a:t>
+            </a:r>
+            <a:r>
+              <a:rPr lang="en-GB" sz="1000" dirty="0" err="1">
+                <a:solidFill>
+                  <a:srgbClr val="A41AE4"/>
+                </a:solidFill>
+                <a:latin typeface="Courier New" panose="02070309020205020404" pitchFamily="49" charset="0"/>
+                <a:cs typeface="Courier New" panose="02070309020205020404" pitchFamily="49" charset="0"/>
+              </a:rPr>
+              <a:t>cor</a:t>
+            </a:r>
+            <a:r>
+              <a:rPr lang="en-GB" sz="1000" dirty="0">
+                <a:solidFill>
+                  <a:srgbClr val="A41AE4"/>
+                </a:solidFill>
+                <a:latin typeface="Courier New" panose="02070309020205020404" pitchFamily="49" charset="0"/>
+                <a:cs typeface="Courier New" panose="02070309020205020404" pitchFamily="49" charset="0"/>
+              </a:rPr>
+              <a:t>(item, factor2)</a:t>
+            </a:r>
+            <a:r>
+              <a:rPr lang="en-GB" sz="1000" dirty="0">
+                <a:solidFill>
+                  <a:srgbClr val="A41AE4"/>
+                </a:solidFill>
+              </a:rPr>
+              <a:t>. </a:t>
+            </a:r>
+          </a:p>
+        </p:txBody>
+      </p:sp>
       <p:pic>
         <p:nvPicPr>
-          <p:cNvPr id="5" name="Picture 4">
-            <a:extLst>
-              <a:ext uri="{FF2B5EF4-FFF2-40B4-BE49-F238E27FC236}">
-                <a16:creationId xmlns:a16="http://schemas.microsoft.com/office/drawing/2014/main" id="{02A20D3E-4952-4F53-8BBF-214842A48A50}"/>
+          <p:cNvPr id="11" name="Picture 10">
+            <a:extLst>
+              <a:ext uri="{FF2B5EF4-FFF2-40B4-BE49-F238E27FC236}">
+                <a16:creationId xmlns:a16="http://schemas.microsoft.com/office/drawing/2014/main" id="{71340B10-4821-45B4-AE0F-DE3DA76DE72D}"/>
               </a:ext>
             </a:extLst>
           </p:cNvPr>
@@ -9043,10 +12894,10 @@
       </p:pic>
       <p:sp>
         <p:nvSpPr>
-          <p:cNvPr id="6" name="TextBox 5">
-            <a:extLst>
-              <a:ext uri="{FF2B5EF4-FFF2-40B4-BE49-F238E27FC236}">
-                <a16:creationId xmlns:a16="http://schemas.microsoft.com/office/drawing/2014/main" id="{45649766-D3FE-469C-A3EF-FC72C107E4C3}"/>
+          <p:cNvPr id="13" name="TextBox 12">
+            <a:extLst>
+              <a:ext uri="{FF2B5EF4-FFF2-40B4-BE49-F238E27FC236}">
+                <a16:creationId xmlns:a16="http://schemas.microsoft.com/office/drawing/2014/main" id="{C74BA475-9C1D-4AF9-8D37-798F78B516B0}"/>
               </a:ext>
             </a:extLst>
           </p:cNvPr>
@@ -9075,7 +12926,7 @@
                   <a:srgbClr val="A41AE4"/>
                 </a:solidFill>
               </a:rPr>
-              <a:t>SS Loadings &amp; “Variance Accounted For”</a:t>
+              <a:t>PATTERN MATRIX</a:t>
             </a:r>
           </a:p>
         </p:txBody>
@@ -9083,7 +12934,7 @@
     </p:spTree>
     <p:extLst>
       <p:ext uri="{BB962C8B-B14F-4D97-AF65-F5344CB8AC3E}">
-        <p14:creationId xmlns:p14="http://schemas.microsoft.com/office/powerpoint/2010/main" val="2553950230"/>
+        <p14:creationId xmlns:p14="http://schemas.microsoft.com/office/powerpoint/2010/main" val="220084793"/>
       </p:ext>
     </p:extLst>
   </p:cSld>
@@ -9112,10 +12963,10 @@
       </p:grpSpPr>
       <p:pic>
         <p:nvPicPr>
-          <p:cNvPr id="8" name="Picture 7">
-            <a:extLst>
-              <a:ext uri="{FF2B5EF4-FFF2-40B4-BE49-F238E27FC236}">
-                <a16:creationId xmlns:a16="http://schemas.microsoft.com/office/drawing/2014/main" id="{4B7817CB-8BEB-497F-8C9F-3F28FA94A02E}"/>
+          <p:cNvPr id="9" name="Picture 8">
+            <a:extLst>
+              <a:ext uri="{FF2B5EF4-FFF2-40B4-BE49-F238E27FC236}">
+                <a16:creationId xmlns:a16="http://schemas.microsoft.com/office/drawing/2014/main" id="{12E4B26C-220F-4ABD-A510-FB909461261E}"/>
               </a:ext>
             </a:extLst>
           </p:cNvPr>
@@ -9142,10 +12993,10 @@
       </p:pic>
       <p:sp>
         <p:nvSpPr>
-          <p:cNvPr id="13" name="TextBox 12">
-            <a:extLst>
-              <a:ext uri="{FF2B5EF4-FFF2-40B4-BE49-F238E27FC236}">
-                <a16:creationId xmlns:a16="http://schemas.microsoft.com/office/drawing/2014/main" id="{03CBD6FB-C8E6-421C-B8D7-63487AB7B81B}"/>
+          <p:cNvPr id="11" name="TextBox 10">
+            <a:extLst>
+              <a:ext uri="{FF2B5EF4-FFF2-40B4-BE49-F238E27FC236}">
+                <a16:creationId xmlns:a16="http://schemas.microsoft.com/office/drawing/2014/main" id="{493E50EB-A39A-4313-86FF-0F97860C9441}"/>
               </a:ext>
             </a:extLst>
           </p:cNvPr>
@@ -9154,8 +13005,8 @@
         </p:nvSpPr>
         <p:spPr>
           <a:xfrm>
-            <a:off x="7329758" y="3895699"/>
-            <a:ext cx="3973242" cy="1138773"/>
+            <a:off x="7338602" y="1409822"/>
+            <a:ext cx="4281898" cy="3508653"/>
           </a:xfrm>
           <a:prstGeom prst="rect">
             <a:avLst/>
@@ -9174,7 +13025,105 @@
                   <a:srgbClr val="A41AE4"/>
                 </a:solidFill>
               </a:rPr>
-              <a:t>Taking each factor sequentially, we can calculate the cumulative variance explained. </a:t>
+              <a:t>Square the </a:t>
+            </a:r>
+            <a:r>
+              <a:rPr lang="en-GB" b="1" dirty="0">
+                <a:solidFill>
+                  <a:srgbClr val="A41AE4"/>
+                </a:solidFill>
+              </a:rPr>
+              <a:t>correlations </a:t>
+            </a:r>
+            <a:r>
+              <a:rPr lang="en-GB" dirty="0">
+                <a:solidFill>
+                  <a:srgbClr val="A41AE4"/>
+                </a:solidFill>
+              </a:rPr>
+              <a:t>each item and add them up, and you get the proportion of variance in an item that is explained by all the factors. This is the “communality”.  </a:t>
+            </a:r>
+          </a:p>
+          <a:p>
+            <a:endParaRPr lang="en-GB" dirty="0">
+              <a:solidFill>
+                <a:srgbClr val="A41AE4"/>
+              </a:solidFill>
+            </a:endParaRPr>
+          </a:p>
+          <a:p>
+            <a:endParaRPr lang="en-GB" dirty="0">
+              <a:solidFill>
+                <a:srgbClr val="A41AE4"/>
+              </a:solidFill>
+            </a:endParaRPr>
+          </a:p>
+          <a:p>
+            <a:r>
+              <a:rPr lang="en-GB" dirty="0">
+                <a:solidFill>
+                  <a:srgbClr val="A41AE4"/>
+                </a:solidFill>
+              </a:rPr>
+              <a:t>The correlations are in the </a:t>
+            </a:r>
+            <a:r>
+              <a:rPr lang="en-GB" i="1" dirty="0">
+                <a:solidFill>
+                  <a:srgbClr val="A41AE4"/>
+                </a:solidFill>
+              </a:rPr>
+              <a:t>structure matrix</a:t>
+            </a:r>
+            <a:r>
+              <a:rPr lang="en-GB" dirty="0">
+                <a:solidFill>
+                  <a:srgbClr val="A41AE4"/>
+                </a:solidFill>
+              </a:rPr>
+              <a:t>, </a:t>
+            </a:r>
+          </a:p>
+          <a:p>
+            <a:r>
+              <a:rPr lang="en-GB" dirty="0">
+                <a:solidFill>
+                  <a:srgbClr val="A41AE4"/>
+                </a:solidFill>
+              </a:rPr>
+              <a:t>but this is the </a:t>
+            </a:r>
+            <a:r>
+              <a:rPr lang="en-GB" i="1" dirty="0">
+                <a:solidFill>
+                  <a:srgbClr val="A41AE4"/>
+                </a:solidFill>
+              </a:rPr>
+              <a:t>pattern</a:t>
+            </a:r>
+            <a:r>
+              <a:rPr lang="en-GB" dirty="0">
+                <a:solidFill>
+                  <a:srgbClr val="A41AE4"/>
+                </a:solidFill>
+              </a:rPr>
+              <a:t> </a:t>
+            </a:r>
+            <a:r>
+              <a:rPr lang="en-GB" i="1" dirty="0">
+                <a:solidFill>
+                  <a:srgbClr val="A41AE4"/>
+                </a:solidFill>
+              </a:rPr>
+              <a:t>matrix</a:t>
+            </a:r>
+            <a:r>
+              <a:rPr lang="en-GB" dirty="0">
+                <a:solidFill>
+                  <a:srgbClr val="A41AE4"/>
+                </a:solidFill>
+              </a:rPr>
+              <a:t>. Because the factor correlations here are low, we can just do this calculation on the loadings here</a:t>
             </a:r>
           </a:p>
           <a:p>
@@ -9184,17 +13133,79 @@
                   <a:srgbClr val="A41AE4"/>
                 </a:solidFill>
               </a:rPr>
-              <a:t>e.g., 0.19+0.14 = 0.33</a:t>
-            </a:r>
-          </a:p>
-        </p:txBody>
-      </p:sp>
-      <p:sp>
-        <p:nvSpPr>
-          <p:cNvPr id="3" name="Rectangle 2">
-            <a:extLst>
-              <a:ext uri="{FF2B5EF4-FFF2-40B4-BE49-F238E27FC236}">
-                <a16:creationId xmlns:a16="http://schemas.microsoft.com/office/drawing/2014/main" id="{5C0699FC-5F6A-463E-8040-0B41C1910E71}"/>
+              <a:t>e.g., -0.03</a:t>
+            </a:r>
+            <a:r>
+              <a:rPr lang="en-GB" sz="1400" b="0" i="0" dirty="0">
+                <a:solidFill>
+                  <a:srgbClr val="A41AE4"/>
+                </a:solidFill>
+                <a:effectLst/>
+                <a:latin typeface="-apple-system"/>
+              </a:rPr>
+              <a:t>² + -</a:t>
+            </a:r>
+            <a:r>
+              <a:rPr lang="en-GB" sz="1400" dirty="0">
+                <a:solidFill>
+                  <a:srgbClr val="A41AE4"/>
+                </a:solidFill>
+              </a:rPr>
+              <a:t>0.55</a:t>
+            </a:r>
+            <a:r>
+              <a:rPr lang="en-GB" sz="1400" b="0" i="0" dirty="0">
+                <a:solidFill>
+                  <a:srgbClr val="A41AE4"/>
+                </a:solidFill>
+                <a:effectLst/>
+                <a:latin typeface="-apple-system"/>
+              </a:rPr>
+              <a:t>²</a:t>
+            </a:r>
+            <a:r>
+              <a:rPr lang="en-GB" sz="1400" dirty="0">
+                <a:solidFill>
+                  <a:srgbClr val="A41AE4"/>
+                </a:solidFill>
+              </a:rPr>
+              <a:t> = </a:t>
+            </a:r>
+            <a:r>
+              <a:rPr lang="en-GB" sz="1400" dirty="0" err="1">
+                <a:solidFill>
+                  <a:srgbClr val="A41AE4"/>
+                </a:solidFill>
+              </a:rPr>
+              <a:t>approx</a:t>
+            </a:r>
+            <a:r>
+              <a:rPr lang="en-GB" sz="1400" dirty="0">
+                <a:solidFill>
+                  <a:srgbClr val="A41AE4"/>
+                </a:solidFill>
+              </a:rPr>
+              <a:t> 0.30</a:t>
+            </a:r>
+          </a:p>
+          <a:p>
+            <a:r>
+              <a:rPr lang="en-GB" sz="1400" dirty="0">
+                <a:solidFill>
+                  <a:srgbClr val="A41AE4"/>
+                </a:solidFill>
+              </a:rPr>
+              <a:t>30% of the variance in item 6 is explained by this 2 Factor solution</a:t>
+            </a:r>
+          </a:p>
+        </p:txBody>
+      </p:sp>
+      <p:sp>
+        <p:nvSpPr>
+          <p:cNvPr id="2" name="Rectangle 1">
+            <a:extLst>
+              <a:ext uri="{FF2B5EF4-FFF2-40B4-BE49-F238E27FC236}">
+                <a16:creationId xmlns:a16="http://schemas.microsoft.com/office/drawing/2014/main" id="{973AA02F-BB14-4BEB-A454-A7473E202E72}"/>
               </a:ext>
             </a:extLst>
           </p:cNvPr>
@@ -9202,9 +13213,9 @@
           <p:nvPr/>
         </p:nvSpPr>
         <p:spPr>
-          <a:xfrm flipV="1">
-            <a:off x="5410199" y="4508499"/>
-            <a:ext cx="1112287" cy="238796"/>
+          <a:xfrm>
+            <a:off x="5067300" y="1536701"/>
+            <a:ext cx="584200" cy="2108200"/>
           </a:xfrm>
           <a:prstGeom prst="rect">
             <a:avLst/>
@@ -9246,7 +13257,7 @@
           <p:cNvPr id="5" name="Picture 4">
             <a:extLst>
               <a:ext uri="{FF2B5EF4-FFF2-40B4-BE49-F238E27FC236}">
-                <a16:creationId xmlns:a16="http://schemas.microsoft.com/office/drawing/2014/main" id="{43A28AA3-C0E9-4930-B515-641C28016221}"/>
+                <a16:creationId xmlns:a16="http://schemas.microsoft.com/office/drawing/2014/main" id="{55E84974-7B99-44B6-95DB-0AE9672C2C10}"/>
               </a:ext>
             </a:extLst>
           </p:cNvPr>
@@ -9273,10 +13284,10 @@
       </p:pic>
       <p:sp>
         <p:nvSpPr>
-          <p:cNvPr id="6" name="TextBox 5">
-            <a:extLst>
-              <a:ext uri="{FF2B5EF4-FFF2-40B4-BE49-F238E27FC236}">
-                <a16:creationId xmlns:a16="http://schemas.microsoft.com/office/drawing/2014/main" id="{89EA3848-CDA2-4120-9FB3-C7588774A641}"/>
+          <p:cNvPr id="7" name="TextBox 6">
+            <a:extLst>
+              <a:ext uri="{FF2B5EF4-FFF2-40B4-BE49-F238E27FC236}">
+                <a16:creationId xmlns:a16="http://schemas.microsoft.com/office/drawing/2014/main" id="{00BCC5D6-B545-47FA-A82A-A3583E5DFB59}"/>
               </a:ext>
             </a:extLst>
           </p:cNvPr>
@@ -9305,7 +13316,7 @@
                   <a:srgbClr val="A41AE4"/>
                 </a:solidFill>
               </a:rPr>
-              <a:t>SS Loadings &amp; “Variance Accounted For”</a:t>
+              <a:t>COMMUNALITIES</a:t>
             </a:r>
           </a:p>
         </p:txBody>
@@ -9313,7 +13324,7 @@
     </p:spTree>
     <p:extLst>
       <p:ext uri="{BB962C8B-B14F-4D97-AF65-F5344CB8AC3E}">
-        <p14:creationId xmlns:p14="http://schemas.microsoft.com/office/powerpoint/2010/main" val="1147962777"/>
+        <p14:creationId xmlns:p14="http://schemas.microsoft.com/office/powerpoint/2010/main" val="1182809476"/>
       </p:ext>
     </p:extLst>
   </p:cSld>
@@ -9342,10 +13353,10 @@
       </p:grpSpPr>
       <p:pic>
         <p:nvPicPr>
-          <p:cNvPr id="8" name="Picture 7">
-            <a:extLst>
-              <a:ext uri="{FF2B5EF4-FFF2-40B4-BE49-F238E27FC236}">
-                <a16:creationId xmlns:a16="http://schemas.microsoft.com/office/drawing/2014/main" id="{8F00BBA9-B735-4D99-AF46-7911E29D27D1}"/>
+          <p:cNvPr id="10" name="Picture 9">
+            <a:extLst>
+              <a:ext uri="{FF2B5EF4-FFF2-40B4-BE49-F238E27FC236}">
+                <a16:creationId xmlns:a16="http://schemas.microsoft.com/office/drawing/2014/main" id="{B3F4931C-F9FB-440B-B1BA-4D66E0860170}"/>
               </a:ext>
             </a:extLst>
           </p:cNvPr>
@@ -9372,10 +13383,10 @@
       </p:pic>
       <p:sp>
         <p:nvSpPr>
-          <p:cNvPr id="13" name="TextBox 12">
-            <a:extLst>
-              <a:ext uri="{FF2B5EF4-FFF2-40B4-BE49-F238E27FC236}">
-                <a16:creationId xmlns:a16="http://schemas.microsoft.com/office/drawing/2014/main" id="{03CBD6FB-C8E6-421C-B8D7-63487AB7B81B}"/>
+          <p:cNvPr id="11" name="TextBox 10">
+            <a:extLst>
+              <a:ext uri="{FF2B5EF4-FFF2-40B4-BE49-F238E27FC236}">
+                <a16:creationId xmlns:a16="http://schemas.microsoft.com/office/drawing/2014/main" id="{493E50EB-A39A-4313-86FF-0F97860C9441}"/>
               </a:ext>
             </a:extLst>
           </p:cNvPr>
@@ -9384,8 +13395,8 @@
         </p:nvSpPr>
         <p:spPr>
           <a:xfrm>
-            <a:off x="7329758" y="3895699"/>
-            <a:ext cx="3973242" cy="1631216"/>
+            <a:off x="7338602" y="1409822"/>
+            <a:ext cx="4281898" cy="1354217"/>
           </a:xfrm>
           <a:prstGeom prst="rect">
             <a:avLst/>
@@ -9404,7 +13415,23 @@
                   <a:srgbClr val="A41AE4"/>
                 </a:solidFill>
               </a:rPr>
-              <a:t>Out of the total variance explained by all factors, we can calculate the proportion of this that is explained by each factor. </a:t>
+              <a:t>The proportion of variance in each item that is left </a:t>
+            </a:r>
+            <a:r>
+              <a:rPr lang="en-GB" i="1" dirty="0">
+                <a:solidFill>
+                  <a:srgbClr val="A41AE4"/>
+                </a:solidFill>
+              </a:rPr>
+              <a:t>unexplained</a:t>
+            </a:r>
+            <a:r>
+              <a:rPr lang="en-GB" dirty="0">
+                <a:solidFill>
+                  <a:srgbClr val="A41AE4"/>
+                </a:solidFill>
+              </a:rPr>
+              <a:t> by the factors is 1 minus the communality. </a:t>
             </a:r>
           </a:p>
           <a:p>
@@ -9414,34 +13441,27 @@
                   <a:srgbClr val="A41AE4"/>
                 </a:solidFill>
               </a:rPr>
-              <a:t>e.g., 0.19/0.33 = 0.57</a:t>
-            </a:r>
-          </a:p>
-          <a:p>
-            <a:endParaRPr lang="en-GB" sz="1400" dirty="0">
-              <a:solidFill>
-                <a:srgbClr val="A41AE4"/>
-              </a:solidFill>
-            </a:endParaRPr>
-          </a:p>
-          <a:p>
-            <a:r>
-              <a:rPr lang="en-GB" dirty="0">
-                <a:solidFill>
-                  <a:srgbClr val="A41AE4"/>
-                </a:solidFill>
-              </a:rPr>
-              <a:t>We can see this cumulatively too</a:t>
-            </a:r>
-          </a:p>
-        </p:txBody>
-      </p:sp>
-      <p:sp>
-        <p:nvSpPr>
-          <p:cNvPr id="3" name="Rectangle 2">
-            <a:extLst>
-              <a:ext uri="{FF2B5EF4-FFF2-40B4-BE49-F238E27FC236}">
-                <a16:creationId xmlns:a16="http://schemas.microsoft.com/office/drawing/2014/main" id="{5C0699FC-5F6A-463E-8040-0B41C1910E71}"/>
+              <a:t>e.g., 1 - 0.30 = 0.70</a:t>
+            </a:r>
+          </a:p>
+          <a:p>
+            <a:r>
+              <a:rPr lang="en-GB" sz="1400" dirty="0">
+                <a:solidFill>
+                  <a:srgbClr val="A41AE4"/>
+                </a:solidFill>
+              </a:rPr>
+              <a:t>70% of the variance in item 6 is left unexplained</a:t>
+            </a:r>
+          </a:p>
+        </p:txBody>
+      </p:sp>
+      <p:sp>
+        <p:nvSpPr>
+          <p:cNvPr id="7" name="Rectangle 6">
+            <a:extLst>
+              <a:ext uri="{FF2B5EF4-FFF2-40B4-BE49-F238E27FC236}">
+                <a16:creationId xmlns:a16="http://schemas.microsoft.com/office/drawing/2014/main" id="{784F6F5B-D766-4856-B749-EDD476E6C58D}"/>
               </a:ext>
             </a:extLst>
           </p:cNvPr>
@@ -9449,9 +13469,9 @@
           <p:nvPr/>
         </p:nvSpPr>
         <p:spPr>
-          <a:xfrm flipV="1">
-            <a:off x="5410199" y="4724400"/>
-            <a:ext cx="1112287" cy="480095"/>
+          <a:xfrm>
+            <a:off x="5626100" y="1536701"/>
+            <a:ext cx="584200" cy="2108200"/>
           </a:xfrm>
           <a:prstGeom prst="rect">
             <a:avLst/>
@@ -9493,7 +13513,7 @@
           <p:cNvPr id="5" name="Picture 4">
             <a:extLst>
               <a:ext uri="{FF2B5EF4-FFF2-40B4-BE49-F238E27FC236}">
-                <a16:creationId xmlns:a16="http://schemas.microsoft.com/office/drawing/2014/main" id="{1B864036-784F-4D0F-91CA-91DC2F7E024E}"/>
+                <a16:creationId xmlns:a16="http://schemas.microsoft.com/office/drawing/2014/main" id="{B88D991B-8CBA-4FA2-8D4D-27BF186BF096}"/>
               </a:ext>
             </a:extLst>
           </p:cNvPr>
@@ -9520,10 +13540,10 @@
       </p:pic>
       <p:sp>
         <p:nvSpPr>
-          <p:cNvPr id="6" name="TextBox 5">
-            <a:extLst>
-              <a:ext uri="{FF2B5EF4-FFF2-40B4-BE49-F238E27FC236}">
-                <a16:creationId xmlns:a16="http://schemas.microsoft.com/office/drawing/2014/main" id="{172AD8B4-F980-452B-8509-A29BA1A8D10A}"/>
+          <p:cNvPr id="8" name="TextBox 7">
+            <a:extLst>
+              <a:ext uri="{FF2B5EF4-FFF2-40B4-BE49-F238E27FC236}">
+                <a16:creationId xmlns:a16="http://schemas.microsoft.com/office/drawing/2014/main" id="{E35F28DC-BFB5-4A99-96DD-FCB2CFBB942D}"/>
               </a:ext>
             </a:extLst>
           </p:cNvPr>
@@ -9552,7 +13572,7 @@
                   <a:srgbClr val="A41AE4"/>
                 </a:solidFill>
               </a:rPr>
-              <a:t>SS Loadings &amp; “Variance Accounted For”</a:t>
+              <a:t>UNIQUENESS</a:t>
             </a:r>
           </a:p>
         </p:txBody>
@@ -9560,7 +13580,7 @@
     </p:spTree>
     <p:extLst>
       <p:ext uri="{BB962C8B-B14F-4D97-AF65-F5344CB8AC3E}">
-        <p14:creationId xmlns:p14="http://schemas.microsoft.com/office/powerpoint/2010/main" val="744628610"/>
+        <p14:creationId xmlns:p14="http://schemas.microsoft.com/office/powerpoint/2010/main" val="1158259338"/>
       </p:ext>
     </p:extLst>
   </p:cSld>
